--- a/ppt/Grade06/G06_S53_Light_2.pptx
+++ b/ppt/Grade06/G06_S53_Light_2.pptx
@@ -5022,7 +5022,7 @@
                 </a:solidFill>
                 <a:latin typeface="Calibri"/>
               </a:rPr>
-              <a:t>Q1 — Pinhole</a:t>
+              <a:t>Q1 - Pinhole</a:t>
             </a:r>
           </a:p>
         </p:txBody>
@@ -5318,7 +5318,7 @@
         <p:spPr>
           <a:xfrm>
             <a:off x="1508760" y="3749039"/>
-            <a:ext cx="4297680" cy="868680"/>
+            <a:ext cx="3840480" cy="868680"/>
           </a:xfrm>
           <a:prstGeom prst="rect">
             <a:avLst/>
@@ -5478,7 +5478,7 @@
         <p:spPr>
           <a:xfrm>
             <a:off x="7040880" y="3749039"/>
-            <a:ext cx="4297680" cy="868680"/>
+            <a:ext cx="3840480" cy="868680"/>
           </a:xfrm>
           <a:prstGeom prst="rect">
             <a:avLst/>
@@ -5638,7 +5638,7 @@
         <p:spPr>
           <a:xfrm>
             <a:off x="1508760" y="4782312"/>
-            <a:ext cx="4297680" cy="868680"/>
+            <a:ext cx="3840480" cy="868680"/>
           </a:xfrm>
           <a:prstGeom prst="rect">
             <a:avLst/>
@@ -5798,7 +5798,7 @@
         <p:spPr>
           <a:xfrm>
             <a:off x="7040880" y="4782312"/>
-            <a:ext cx="4297680" cy="868680"/>
+            <a:ext cx="3840480" cy="868680"/>
           </a:xfrm>
           <a:prstGeom prst="rect">
             <a:avLst/>
@@ -5865,7 +5865,7 @@
             <a:avLst/>
           </a:prstGeom>
           <a:solidFill>
-            <a:srgbClr val="2A9D8F"/>
+            <a:srgbClr val="0A9396"/>
           </a:solidFill>
           <a:ln>
             <a:noFill/>
@@ -5920,11 +5920,11 @@
             <a:r>
               <a:rPr sz="1300" b="1" i="0">
                 <a:solidFill>
-                  <a:srgbClr val="2A9D8F"/>
+                  <a:srgbClr val="0A9396"/>
                 </a:solidFill>
                 <a:latin typeface="Arial"/>
               </a:rPr>
-              <a:t>ANSWER REVEAL</a:t>
+              <a:t>QUIZ QUESTION</a:t>
             </a:r>
           </a:p>
         </p:txBody>
@@ -5959,7 +5959,7 @@
                 </a:solidFill>
                 <a:latin typeface="Calibri"/>
               </a:rPr>
-              <a:t>Q1 — Answer</a:t>
+              <a:t>Q1 - Pinhole</a:t>
             </a:r>
           </a:p>
         </p:txBody>
@@ -6048,166 +6048,6 @@
           <a:prstGeom prst="roundRect">
             <a:avLst>
               <a:gd name="adj" fmla="val 4000"/>
-            </a:avLst>
-          </a:prstGeom>
-          <a:solidFill>
-            <a:srgbClr val="E9F5F0"/>
-          </a:solidFill>
-          <a:ln>
-            <a:noFill/>
-          </a:ln>
-          <a:effectLst/>
-        </p:spPr>
-        <p:style>
-          <a:lnRef idx="1">
-            <a:schemeClr val="accent1"/>
-          </a:lnRef>
-          <a:fillRef idx="3">
-            <a:schemeClr val="accent1"/>
-          </a:fillRef>
-          <a:effectRef idx="2">
-            <a:schemeClr val="accent1"/>
-          </a:effectRef>
-          <a:fontRef idx="minor">
-            <a:schemeClr val="lt1"/>
-          </a:fontRef>
-        </p:style>
-        <p:txBody>
-          <a:bodyPr rtlCol="0" anchor="ctr"/>
-          <a:lstStyle/>
-          <a:p>
-            <a:pPr algn="ctr"/>
-          </a:p>
-        </p:txBody>
-      </p:sp>
-      <p:sp>
-        <p:nvSpPr>
-          <p:cNvPr id="8" name="Oval 7"/>
-          <p:cNvSpPr/>
-          <p:nvPr/>
-        </p:nvSpPr>
-        <p:spPr>
-          <a:xfrm>
-            <a:off x="1005840" y="2240280"/>
-            <a:ext cx="731520" cy="731520"/>
-          </a:xfrm>
-          <a:prstGeom prst="ellipse">
-            <a:avLst/>
-          </a:prstGeom>
-          <a:solidFill>
-            <a:srgbClr val="2A9D8F"/>
-          </a:solidFill>
-          <a:ln>
-            <a:noFill/>
-          </a:ln>
-          <a:effectLst/>
-        </p:spPr>
-        <p:style>
-          <a:lnRef idx="1">
-            <a:schemeClr val="accent1"/>
-          </a:lnRef>
-          <a:fillRef idx="3">
-            <a:schemeClr val="accent1"/>
-          </a:fillRef>
-          <a:effectRef idx="2">
-            <a:schemeClr val="accent1"/>
-          </a:effectRef>
-          <a:fontRef idx="minor">
-            <a:schemeClr val="lt1"/>
-          </a:fontRef>
-        </p:style>
-        <p:txBody>
-          <a:bodyPr rtlCol="0" anchor="ctr"/>
-          <a:lstStyle/>
-          <a:p>
-            <a:pPr algn="ctr"/>
-          </a:p>
-        </p:txBody>
-      </p:sp>
-      <p:sp>
-        <p:nvSpPr>
-          <p:cNvPr id="9" name="TextBox 8"/>
-          <p:cNvSpPr txBox="1"/>
-          <p:nvPr/>
-        </p:nvSpPr>
-        <p:spPr>
-          <a:xfrm>
-            <a:off x="1005840" y="2240280"/>
-            <a:ext cx="731520" cy="731520"/>
-          </a:xfrm>
-          <a:prstGeom prst="rect">
-            <a:avLst/>
-          </a:prstGeom>
-          <a:noFill/>
-        </p:spPr>
-        <p:txBody>
-          <a:bodyPr wrap="square" anchor="ctr" lIns="0" rIns="0" tIns="0" bIns="0">
-            <a:spAutoFit/>
-          </a:bodyPr>
-          <a:lstStyle/>
-          <a:p>
-            <a:pPr algn="ctr"/>
-            <a:r>
-              <a:rPr sz="3000" b="1" i="0">
-                <a:solidFill>
-                  <a:srgbClr val="FFFFFF"/>
-                </a:solidFill>
-                <a:latin typeface="Calibri"/>
-              </a:rPr>
-              <a:t>✓</a:t>
-            </a:r>
-          </a:p>
-        </p:txBody>
-      </p:sp>
-      <p:sp>
-        <p:nvSpPr>
-          <p:cNvPr id="10" name="TextBox 9"/>
-          <p:cNvSpPr txBox="1"/>
-          <p:nvPr/>
-        </p:nvSpPr>
-        <p:spPr>
-          <a:xfrm>
-            <a:off x="1920240" y="1828800"/>
-            <a:ext cx="9326880" cy="1554480"/>
-          </a:xfrm>
-          <a:prstGeom prst="rect">
-            <a:avLst/>
-          </a:prstGeom>
-          <a:noFill/>
-        </p:spPr>
-        <p:txBody>
-          <a:bodyPr wrap="square" anchor="ctr" lIns="0" rIns="0" tIns="0" bIns="0">
-            <a:spAutoFit/>
-          </a:bodyPr>
-          <a:lstStyle/>
-          <a:p>
-            <a:pPr algn="l"/>
-            <a:r>
-              <a:rPr sz="2200" b="1" i="0">
-                <a:solidFill>
-                  <a:srgbClr val="1D2433"/>
-                </a:solidFill>
-                <a:latin typeface="Calibri"/>
-              </a:rPr>
-              <a:t>B. Inverted and real</a:t>
-            </a:r>
-          </a:p>
-        </p:txBody>
-      </p:sp>
-      <p:sp>
-        <p:nvSpPr>
-          <p:cNvPr id="11" name="Rounded Rectangle 10"/>
-          <p:cNvSpPr/>
-          <p:nvPr/>
-        </p:nvSpPr>
-        <p:spPr>
-          <a:xfrm>
-            <a:off x="640080" y="3657600"/>
-            <a:ext cx="10881360" cy="2011680"/>
-          </a:xfrm>
-          <a:prstGeom prst="roundRect">
-            <a:avLst>
-              <a:gd name="adj" fmla="val 3000"/>
             </a:avLst>
           </a:prstGeom>
           <a:solidFill>
@@ -6248,68 +6088,840 @@
       </p:sp>
       <p:sp>
         <p:nvSpPr>
+          <p:cNvPr id="8" name="TextBox 7"/>
+          <p:cNvSpPr txBox="1"/>
+          <p:nvPr/>
+        </p:nvSpPr>
+        <p:spPr>
+          <a:xfrm>
+            <a:off x="1005840" y="1828800"/>
+            <a:ext cx="10149840" cy="1554480"/>
+          </a:xfrm>
+          <a:prstGeom prst="rect">
+            <a:avLst/>
+          </a:prstGeom>
+          <a:noFill/>
+        </p:spPr>
+        <p:txBody>
+          <a:bodyPr wrap="square" anchor="ctr" lIns="0" rIns="0" tIns="0" bIns="0">
+            <a:spAutoFit/>
+          </a:bodyPr>
+          <a:lstStyle/>
+          <a:p>
+            <a:pPr algn="l"/>
+            <a:r>
+              <a:rPr sz="1900" b="1" i="0">
+                <a:solidFill>
+                  <a:srgbClr val="1D2433"/>
+                </a:solidFill>
+                <a:latin typeface="Calibri"/>
+              </a:rPr>
+              <a:t>The image formed by a pinhole camera is always:</a:t>
+            </a:r>
+          </a:p>
+        </p:txBody>
+      </p:sp>
+      <p:sp>
+        <p:nvSpPr>
+          <p:cNvPr id="9" name="Rounded Rectangle 8"/>
+          <p:cNvSpPr/>
+          <p:nvPr/>
+        </p:nvSpPr>
+        <p:spPr>
+          <a:xfrm>
+            <a:off x="640080" y="3749039"/>
+            <a:ext cx="5349240" cy="868680"/>
+          </a:xfrm>
+          <a:prstGeom prst="roundRect">
+            <a:avLst>
+              <a:gd name="adj" fmla="val 12000"/>
+            </a:avLst>
+          </a:prstGeom>
+          <a:solidFill>
+            <a:srgbClr val="EAF1F4"/>
+          </a:solidFill>
+          <a:ln>
+            <a:noFill/>
+          </a:ln>
+          <a:effectLst/>
+        </p:spPr>
+        <p:style>
+          <a:lnRef idx="1">
+            <a:schemeClr val="accent1"/>
+          </a:lnRef>
+          <a:fillRef idx="3">
+            <a:schemeClr val="accent1"/>
+          </a:fillRef>
+          <a:effectRef idx="2">
+            <a:schemeClr val="accent1"/>
+          </a:effectRef>
+          <a:fontRef idx="minor">
+            <a:schemeClr val="lt1"/>
+          </a:fontRef>
+        </p:style>
+        <p:txBody>
+          <a:bodyPr rtlCol="0" anchor="ctr"/>
+          <a:lstStyle/>
+          <a:p>
+            <a:pPr algn="ctr"/>
+          </a:p>
+        </p:txBody>
+      </p:sp>
+      <p:sp>
+        <p:nvSpPr>
+          <p:cNvPr id="10" name="Oval 9"/>
+          <p:cNvSpPr/>
+          <p:nvPr/>
+        </p:nvSpPr>
+        <p:spPr>
+          <a:xfrm>
+            <a:off x="914400" y="3977639"/>
+            <a:ext cx="411480" cy="411480"/>
+          </a:xfrm>
+          <a:prstGeom prst="ellipse">
+            <a:avLst/>
+          </a:prstGeom>
+          <a:solidFill>
+            <a:srgbClr val="0A9396"/>
+          </a:solidFill>
+          <a:ln>
+            <a:noFill/>
+          </a:ln>
+          <a:effectLst/>
+        </p:spPr>
+        <p:style>
+          <a:lnRef idx="1">
+            <a:schemeClr val="accent1"/>
+          </a:lnRef>
+          <a:fillRef idx="3">
+            <a:schemeClr val="accent1"/>
+          </a:fillRef>
+          <a:effectRef idx="2">
+            <a:schemeClr val="accent1"/>
+          </a:effectRef>
+          <a:fontRef idx="minor">
+            <a:schemeClr val="lt1"/>
+          </a:fontRef>
+        </p:style>
+        <p:txBody>
+          <a:bodyPr rtlCol="0" anchor="ctr"/>
+          <a:lstStyle/>
+          <a:p>
+            <a:pPr algn="ctr"/>
+          </a:p>
+        </p:txBody>
+      </p:sp>
+      <p:sp>
+        <p:nvSpPr>
+          <p:cNvPr id="11" name="TextBox 10"/>
+          <p:cNvSpPr txBox="1"/>
+          <p:nvPr/>
+        </p:nvSpPr>
+        <p:spPr>
+          <a:xfrm>
+            <a:off x="914400" y="3977639"/>
+            <a:ext cx="411480" cy="411480"/>
+          </a:xfrm>
+          <a:prstGeom prst="rect">
+            <a:avLst/>
+          </a:prstGeom>
+          <a:noFill/>
+        </p:spPr>
+        <p:txBody>
+          <a:bodyPr wrap="square" anchor="ctr" lIns="0" rIns="0" tIns="0" bIns="0">
+            <a:spAutoFit/>
+          </a:bodyPr>
+          <a:lstStyle/>
+          <a:p>
+            <a:pPr algn="ctr"/>
+            <a:r>
+              <a:rPr sz="1400" b="1" i="0">
+                <a:solidFill>
+                  <a:srgbClr val="FFFFFF"/>
+                </a:solidFill>
+                <a:latin typeface="Calibri"/>
+              </a:rPr>
+              <a:t>A</a:t>
+            </a:r>
+          </a:p>
+        </p:txBody>
+      </p:sp>
+      <p:sp>
+        <p:nvSpPr>
           <p:cNvPr id="12" name="TextBox 11"/>
           <p:cNvSpPr txBox="1"/>
           <p:nvPr/>
         </p:nvSpPr>
         <p:spPr>
           <a:xfrm>
-            <a:off x="1005840" y="3886200"/>
-            <a:ext cx="4572000" cy="365760"/>
-          </a:xfrm>
-          <a:prstGeom prst="rect">
-            <a:avLst/>
-          </a:prstGeom>
-          <a:noFill/>
-        </p:spPr>
-        <p:txBody>
-          <a:bodyPr wrap="square" anchor="t" lIns="0" rIns="0" tIns="0" bIns="0">
+            <a:off x="1508760" y="3749039"/>
+            <a:ext cx="3840480" cy="868680"/>
+          </a:xfrm>
+          <a:prstGeom prst="rect">
+            <a:avLst/>
+          </a:prstGeom>
+          <a:noFill/>
+        </p:spPr>
+        <p:txBody>
+          <a:bodyPr wrap="square" anchor="ctr" lIns="0" rIns="0" tIns="0" bIns="0">
             <a:spAutoFit/>
           </a:bodyPr>
           <a:lstStyle/>
           <a:p>
             <a:pPr algn="l"/>
             <a:r>
+              <a:rPr sz="1450" b="0" i="0">
+                <a:solidFill>
+                  <a:srgbClr val="1D2433"/>
+                </a:solidFill>
+                <a:latin typeface="Calibri"/>
+              </a:rPr>
+              <a:t>Upright and real</a:t>
+            </a:r>
+          </a:p>
+        </p:txBody>
+      </p:sp>
+      <p:sp>
+        <p:nvSpPr>
+          <p:cNvPr id="13" name="Rounded Rectangle 12"/>
+          <p:cNvSpPr/>
+          <p:nvPr/>
+        </p:nvSpPr>
+        <p:spPr>
+          <a:xfrm>
+            <a:off x="6172200" y="3749039"/>
+            <a:ext cx="5349240" cy="868680"/>
+          </a:xfrm>
+          <a:prstGeom prst="roundRect">
+            <a:avLst>
+              <a:gd name="adj" fmla="val 12000"/>
+            </a:avLst>
+          </a:prstGeom>
+          <a:solidFill>
+            <a:srgbClr val="E9F5F0"/>
+          </a:solidFill>
+          <a:ln w="31750">
+            <a:solidFill>
+              <a:srgbClr val="2A9D8F"/>
+            </a:solidFill>
+          </a:ln>
+          <a:effectLst/>
+        </p:spPr>
+        <p:style>
+          <a:lnRef idx="1">
+            <a:schemeClr val="accent1"/>
+          </a:lnRef>
+          <a:fillRef idx="3">
+            <a:schemeClr val="accent1"/>
+          </a:fillRef>
+          <a:effectRef idx="2">
+            <a:schemeClr val="accent1"/>
+          </a:effectRef>
+          <a:fontRef idx="minor">
+            <a:schemeClr val="lt1"/>
+          </a:fontRef>
+        </p:style>
+        <p:txBody>
+          <a:bodyPr rtlCol="0" anchor="ctr"/>
+          <a:lstStyle/>
+          <a:p>
+            <a:pPr algn="ctr"/>
+          </a:p>
+        </p:txBody>
+      </p:sp>
+      <p:sp>
+        <p:nvSpPr>
+          <p:cNvPr id="14" name="Oval 13"/>
+          <p:cNvSpPr/>
+          <p:nvPr/>
+        </p:nvSpPr>
+        <p:spPr>
+          <a:xfrm>
+            <a:off x="6446520" y="3977639"/>
+            <a:ext cx="411480" cy="411480"/>
+          </a:xfrm>
+          <a:prstGeom prst="ellipse">
+            <a:avLst/>
+          </a:prstGeom>
+          <a:solidFill>
+            <a:srgbClr val="2A9D8F"/>
+          </a:solidFill>
+          <a:ln>
+            <a:noFill/>
+          </a:ln>
+          <a:effectLst/>
+        </p:spPr>
+        <p:style>
+          <a:lnRef idx="1">
+            <a:schemeClr val="accent1"/>
+          </a:lnRef>
+          <a:fillRef idx="3">
+            <a:schemeClr val="accent1"/>
+          </a:fillRef>
+          <a:effectRef idx="2">
+            <a:schemeClr val="accent1"/>
+          </a:effectRef>
+          <a:fontRef idx="minor">
+            <a:schemeClr val="lt1"/>
+          </a:fontRef>
+        </p:style>
+        <p:txBody>
+          <a:bodyPr rtlCol="0" anchor="ctr"/>
+          <a:lstStyle/>
+          <a:p>
+            <a:pPr algn="ctr"/>
+          </a:p>
+        </p:txBody>
+      </p:sp>
+      <p:sp>
+        <p:nvSpPr>
+          <p:cNvPr id="15" name="TextBox 14"/>
+          <p:cNvSpPr txBox="1"/>
+          <p:nvPr/>
+        </p:nvSpPr>
+        <p:spPr>
+          <a:xfrm>
+            <a:off x="6446520" y="3977639"/>
+            <a:ext cx="411480" cy="411480"/>
+          </a:xfrm>
+          <a:prstGeom prst="rect">
+            <a:avLst/>
+          </a:prstGeom>
+          <a:noFill/>
+        </p:spPr>
+        <p:txBody>
+          <a:bodyPr wrap="square" anchor="ctr" lIns="0" rIns="0" tIns="0" bIns="0">
+            <a:spAutoFit/>
+          </a:bodyPr>
+          <a:lstStyle/>
+          <a:p>
+            <a:pPr algn="ctr"/>
+            <a:r>
               <a:rPr sz="1400" b="1" i="0">
                 <a:solidFill>
+                  <a:srgbClr val="FFFFFF"/>
+                </a:solidFill>
+                <a:latin typeface="Calibri"/>
+              </a:rPr>
+              <a:t>B</a:t>
+            </a:r>
+          </a:p>
+        </p:txBody>
+      </p:sp>
+      <p:sp>
+        <p:nvSpPr>
+          <p:cNvPr id="16" name="TextBox 15"/>
+          <p:cNvSpPr txBox="1"/>
+          <p:nvPr/>
+        </p:nvSpPr>
+        <p:spPr>
+          <a:xfrm>
+            <a:off x="7040880" y="3749039"/>
+            <a:ext cx="3840480" cy="868680"/>
+          </a:xfrm>
+          <a:prstGeom prst="rect">
+            <a:avLst/>
+          </a:prstGeom>
+          <a:noFill/>
+        </p:spPr>
+        <p:txBody>
+          <a:bodyPr wrap="square" anchor="ctr" lIns="0" rIns="0" tIns="0" bIns="0">
+            <a:spAutoFit/>
+          </a:bodyPr>
+          <a:lstStyle/>
+          <a:p>
+            <a:pPr algn="l"/>
+            <a:r>
+              <a:rPr sz="1450" b="1" i="0">
+                <a:solidFill>
+                  <a:srgbClr val="1D2433"/>
+                </a:solidFill>
+                <a:latin typeface="Calibri"/>
+              </a:rPr>
+              <a:t>Inverted and real</a:t>
+            </a:r>
+          </a:p>
+        </p:txBody>
+      </p:sp>
+      <p:sp>
+        <p:nvSpPr>
+          <p:cNvPr id="17" name="Oval 16"/>
+          <p:cNvSpPr/>
+          <p:nvPr/>
+        </p:nvSpPr>
+        <p:spPr>
+          <a:xfrm>
+            <a:off x="10972800" y="3995927"/>
+            <a:ext cx="365760" cy="365760"/>
+          </a:xfrm>
+          <a:prstGeom prst="ellipse">
+            <a:avLst/>
+          </a:prstGeom>
+          <a:solidFill>
+            <a:srgbClr val="2A9D8F"/>
+          </a:solidFill>
+          <a:ln>
+            <a:noFill/>
+          </a:ln>
+          <a:effectLst/>
+        </p:spPr>
+        <p:style>
+          <a:lnRef idx="1">
+            <a:schemeClr val="accent1"/>
+          </a:lnRef>
+          <a:fillRef idx="3">
+            <a:schemeClr val="accent1"/>
+          </a:fillRef>
+          <a:effectRef idx="2">
+            <a:schemeClr val="accent1"/>
+          </a:effectRef>
+          <a:fontRef idx="minor">
+            <a:schemeClr val="lt1"/>
+          </a:fontRef>
+        </p:style>
+        <p:txBody>
+          <a:bodyPr rtlCol="0" anchor="ctr"/>
+          <a:lstStyle/>
+          <a:p>
+            <a:pPr algn="ctr"/>
+          </a:p>
+        </p:txBody>
+      </p:sp>
+      <p:sp>
+        <p:nvSpPr>
+          <p:cNvPr id="18" name="TextBox 17"/>
+          <p:cNvSpPr txBox="1"/>
+          <p:nvPr/>
+        </p:nvSpPr>
+        <p:spPr>
+          <a:xfrm>
+            <a:off x="10972800" y="3950207"/>
+            <a:ext cx="365760" cy="365760"/>
+          </a:xfrm>
+          <a:prstGeom prst="rect">
+            <a:avLst/>
+          </a:prstGeom>
+          <a:noFill/>
+        </p:spPr>
+        <p:txBody>
+          <a:bodyPr wrap="square" anchor="ctr" lIns="0" rIns="0" tIns="0" bIns="0">
+            <a:spAutoFit/>
+          </a:bodyPr>
+          <a:lstStyle/>
+          <a:p>
+            <a:pPr algn="ctr"/>
+            <a:r>
+              <a:rPr sz="1600" b="1" i="0">
+                <a:solidFill>
+                  <a:srgbClr val="FFFFFF"/>
+                </a:solidFill>
+                <a:latin typeface="Calibri"/>
+              </a:rPr>
+              <a:t>✓</a:t>
+            </a:r>
+          </a:p>
+        </p:txBody>
+      </p:sp>
+      <p:sp>
+        <p:nvSpPr>
+          <p:cNvPr id="19" name="Rounded Rectangle 18"/>
+          <p:cNvSpPr/>
+          <p:nvPr/>
+        </p:nvSpPr>
+        <p:spPr>
+          <a:xfrm>
+            <a:off x="640080" y="4782312"/>
+            <a:ext cx="5349240" cy="868680"/>
+          </a:xfrm>
+          <a:prstGeom prst="roundRect">
+            <a:avLst>
+              <a:gd name="adj" fmla="val 12000"/>
+            </a:avLst>
+          </a:prstGeom>
+          <a:solidFill>
+            <a:srgbClr val="EAF1F4"/>
+          </a:solidFill>
+          <a:ln>
+            <a:noFill/>
+          </a:ln>
+          <a:effectLst/>
+        </p:spPr>
+        <p:style>
+          <a:lnRef idx="1">
+            <a:schemeClr val="accent1"/>
+          </a:lnRef>
+          <a:fillRef idx="3">
+            <a:schemeClr val="accent1"/>
+          </a:fillRef>
+          <a:effectRef idx="2">
+            <a:schemeClr val="accent1"/>
+          </a:effectRef>
+          <a:fontRef idx="minor">
+            <a:schemeClr val="lt1"/>
+          </a:fontRef>
+        </p:style>
+        <p:txBody>
+          <a:bodyPr rtlCol="0" anchor="ctr"/>
+          <a:lstStyle/>
+          <a:p>
+            <a:pPr algn="ctr"/>
+          </a:p>
+        </p:txBody>
+      </p:sp>
+      <p:sp>
+        <p:nvSpPr>
+          <p:cNvPr id="20" name="Oval 19"/>
+          <p:cNvSpPr/>
+          <p:nvPr/>
+        </p:nvSpPr>
+        <p:spPr>
+          <a:xfrm>
+            <a:off x="914400" y="5010912"/>
+            <a:ext cx="411480" cy="411480"/>
+          </a:xfrm>
+          <a:prstGeom prst="ellipse">
+            <a:avLst/>
+          </a:prstGeom>
+          <a:solidFill>
+            <a:srgbClr val="0A9396"/>
+          </a:solidFill>
+          <a:ln>
+            <a:noFill/>
+          </a:ln>
+          <a:effectLst/>
+        </p:spPr>
+        <p:style>
+          <a:lnRef idx="1">
+            <a:schemeClr val="accent1"/>
+          </a:lnRef>
+          <a:fillRef idx="3">
+            <a:schemeClr val="accent1"/>
+          </a:fillRef>
+          <a:effectRef idx="2">
+            <a:schemeClr val="accent1"/>
+          </a:effectRef>
+          <a:fontRef idx="minor">
+            <a:schemeClr val="lt1"/>
+          </a:fontRef>
+        </p:style>
+        <p:txBody>
+          <a:bodyPr rtlCol="0" anchor="ctr"/>
+          <a:lstStyle/>
+          <a:p>
+            <a:pPr algn="ctr"/>
+          </a:p>
+        </p:txBody>
+      </p:sp>
+      <p:sp>
+        <p:nvSpPr>
+          <p:cNvPr id="21" name="TextBox 20"/>
+          <p:cNvSpPr txBox="1"/>
+          <p:nvPr/>
+        </p:nvSpPr>
+        <p:spPr>
+          <a:xfrm>
+            <a:off x="914400" y="5010912"/>
+            <a:ext cx="411480" cy="411480"/>
+          </a:xfrm>
+          <a:prstGeom prst="rect">
+            <a:avLst/>
+          </a:prstGeom>
+          <a:noFill/>
+        </p:spPr>
+        <p:txBody>
+          <a:bodyPr wrap="square" anchor="ctr" lIns="0" rIns="0" tIns="0" bIns="0">
+            <a:spAutoFit/>
+          </a:bodyPr>
+          <a:lstStyle/>
+          <a:p>
+            <a:pPr algn="ctr"/>
+            <a:r>
+              <a:rPr sz="1400" b="1" i="0">
+                <a:solidFill>
+                  <a:srgbClr val="FFFFFF"/>
+                </a:solidFill>
+                <a:latin typeface="Calibri"/>
+              </a:rPr>
+              <a:t>C</a:t>
+            </a:r>
+          </a:p>
+        </p:txBody>
+      </p:sp>
+      <p:sp>
+        <p:nvSpPr>
+          <p:cNvPr id="22" name="TextBox 21"/>
+          <p:cNvSpPr txBox="1"/>
+          <p:nvPr/>
+        </p:nvSpPr>
+        <p:spPr>
+          <a:xfrm>
+            <a:off x="1508760" y="4782312"/>
+            <a:ext cx="3840480" cy="868680"/>
+          </a:xfrm>
+          <a:prstGeom prst="rect">
+            <a:avLst/>
+          </a:prstGeom>
+          <a:noFill/>
+        </p:spPr>
+        <p:txBody>
+          <a:bodyPr wrap="square" anchor="ctr" lIns="0" rIns="0" tIns="0" bIns="0">
+            <a:spAutoFit/>
+          </a:bodyPr>
+          <a:lstStyle/>
+          <a:p>
+            <a:pPr algn="l"/>
+            <a:r>
+              <a:rPr sz="1450" b="0" i="0">
+                <a:solidFill>
+                  <a:srgbClr val="1D2433"/>
+                </a:solidFill>
+                <a:latin typeface="Calibri"/>
+              </a:rPr>
+              <a:t>Upright and virtual</a:t>
+            </a:r>
+          </a:p>
+        </p:txBody>
+      </p:sp>
+      <p:sp>
+        <p:nvSpPr>
+          <p:cNvPr id="23" name="Rounded Rectangle 22"/>
+          <p:cNvSpPr/>
+          <p:nvPr/>
+        </p:nvSpPr>
+        <p:spPr>
+          <a:xfrm>
+            <a:off x="6172200" y="4782312"/>
+            <a:ext cx="5349240" cy="868680"/>
+          </a:xfrm>
+          <a:prstGeom prst="roundRect">
+            <a:avLst>
+              <a:gd name="adj" fmla="val 12000"/>
+            </a:avLst>
+          </a:prstGeom>
+          <a:solidFill>
+            <a:srgbClr val="EAF1F4"/>
+          </a:solidFill>
+          <a:ln>
+            <a:noFill/>
+          </a:ln>
+          <a:effectLst/>
+        </p:spPr>
+        <p:style>
+          <a:lnRef idx="1">
+            <a:schemeClr val="accent1"/>
+          </a:lnRef>
+          <a:fillRef idx="3">
+            <a:schemeClr val="accent1"/>
+          </a:fillRef>
+          <a:effectRef idx="2">
+            <a:schemeClr val="accent1"/>
+          </a:effectRef>
+          <a:fontRef idx="minor">
+            <a:schemeClr val="lt1"/>
+          </a:fontRef>
+        </p:style>
+        <p:txBody>
+          <a:bodyPr rtlCol="0" anchor="ctr"/>
+          <a:lstStyle/>
+          <a:p>
+            <a:pPr algn="ctr"/>
+          </a:p>
+        </p:txBody>
+      </p:sp>
+      <p:sp>
+        <p:nvSpPr>
+          <p:cNvPr id="24" name="Oval 23"/>
+          <p:cNvSpPr/>
+          <p:nvPr/>
+        </p:nvSpPr>
+        <p:spPr>
+          <a:xfrm>
+            <a:off x="6446520" y="5010912"/>
+            <a:ext cx="411480" cy="411480"/>
+          </a:xfrm>
+          <a:prstGeom prst="ellipse">
+            <a:avLst/>
+          </a:prstGeom>
+          <a:solidFill>
+            <a:srgbClr val="0A9396"/>
+          </a:solidFill>
+          <a:ln>
+            <a:noFill/>
+          </a:ln>
+          <a:effectLst/>
+        </p:spPr>
+        <p:style>
+          <a:lnRef idx="1">
+            <a:schemeClr val="accent1"/>
+          </a:lnRef>
+          <a:fillRef idx="3">
+            <a:schemeClr val="accent1"/>
+          </a:fillRef>
+          <a:effectRef idx="2">
+            <a:schemeClr val="accent1"/>
+          </a:effectRef>
+          <a:fontRef idx="minor">
+            <a:schemeClr val="lt1"/>
+          </a:fontRef>
+        </p:style>
+        <p:txBody>
+          <a:bodyPr rtlCol="0" anchor="ctr"/>
+          <a:lstStyle/>
+          <a:p>
+            <a:pPr algn="ctr"/>
+          </a:p>
+        </p:txBody>
+      </p:sp>
+      <p:sp>
+        <p:nvSpPr>
+          <p:cNvPr id="25" name="TextBox 24"/>
+          <p:cNvSpPr txBox="1"/>
+          <p:nvPr/>
+        </p:nvSpPr>
+        <p:spPr>
+          <a:xfrm>
+            <a:off x="6446520" y="5010912"/>
+            <a:ext cx="411480" cy="411480"/>
+          </a:xfrm>
+          <a:prstGeom prst="rect">
+            <a:avLst/>
+          </a:prstGeom>
+          <a:noFill/>
+        </p:spPr>
+        <p:txBody>
+          <a:bodyPr wrap="square" anchor="ctr" lIns="0" rIns="0" tIns="0" bIns="0">
+            <a:spAutoFit/>
+          </a:bodyPr>
+          <a:lstStyle/>
+          <a:p>
+            <a:pPr algn="ctr"/>
+            <a:r>
+              <a:rPr sz="1400" b="1" i="0">
+                <a:solidFill>
+                  <a:srgbClr val="FFFFFF"/>
+                </a:solidFill>
+                <a:latin typeface="Calibri"/>
+              </a:rPr>
+              <a:t>D</a:t>
+            </a:r>
+          </a:p>
+        </p:txBody>
+      </p:sp>
+      <p:sp>
+        <p:nvSpPr>
+          <p:cNvPr id="26" name="TextBox 25"/>
+          <p:cNvSpPr txBox="1"/>
+          <p:nvPr/>
+        </p:nvSpPr>
+        <p:spPr>
+          <a:xfrm>
+            <a:off x="7040880" y="4782312"/>
+            <a:ext cx="3840480" cy="868680"/>
+          </a:xfrm>
+          <a:prstGeom prst="rect">
+            <a:avLst/>
+          </a:prstGeom>
+          <a:noFill/>
+        </p:spPr>
+        <p:txBody>
+          <a:bodyPr wrap="square" anchor="ctr" lIns="0" rIns="0" tIns="0" bIns="0">
+            <a:spAutoFit/>
+          </a:bodyPr>
+          <a:lstStyle/>
+          <a:p>
+            <a:pPr algn="l"/>
+            <a:r>
+              <a:rPr sz="1450" b="0" i="0">
+                <a:solidFill>
+                  <a:srgbClr val="1D2433"/>
+                </a:solidFill>
+                <a:latin typeface="Calibri"/>
+              </a:rPr>
+              <a:t>Inverted and virtual</a:t>
+            </a:r>
+          </a:p>
+        </p:txBody>
+      </p:sp>
+      <p:sp>
+        <p:nvSpPr>
+          <p:cNvPr id="27" name="Rounded Rectangle 26"/>
+          <p:cNvSpPr/>
+          <p:nvPr/>
+        </p:nvSpPr>
+        <p:spPr>
+          <a:xfrm>
+            <a:off x="640080" y="5779008"/>
+            <a:ext cx="10881360" cy="566928"/>
+          </a:xfrm>
+          <a:prstGeom prst="roundRect">
+            <a:avLst>
+              <a:gd name="adj" fmla="val 10000"/>
+            </a:avLst>
+          </a:prstGeom>
+          <a:solidFill>
+            <a:srgbClr val="EEF2F7"/>
+          </a:solidFill>
+          <a:ln>
+            <a:noFill/>
+          </a:ln>
+          <a:effectLst/>
+        </p:spPr>
+        <p:style>
+          <a:lnRef idx="1">
+            <a:schemeClr val="accent1"/>
+          </a:lnRef>
+          <a:fillRef idx="3">
+            <a:schemeClr val="accent1"/>
+          </a:fillRef>
+          <a:effectRef idx="2">
+            <a:schemeClr val="accent1"/>
+          </a:effectRef>
+          <a:fontRef idx="minor">
+            <a:schemeClr val="lt1"/>
+          </a:fontRef>
+        </p:style>
+        <p:txBody>
+          <a:bodyPr rtlCol="0" anchor="ctr"/>
+          <a:lstStyle/>
+          <a:p>
+            <a:pPr algn="ctr"/>
+          </a:p>
+        </p:txBody>
+      </p:sp>
+      <p:sp>
+        <p:nvSpPr>
+          <p:cNvPr id="28" name="TextBox 27"/>
+          <p:cNvSpPr txBox="1"/>
+          <p:nvPr/>
+        </p:nvSpPr>
+        <p:spPr>
+          <a:xfrm>
+            <a:off x="914400" y="5779008"/>
+            <a:ext cx="10332720" cy="566928"/>
+          </a:xfrm>
+          <a:prstGeom prst="rect">
+            <a:avLst/>
+          </a:prstGeom>
+          <a:noFill/>
+        </p:spPr>
+        <p:txBody>
+          <a:bodyPr wrap="square" anchor="ctr" lIns="0" rIns="0" tIns="0" bIns="0">
+            <a:spAutoFit/>
+          </a:bodyPr>
+          <a:lstStyle/>
+          <a:p>
+            <a:pPr algn="l"/>
+            <a:r>
+              <a:rPr sz="1250" b="1" i="0">
+                <a:solidFill>
                   <a:srgbClr val="2A9D8F"/>
                 </a:solidFill>
                 <a:latin typeface="Arial"/>
               </a:rPr>
-              <a:t>WHY</a:t>
-            </a:r>
-          </a:p>
-        </p:txBody>
-      </p:sp>
-      <p:sp>
-        <p:nvSpPr>
-          <p:cNvPr id="13" name="TextBox 12"/>
-          <p:cNvSpPr txBox="1"/>
-          <p:nvPr/>
-        </p:nvSpPr>
-        <p:spPr>
-          <a:xfrm>
-            <a:off x="1005840" y="4297680"/>
-            <a:ext cx="10149840" cy="1280160"/>
-          </a:xfrm>
-          <a:prstGeom prst="rect">
-            <a:avLst/>
-          </a:prstGeom>
-          <a:noFill/>
-        </p:spPr>
-        <p:txBody>
-          <a:bodyPr wrap="square" anchor="t" lIns="0" rIns="0" tIns="0" bIns="0">
-            <a:spAutoFit/>
-          </a:bodyPr>
-          <a:lstStyle/>
-          <a:p>
-            <a:pPr algn="l">
-              <a:lnSpc>
-                <a:spcPct val="110000"/>
-              </a:lnSpc>
-            </a:pPr>
-            <a:r>
-              <a:rPr sz="1600" b="0" i="0">
+              <a:t>Why  </a:t>
+            </a:r>
+            <a:r>
+              <a:rPr sz="1200" b="0" i="0">
                 <a:solidFill>
                   <a:srgbClr val="1D2433"/>
                 </a:solidFill>
@@ -6455,7 +7067,7 @@
                 </a:solidFill>
                 <a:latin typeface="Calibri"/>
               </a:rPr>
-              <a:t>Q2 — Shadow</a:t>
+              <a:t>Q2 - Shadow</a:t>
             </a:r>
           </a:p>
         </p:txBody>
@@ -6751,7 +7363,7 @@
         <p:spPr>
           <a:xfrm>
             <a:off x="1508760" y="3749039"/>
-            <a:ext cx="4297680" cy="868680"/>
+            <a:ext cx="3840480" cy="868680"/>
           </a:xfrm>
           <a:prstGeom prst="rect">
             <a:avLst/>
@@ -6911,7 +7523,7 @@
         <p:spPr>
           <a:xfrm>
             <a:off x="7040880" y="3749039"/>
-            <a:ext cx="4297680" cy="868680"/>
+            <a:ext cx="3840480" cy="868680"/>
           </a:xfrm>
           <a:prstGeom prst="rect">
             <a:avLst/>
@@ -7071,7 +7683,7 @@
         <p:spPr>
           <a:xfrm>
             <a:off x="1508760" y="4782312"/>
-            <a:ext cx="4297680" cy="868680"/>
+            <a:ext cx="3840480" cy="868680"/>
           </a:xfrm>
           <a:prstGeom prst="rect">
             <a:avLst/>
@@ -7231,7 +7843,7 @@
         <p:spPr>
           <a:xfrm>
             <a:off x="7040880" y="4782312"/>
-            <a:ext cx="4297680" cy="868680"/>
+            <a:ext cx="3840480" cy="868680"/>
           </a:xfrm>
           <a:prstGeom prst="rect">
             <a:avLst/>
@@ -7298,7 +7910,7 @@
             <a:avLst/>
           </a:prstGeom>
           <a:solidFill>
-            <a:srgbClr val="2A9D8F"/>
+            <a:srgbClr val="0A9396"/>
           </a:solidFill>
           <a:ln>
             <a:noFill/>
@@ -7353,11 +7965,11 @@
             <a:r>
               <a:rPr sz="1300" b="1" i="0">
                 <a:solidFill>
-                  <a:srgbClr val="2A9D8F"/>
+                  <a:srgbClr val="0A9396"/>
                 </a:solidFill>
                 <a:latin typeface="Arial"/>
               </a:rPr>
-              <a:t>ANSWER REVEAL</a:t>
+              <a:t>QUIZ QUESTION</a:t>
             </a:r>
           </a:p>
         </p:txBody>
@@ -7392,7 +8004,7 @@
                 </a:solidFill>
                 <a:latin typeface="Calibri"/>
               </a:rPr>
-              <a:t>Q2 — Answer</a:t>
+              <a:t>Q2 - Shadow</a:t>
             </a:r>
           </a:p>
         </p:txBody>
@@ -7481,166 +8093,6 @@
           <a:prstGeom prst="roundRect">
             <a:avLst>
               <a:gd name="adj" fmla="val 4000"/>
-            </a:avLst>
-          </a:prstGeom>
-          <a:solidFill>
-            <a:srgbClr val="E9F5F0"/>
-          </a:solidFill>
-          <a:ln>
-            <a:noFill/>
-          </a:ln>
-          <a:effectLst/>
-        </p:spPr>
-        <p:style>
-          <a:lnRef idx="1">
-            <a:schemeClr val="accent1"/>
-          </a:lnRef>
-          <a:fillRef idx="3">
-            <a:schemeClr val="accent1"/>
-          </a:fillRef>
-          <a:effectRef idx="2">
-            <a:schemeClr val="accent1"/>
-          </a:effectRef>
-          <a:fontRef idx="minor">
-            <a:schemeClr val="lt1"/>
-          </a:fontRef>
-        </p:style>
-        <p:txBody>
-          <a:bodyPr rtlCol="0" anchor="ctr"/>
-          <a:lstStyle/>
-          <a:p>
-            <a:pPr algn="ctr"/>
-          </a:p>
-        </p:txBody>
-      </p:sp>
-      <p:sp>
-        <p:nvSpPr>
-          <p:cNvPr id="8" name="Oval 7"/>
-          <p:cNvSpPr/>
-          <p:nvPr/>
-        </p:nvSpPr>
-        <p:spPr>
-          <a:xfrm>
-            <a:off x="1005840" y="2240280"/>
-            <a:ext cx="731520" cy="731520"/>
-          </a:xfrm>
-          <a:prstGeom prst="ellipse">
-            <a:avLst/>
-          </a:prstGeom>
-          <a:solidFill>
-            <a:srgbClr val="2A9D8F"/>
-          </a:solidFill>
-          <a:ln>
-            <a:noFill/>
-          </a:ln>
-          <a:effectLst/>
-        </p:spPr>
-        <p:style>
-          <a:lnRef idx="1">
-            <a:schemeClr val="accent1"/>
-          </a:lnRef>
-          <a:fillRef idx="3">
-            <a:schemeClr val="accent1"/>
-          </a:fillRef>
-          <a:effectRef idx="2">
-            <a:schemeClr val="accent1"/>
-          </a:effectRef>
-          <a:fontRef idx="minor">
-            <a:schemeClr val="lt1"/>
-          </a:fontRef>
-        </p:style>
-        <p:txBody>
-          <a:bodyPr rtlCol="0" anchor="ctr"/>
-          <a:lstStyle/>
-          <a:p>
-            <a:pPr algn="ctr"/>
-          </a:p>
-        </p:txBody>
-      </p:sp>
-      <p:sp>
-        <p:nvSpPr>
-          <p:cNvPr id="9" name="TextBox 8"/>
-          <p:cNvSpPr txBox="1"/>
-          <p:nvPr/>
-        </p:nvSpPr>
-        <p:spPr>
-          <a:xfrm>
-            <a:off x="1005840" y="2240280"/>
-            <a:ext cx="731520" cy="731520"/>
-          </a:xfrm>
-          <a:prstGeom prst="rect">
-            <a:avLst/>
-          </a:prstGeom>
-          <a:noFill/>
-        </p:spPr>
-        <p:txBody>
-          <a:bodyPr wrap="square" anchor="ctr" lIns="0" rIns="0" tIns="0" bIns="0">
-            <a:spAutoFit/>
-          </a:bodyPr>
-          <a:lstStyle/>
-          <a:p>
-            <a:pPr algn="ctr"/>
-            <a:r>
-              <a:rPr sz="3000" b="1" i="0">
-                <a:solidFill>
-                  <a:srgbClr val="FFFFFF"/>
-                </a:solidFill>
-                <a:latin typeface="Calibri"/>
-              </a:rPr>
-              <a:t>✓</a:t>
-            </a:r>
-          </a:p>
-        </p:txBody>
-      </p:sp>
-      <p:sp>
-        <p:nvSpPr>
-          <p:cNvPr id="10" name="TextBox 9"/>
-          <p:cNvSpPr txBox="1"/>
-          <p:nvPr/>
-        </p:nvSpPr>
-        <p:spPr>
-          <a:xfrm>
-            <a:off x="1920240" y="1828800"/>
-            <a:ext cx="9326880" cy="1554480"/>
-          </a:xfrm>
-          <a:prstGeom prst="rect">
-            <a:avLst/>
-          </a:prstGeom>
-          <a:noFill/>
-        </p:spPr>
-        <p:txBody>
-          <a:bodyPr wrap="square" anchor="ctr" lIns="0" rIns="0" tIns="0" bIns="0">
-            <a:spAutoFit/>
-          </a:bodyPr>
-          <a:lstStyle/>
-          <a:p>
-            <a:pPr algn="l"/>
-            <a:r>
-              <a:rPr sz="2200" b="1" i="0">
-                <a:solidFill>
-                  <a:srgbClr val="1D2433"/>
-                </a:solidFill>
-                <a:latin typeface="Calibri"/>
-              </a:rPr>
-              <a:t>B. Source, opaque object, screen</a:t>
-            </a:r>
-          </a:p>
-        </p:txBody>
-      </p:sp>
-      <p:sp>
-        <p:nvSpPr>
-          <p:cNvPr id="11" name="Rounded Rectangle 10"/>
-          <p:cNvSpPr/>
-          <p:nvPr/>
-        </p:nvSpPr>
-        <p:spPr>
-          <a:xfrm>
-            <a:off x="640080" y="3657600"/>
-            <a:ext cx="10881360" cy="2011680"/>
-          </a:xfrm>
-          <a:prstGeom prst="roundRect">
-            <a:avLst>
-              <a:gd name="adj" fmla="val 3000"/>
             </a:avLst>
           </a:prstGeom>
           <a:solidFill>
@@ -7681,68 +8133,840 @@
       </p:sp>
       <p:sp>
         <p:nvSpPr>
+          <p:cNvPr id="8" name="TextBox 7"/>
+          <p:cNvSpPr txBox="1"/>
+          <p:nvPr/>
+        </p:nvSpPr>
+        <p:spPr>
+          <a:xfrm>
+            <a:off x="1005840" y="1828800"/>
+            <a:ext cx="10149840" cy="1554480"/>
+          </a:xfrm>
+          <a:prstGeom prst="rect">
+            <a:avLst/>
+          </a:prstGeom>
+          <a:noFill/>
+        </p:spPr>
+        <p:txBody>
+          <a:bodyPr wrap="square" anchor="ctr" lIns="0" rIns="0" tIns="0" bIns="0">
+            <a:spAutoFit/>
+          </a:bodyPr>
+          <a:lstStyle/>
+          <a:p>
+            <a:pPr algn="l"/>
+            <a:r>
+              <a:rPr sz="1900" b="1" i="0">
+                <a:solidFill>
+                  <a:srgbClr val="1D2433"/>
+                </a:solidFill>
+                <a:latin typeface="Calibri"/>
+              </a:rPr>
+              <a:t>Which three things are needed to form a shadow?</a:t>
+            </a:r>
+          </a:p>
+        </p:txBody>
+      </p:sp>
+      <p:sp>
+        <p:nvSpPr>
+          <p:cNvPr id="9" name="Rounded Rectangle 8"/>
+          <p:cNvSpPr/>
+          <p:nvPr/>
+        </p:nvSpPr>
+        <p:spPr>
+          <a:xfrm>
+            <a:off x="640080" y="3749039"/>
+            <a:ext cx="5349240" cy="868680"/>
+          </a:xfrm>
+          <a:prstGeom prst="roundRect">
+            <a:avLst>
+              <a:gd name="adj" fmla="val 12000"/>
+            </a:avLst>
+          </a:prstGeom>
+          <a:solidFill>
+            <a:srgbClr val="EAF1F4"/>
+          </a:solidFill>
+          <a:ln>
+            <a:noFill/>
+          </a:ln>
+          <a:effectLst/>
+        </p:spPr>
+        <p:style>
+          <a:lnRef idx="1">
+            <a:schemeClr val="accent1"/>
+          </a:lnRef>
+          <a:fillRef idx="3">
+            <a:schemeClr val="accent1"/>
+          </a:fillRef>
+          <a:effectRef idx="2">
+            <a:schemeClr val="accent1"/>
+          </a:effectRef>
+          <a:fontRef idx="minor">
+            <a:schemeClr val="lt1"/>
+          </a:fontRef>
+        </p:style>
+        <p:txBody>
+          <a:bodyPr rtlCol="0" anchor="ctr"/>
+          <a:lstStyle/>
+          <a:p>
+            <a:pPr algn="ctr"/>
+          </a:p>
+        </p:txBody>
+      </p:sp>
+      <p:sp>
+        <p:nvSpPr>
+          <p:cNvPr id="10" name="Oval 9"/>
+          <p:cNvSpPr/>
+          <p:nvPr/>
+        </p:nvSpPr>
+        <p:spPr>
+          <a:xfrm>
+            <a:off x="914400" y="3977639"/>
+            <a:ext cx="411480" cy="411480"/>
+          </a:xfrm>
+          <a:prstGeom prst="ellipse">
+            <a:avLst/>
+          </a:prstGeom>
+          <a:solidFill>
+            <a:srgbClr val="0A9396"/>
+          </a:solidFill>
+          <a:ln>
+            <a:noFill/>
+          </a:ln>
+          <a:effectLst/>
+        </p:spPr>
+        <p:style>
+          <a:lnRef idx="1">
+            <a:schemeClr val="accent1"/>
+          </a:lnRef>
+          <a:fillRef idx="3">
+            <a:schemeClr val="accent1"/>
+          </a:fillRef>
+          <a:effectRef idx="2">
+            <a:schemeClr val="accent1"/>
+          </a:effectRef>
+          <a:fontRef idx="minor">
+            <a:schemeClr val="lt1"/>
+          </a:fontRef>
+        </p:style>
+        <p:txBody>
+          <a:bodyPr rtlCol="0" anchor="ctr"/>
+          <a:lstStyle/>
+          <a:p>
+            <a:pPr algn="ctr"/>
+          </a:p>
+        </p:txBody>
+      </p:sp>
+      <p:sp>
+        <p:nvSpPr>
+          <p:cNvPr id="11" name="TextBox 10"/>
+          <p:cNvSpPr txBox="1"/>
+          <p:nvPr/>
+        </p:nvSpPr>
+        <p:spPr>
+          <a:xfrm>
+            <a:off x="914400" y="3977639"/>
+            <a:ext cx="411480" cy="411480"/>
+          </a:xfrm>
+          <a:prstGeom prst="rect">
+            <a:avLst/>
+          </a:prstGeom>
+          <a:noFill/>
+        </p:spPr>
+        <p:txBody>
+          <a:bodyPr wrap="square" anchor="ctr" lIns="0" rIns="0" tIns="0" bIns="0">
+            <a:spAutoFit/>
+          </a:bodyPr>
+          <a:lstStyle/>
+          <a:p>
+            <a:pPr algn="ctr"/>
+            <a:r>
+              <a:rPr sz="1400" b="1" i="0">
+                <a:solidFill>
+                  <a:srgbClr val="FFFFFF"/>
+                </a:solidFill>
+                <a:latin typeface="Calibri"/>
+              </a:rPr>
+              <a:t>A</a:t>
+            </a:r>
+          </a:p>
+        </p:txBody>
+      </p:sp>
+      <p:sp>
+        <p:nvSpPr>
           <p:cNvPr id="12" name="TextBox 11"/>
           <p:cNvSpPr txBox="1"/>
           <p:nvPr/>
         </p:nvSpPr>
         <p:spPr>
           <a:xfrm>
-            <a:off x="1005840" y="3886200"/>
-            <a:ext cx="4572000" cy="365760"/>
-          </a:xfrm>
-          <a:prstGeom prst="rect">
-            <a:avLst/>
-          </a:prstGeom>
-          <a:noFill/>
-        </p:spPr>
-        <p:txBody>
-          <a:bodyPr wrap="square" anchor="t" lIns="0" rIns="0" tIns="0" bIns="0">
+            <a:off x="1508760" y="3749039"/>
+            <a:ext cx="3840480" cy="868680"/>
+          </a:xfrm>
+          <a:prstGeom prst="rect">
+            <a:avLst/>
+          </a:prstGeom>
+          <a:noFill/>
+        </p:spPr>
+        <p:txBody>
+          <a:bodyPr wrap="square" anchor="ctr" lIns="0" rIns="0" tIns="0" bIns="0">
             <a:spAutoFit/>
           </a:bodyPr>
           <a:lstStyle/>
           <a:p>
             <a:pPr algn="l"/>
             <a:r>
+              <a:rPr sz="1450" b="0" i="0">
+                <a:solidFill>
+                  <a:srgbClr val="1D2433"/>
+                </a:solidFill>
+                <a:latin typeface="Calibri"/>
+              </a:rPr>
+              <a:t>Source, mirror, screen</a:t>
+            </a:r>
+          </a:p>
+        </p:txBody>
+      </p:sp>
+      <p:sp>
+        <p:nvSpPr>
+          <p:cNvPr id="13" name="Rounded Rectangle 12"/>
+          <p:cNvSpPr/>
+          <p:nvPr/>
+        </p:nvSpPr>
+        <p:spPr>
+          <a:xfrm>
+            <a:off x="6172200" y="3749039"/>
+            <a:ext cx="5349240" cy="868680"/>
+          </a:xfrm>
+          <a:prstGeom prst="roundRect">
+            <a:avLst>
+              <a:gd name="adj" fmla="val 12000"/>
+            </a:avLst>
+          </a:prstGeom>
+          <a:solidFill>
+            <a:srgbClr val="E9F5F0"/>
+          </a:solidFill>
+          <a:ln w="31750">
+            <a:solidFill>
+              <a:srgbClr val="2A9D8F"/>
+            </a:solidFill>
+          </a:ln>
+          <a:effectLst/>
+        </p:spPr>
+        <p:style>
+          <a:lnRef idx="1">
+            <a:schemeClr val="accent1"/>
+          </a:lnRef>
+          <a:fillRef idx="3">
+            <a:schemeClr val="accent1"/>
+          </a:fillRef>
+          <a:effectRef idx="2">
+            <a:schemeClr val="accent1"/>
+          </a:effectRef>
+          <a:fontRef idx="minor">
+            <a:schemeClr val="lt1"/>
+          </a:fontRef>
+        </p:style>
+        <p:txBody>
+          <a:bodyPr rtlCol="0" anchor="ctr"/>
+          <a:lstStyle/>
+          <a:p>
+            <a:pPr algn="ctr"/>
+          </a:p>
+        </p:txBody>
+      </p:sp>
+      <p:sp>
+        <p:nvSpPr>
+          <p:cNvPr id="14" name="Oval 13"/>
+          <p:cNvSpPr/>
+          <p:nvPr/>
+        </p:nvSpPr>
+        <p:spPr>
+          <a:xfrm>
+            <a:off x="6446520" y="3977639"/>
+            <a:ext cx="411480" cy="411480"/>
+          </a:xfrm>
+          <a:prstGeom prst="ellipse">
+            <a:avLst/>
+          </a:prstGeom>
+          <a:solidFill>
+            <a:srgbClr val="2A9D8F"/>
+          </a:solidFill>
+          <a:ln>
+            <a:noFill/>
+          </a:ln>
+          <a:effectLst/>
+        </p:spPr>
+        <p:style>
+          <a:lnRef idx="1">
+            <a:schemeClr val="accent1"/>
+          </a:lnRef>
+          <a:fillRef idx="3">
+            <a:schemeClr val="accent1"/>
+          </a:fillRef>
+          <a:effectRef idx="2">
+            <a:schemeClr val="accent1"/>
+          </a:effectRef>
+          <a:fontRef idx="minor">
+            <a:schemeClr val="lt1"/>
+          </a:fontRef>
+        </p:style>
+        <p:txBody>
+          <a:bodyPr rtlCol="0" anchor="ctr"/>
+          <a:lstStyle/>
+          <a:p>
+            <a:pPr algn="ctr"/>
+          </a:p>
+        </p:txBody>
+      </p:sp>
+      <p:sp>
+        <p:nvSpPr>
+          <p:cNvPr id="15" name="TextBox 14"/>
+          <p:cNvSpPr txBox="1"/>
+          <p:nvPr/>
+        </p:nvSpPr>
+        <p:spPr>
+          <a:xfrm>
+            <a:off x="6446520" y="3977639"/>
+            <a:ext cx="411480" cy="411480"/>
+          </a:xfrm>
+          <a:prstGeom prst="rect">
+            <a:avLst/>
+          </a:prstGeom>
+          <a:noFill/>
+        </p:spPr>
+        <p:txBody>
+          <a:bodyPr wrap="square" anchor="ctr" lIns="0" rIns="0" tIns="0" bIns="0">
+            <a:spAutoFit/>
+          </a:bodyPr>
+          <a:lstStyle/>
+          <a:p>
+            <a:pPr algn="ctr"/>
+            <a:r>
               <a:rPr sz="1400" b="1" i="0">
                 <a:solidFill>
+                  <a:srgbClr val="FFFFFF"/>
+                </a:solidFill>
+                <a:latin typeface="Calibri"/>
+              </a:rPr>
+              <a:t>B</a:t>
+            </a:r>
+          </a:p>
+        </p:txBody>
+      </p:sp>
+      <p:sp>
+        <p:nvSpPr>
+          <p:cNvPr id="16" name="TextBox 15"/>
+          <p:cNvSpPr txBox="1"/>
+          <p:nvPr/>
+        </p:nvSpPr>
+        <p:spPr>
+          <a:xfrm>
+            <a:off x="7040880" y="3749039"/>
+            <a:ext cx="3840480" cy="868680"/>
+          </a:xfrm>
+          <a:prstGeom prst="rect">
+            <a:avLst/>
+          </a:prstGeom>
+          <a:noFill/>
+        </p:spPr>
+        <p:txBody>
+          <a:bodyPr wrap="square" anchor="ctr" lIns="0" rIns="0" tIns="0" bIns="0">
+            <a:spAutoFit/>
+          </a:bodyPr>
+          <a:lstStyle/>
+          <a:p>
+            <a:pPr algn="l"/>
+            <a:r>
+              <a:rPr sz="1450" b="1" i="0">
+                <a:solidFill>
+                  <a:srgbClr val="1D2433"/>
+                </a:solidFill>
+                <a:latin typeface="Calibri"/>
+              </a:rPr>
+              <a:t>Source, opaque object, screen</a:t>
+            </a:r>
+          </a:p>
+        </p:txBody>
+      </p:sp>
+      <p:sp>
+        <p:nvSpPr>
+          <p:cNvPr id="17" name="Oval 16"/>
+          <p:cNvSpPr/>
+          <p:nvPr/>
+        </p:nvSpPr>
+        <p:spPr>
+          <a:xfrm>
+            <a:off x="10972800" y="3995927"/>
+            <a:ext cx="365760" cy="365760"/>
+          </a:xfrm>
+          <a:prstGeom prst="ellipse">
+            <a:avLst/>
+          </a:prstGeom>
+          <a:solidFill>
+            <a:srgbClr val="2A9D8F"/>
+          </a:solidFill>
+          <a:ln>
+            <a:noFill/>
+          </a:ln>
+          <a:effectLst/>
+        </p:spPr>
+        <p:style>
+          <a:lnRef idx="1">
+            <a:schemeClr val="accent1"/>
+          </a:lnRef>
+          <a:fillRef idx="3">
+            <a:schemeClr val="accent1"/>
+          </a:fillRef>
+          <a:effectRef idx="2">
+            <a:schemeClr val="accent1"/>
+          </a:effectRef>
+          <a:fontRef idx="minor">
+            <a:schemeClr val="lt1"/>
+          </a:fontRef>
+        </p:style>
+        <p:txBody>
+          <a:bodyPr rtlCol="0" anchor="ctr"/>
+          <a:lstStyle/>
+          <a:p>
+            <a:pPr algn="ctr"/>
+          </a:p>
+        </p:txBody>
+      </p:sp>
+      <p:sp>
+        <p:nvSpPr>
+          <p:cNvPr id="18" name="TextBox 17"/>
+          <p:cNvSpPr txBox="1"/>
+          <p:nvPr/>
+        </p:nvSpPr>
+        <p:spPr>
+          <a:xfrm>
+            <a:off x="10972800" y="3950207"/>
+            <a:ext cx="365760" cy="365760"/>
+          </a:xfrm>
+          <a:prstGeom prst="rect">
+            <a:avLst/>
+          </a:prstGeom>
+          <a:noFill/>
+        </p:spPr>
+        <p:txBody>
+          <a:bodyPr wrap="square" anchor="ctr" lIns="0" rIns="0" tIns="0" bIns="0">
+            <a:spAutoFit/>
+          </a:bodyPr>
+          <a:lstStyle/>
+          <a:p>
+            <a:pPr algn="ctr"/>
+            <a:r>
+              <a:rPr sz="1600" b="1" i="0">
+                <a:solidFill>
+                  <a:srgbClr val="FFFFFF"/>
+                </a:solidFill>
+                <a:latin typeface="Calibri"/>
+              </a:rPr>
+              <a:t>✓</a:t>
+            </a:r>
+          </a:p>
+        </p:txBody>
+      </p:sp>
+      <p:sp>
+        <p:nvSpPr>
+          <p:cNvPr id="19" name="Rounded Rectangle 18"/>
+          <p:cNvSpPr/>
+          <p:nvPr/>
+        </p:nvSpPr>
+        <p:spPr>
+          <a:xfrm>
+            <a:off x="640080" y="4782312"/>
+            <a:ext cx="5349240" cy="868680"/>
+          </a:xfrm>
+          <a:prstGeom prst="roundRect">
+            <a:avLst>
+              <a:gd name="adj" fmla="val 12000"/>
+            </a:avLst>
+          </a:prstGeom>
+          <a:solidFill>
+            <a:srgbClr val="EAF1F4"/>
+          </a:solidFill>
+          <a:ln>
+            <a:noFill/>
+          </a:ln>
+          <a:effectLst/>
+        </p:spPr>
+        <p:style>
+          <a:lnRef idx="1">
+            <a:schemeClr val="accent1"/>
+          </a:lnRef>
+          <a:fillRef idx="3">
+            <a:schemeClr val="accent1"/>
+          </a:fillRef>
+          <a:effectRef idx="2">
+            <a:schemeClr val="accent1"/>
+          </a:effectRef>
+          <a:fontRef idx="minor">
+            <a:schemeClr val="lt1"/>
+          </a:fontRef>
+        </p:style>
+        <p:txBody>
+          <a:bodyPr rtlCol="0" anchor="ctr"/>
+          <a:lstStyle/>
+          <a:p>
+            <a:pPr algn="ctr"/>
+          </a:p>
+        </p:txBody>
+      </p:sp>
+      <p:sp>
+        <p:nvSpPr>
+          <p:cNvPr id="20" name="Oval 19"/>
+          <p:cNvSpPr/>
+          <p:nvPr/>
+        </p:nvSpPr>
+        <p:spPr>
+          <a:xfrm>
+            <a:off x="914400" y="5010912"/>
+            <a:ext cx="411480" cy="411480"/>
+          </a:xfrm>
+          <a:prstGeom prst="ellipse">
+            <a:avLst/>
+          </a:prstGeom>
+          <a:solidFill>
+            <a:srgbClr val="0A9396"/>
+          </a:solidFill>
+          <a:ln>
+            <a:noFill/>
+          </a:ln>
+          <a:effectLst/>
+        </p:spPr>
+        <p:style>
+          <a:lnRef idx="1">
+            <a:schemeClr val="accent1"/>
+          </a:lnRef>
+          <a:fillRef idx="3">
+            <a:schemeClr val="accent1"/>
+          </a:fillRef>
+          <a:effectRef idx="2">
+            <a:schemeClr val="accent1"/>
+          </a:effectRef>
+          <a:fontRef idx="minor">
+            <a:schemeClr val="lt1"/>
+          </a:fontRef>
+        </p:style>
+        <p:txBody>
+          <a:bodyPr rtlCol="0" anchor="ctr"/>
+          <a:lstStyle/>
+          <a:p>
+            <a:pPr algn="ctr"/>
+          </a:p>
+        </p:txBody>
+      </p:sp>
+      <p:sp>
+        <p:nvSpPr>
+          <p:cNvPr id="21" name="TextBox 20"/>
+          <p:cNvSpPr txBox="1"/>
+          <p:nvPr/>
+        </p:nvSpPr>
+        <p:spPr>
+          <a:xfrm>
+            <a:off x="914400" y="5010912"/>
+            <a:ext cx="411480" cy="411480"/>
+          </a:xfrm>
+          <a:prstGeom prst="rect">
+            <a:avLst/>
+          </a:prstGeom>
+          <a:noFill/>
+        </p:spPr>
+        <p:txBody>
+          <a:bodyPr wrap="square" anchor="ctr" lIns="0" rIns="0" tIns="0" bIns="0">
+            <a:spAutoFit/>
+          </a:bodyPr>
+          <a:lstStyle/>
+          <a:p>
+            <a:pPr algn="ctr"/>
+            <a:r>
+              <a:rPr sz="1400" b="1" i="0">
+                <a:solidFill>
+                  <a:srgbClr val="FFFFFF"/>
+                </a:solidFill>
+                <a:latin typeface="Calibri"/>
+              </a:rPr>
+              <a:t>C</a:t>
+            </a:r>
+          </a:p>
+        </p:txBody>
+      </p:sp>
+      <p:sp>
+        <p:nvSpPr>
+          <p:cNvPr id="22" name="TextBox 21"/>
+          <p:cNvSpPr txBox="1"/>
+          <p:nvPr/>
+        </p:nvSpPr>
+        <p:spPr>
+          <a:xfrm>
+            <a:off x="1508760" y="4782312"/>
+            <a:ext cx="3840480" cy="868680"/>
+          </a:xfrm>
+          <a:prstGeom prst="rect">
+            <a:avLst/>
+          </a:prstGeom>
+          <a:noFill/>
+        </p:spPr>
+        <p:txBody>
+          <a:bodyPr wrap="square" anchor="ctr" lIns="0" rIns="0" tIns="0" bIns="0">
+            <a:spAutoFit/>
+          </a:bodyPr>
+          <a:lstStyle/>
+          <a:p>
+            <a:pPr algn="l"/>
+            <a:r>
+              <a:rPr sz="1450" b="0" i="0">
+                <a:solidFill>
+                  <a:srgbClr val="1D2433"/>
+                </a:solidFill>
+                <a:latin typeface="Calibri"/>
+              </a:rPr>
+              <a:t>Source, lens, screen</a:t>
+            </a:r>
+          </a:p>
+        </p:txBody>
+      </p:sp>
+      <p:sp>
+        <p:nvSpPr>
+          <p:cNvPr id="23" name="Rounded Rectangle 22"/>
+          <p:cNvSpPr/>
+          <p:nvPr/>
+        </p:nvSpPr>
+        <p:spPr>
+          <a:xfrm>
+            <a:off x="6172200" y="4782312"/>
+            <a:ext cx="5349240" cy="868680"/>
+          </a:xfrm>
+          <a:prstGeom prst="roundRect">
+            <a:avLst>
+              <a:gd name="adj" fmla="val 12000"/>
+            </a:avLst>
+          </a:prstGeom>
+          <a:solidFill>
+            <a:srgbClr val="EAF1F4"/>
+          </a:solidFill>
+          <a:ln>
+            <a:noFill/>
+          </a:ln>
+          <a:effectLst/>
+        </p:spPr>
+        <p:style>
+          <a:lnRef idx="1">
+            <a:schemeClr val="accent1"/>
+          </a:lnRef>
+          <a:fillRef idx="3">
+            <a:schemeClr val="accent1"/>
+          </a:fillRef>
+          <a:effectRef idx="2">
+            <a:schemeClr val="accent1"/>
+          </a:effectRef>
+          <a:fontRef idx="minor">
+            <a:schemeClr val="lt1"/>
+          </a:fontRef>
+        </p:style>
+        <p:txBody>
+          <a:bodyPr rtlCol="0" anchor="ctr"/>
+          <a:lstStyle/>
+          <a:p>
+            <a:pPr algn="ctr"/>
+          </a:p>
+        </p:txBody>
+      </p:sp>
+      <p:sp>
+        <p:nvSpPr>
+          <p:cNvPr id="24" name="Oval 23"/>
+          <p:cNvSpPr/>
+          <p:nvPr/>
+        </p:nvSpPr>
+        <p:spPr>
+          <a:xfrm>
+            <a:off x="6446520" y="5010912"/>
+            <a:ext cx="411480" cy="411480"/>
+          </a:xfrm>
+          <a:prstGeom prst="ellipse">
+            <a:avLst/>
+          </a:prstGeom>
+          <a:solidFill>
+            <a:srgbClr val="0A9396"/>
+          </a:solidFill>
+          <a:ln>
+            <a:noFill/>
+          </a:ln>
+          <a:effectLst/>
+        </p:spPr>
+        <p:style>
+          <a:lnRef idx="1">
+            <a:schemeClr val="accent1"/>
+          </a:lnRef>
+          <a:fillRef idx="3">
+            <a:schemeClr val="accent1"/>
+          </a:fillRef>
+          <a:effectRef idx="2">
+            <a:schemeClr val="accent1"/>
+          </a:effectRef>
+          <a:fontRef idx="minor">
+            <a:schemeClr val="lt1"/>
+          </a:fontRef>
+        </p:style>
+        <p:txBody>
+          <a:bodyPr rtlCol="0" anchor="ctr"/>
+          <a:lstStyle/>
+          <a:p>
+            <a:pPr algn="ctr"/>
+          </a:p>
+        </p:txBody>
+      </p:sp>
+      <p:sp>
+        <p:nvSpPr>
+          <p:cNvPr id="25" name="TextBox 24"/>
+          <p:cNvSpPr txBox="1"/>
+          <p:nvPr/>
+        </p:nvSpPr>
+        <p:spPr>
+          <a:xfrm>
+            <a:off x="6446520" y="5010912"/>
+            <a:ext cx="411480" cy="411480"/>
+          </a:xfrm>
+          <a:prstGeom prst="rect">
+            <a:avLst/>
+          </a:prstGeom>
+          <a:noFill/>
+        </p:spPr>
+        <p:txBody>
+          <a:bodyPr wrap="square" anchor="ctr" lIns="0" rIns="0" tIns="0" bIns="0">
+            <a:spAutoFit/>
+          </a:bodyPr>
+          <a:lstStyle/>
+          <a:p>
+            <a:pPr algn="ctr"/>
+            <a:r>
+              <a:rPr sz="1400" b="1" i="0">
+                <a:solidFill>
+                  <a:srgbClr val="FFFFFF"/>
+                </a:solidFill>
+                <a:latin typeface="Calibri"/>
+              </a:rPr>
+              <a:t>D</a:t>
+            </a:r>
+          </a:p>
+        </p:txBody>
+      </p:sp>
+      <p:sp>
+        <p:nvSpPr>
+          <p:cNvPr id="26" name="TextBox 25"/>
+          <p:cNvSpPr txBox="1"/>
+          <p:nvPr/>
+        </p:nvSpPr>
+        <p:spPr>
+          <a:xfrm>
+            <a:off x="7040880" y="4782312"/>
+            <a:ext cx="3840480" cy="868680"/>
+          </a:xfrm>
+          <a:prstGeom prst="rect">
+            <a:avLst/>
+          </a:prstGeom>
+          <a:noFill/>
+        </p:spPr>
+        <p:txBody>
+          <a:bodyPr wrap="square" anchor="ctr" lIns="0" rIns="0" tIns="0" bIns="0">
+            <a:spAutoFit/>
+          </a:bodyPr>
+          <a:lstStyle/>
+          <a:p>
+            <a:pPr algn="l"/>
+            <a:r>
+              <a:rPr sz="1450" b="0" i="0">
+                <a:solidFill>
+                  <a:srgbClr val="1D2433"/>
+                </a:solidFill>
+                <a:latin typeface="Calibri"/>
+              </a:rPr>
+              <a:t>Source, water, screen</a:t>
+            </a:r>
+          </a:p>
+        </p:txBody>
+      </p:sp>
+      <p:sp>
+        <p:nvSpPr>
+          <p:cNvPr id="27" name="Rounded Rectangle 26"/>
+          <p:cNvSpPr/>
+          <p:nvPr/>
+        </p:nvSpPr>
+        <p:spPr>
+          <a:xfrm>
+            <a:off x="640080" y="5779008"/>
+            <a:ext cx="10881360" cy="566928"/>
+          </a:xfrm>
+          <a:prstGeom prst="roundRect">
+            <a:avLst>
+              <a:gd name="adj" fmla="val 10000"/>
+            </a:avLst>
+          </a:prstGeom>
+          <a:solidFill>
+            <a:srgbClr val="EEF2F7"/>
+          </a:solidFill>
+          <a:ln>
+            <a:noFill/>
+          </a:ln>
+          <a:effectLst/>
+        </p:spPr>
+        <p:style>
+          <a:lnRef idx="1">
+            <a:schemeClr val="accent1"/>
+          </a:lnRef>
+          <a:fillRef idx="3">
+            <a:schemeClr val="accent1"/>
+          </a:fillRef>
+          <a:effectRef idx="2">
+            <a:schemeClr val="accent1"/>
+          </a:effectRef>
+          <a:fontRef idx="minor">
+            <a:schemeClr val="lt1"/>
+          </a:fontRef>
+        </p:style>
+        <p:txBody>
+          <a:bodyPr rtlCol="0" anchor="ctr"/>
+          <a:lstStyle/>
+          <a:p>
+            <a:pPr algn="ctr"/>
+          </a:p>
+        </p:txBody>
+      </p:sp>
+      <p:sp>
+        <p:nvSpPr>
+          <p:cNvPr id="28" name="TextBox 27"/>
+          <p:cNvSpPr txBox="1"/>
+          <p:nvPr/>
+        </p:nvSpPr>
+        <p:spPr>
+          <a:xfrm>
+            <a:off x="914400" y="5779008"/>
+            <a:ext cx="10332720" cy="566928"/>
+          </a:xfrm>
+          <a:prstGeom prst="rect">
+            <a:avLst/>
+          </a:prstGeom>
+          <a:noFill/>
+        </p:spPr>
+        <p:txBody>
+          <a:bodyPr wrap="square" anchor="ctr" lIns="0" rIns="0" tIns="0" bIns="0">
+            <a:spAutoFit/>
+          </a:bodyPr>
+          <a:lstStyle/>
+          <a:p>
+            <a:pPr algn="l"/>
+            <a:r>
+              <a:rPr sz="1250" b="1" i="0">
+                <a:solidFill>
                   <a:srgbClr val="2A9D8F"/>
                 </a:solidFill>
                 <a:latin typeface="Arial"/>
               </a:rPr>
-              <a:t>WHY</a:t>
-            </a:r>
-          </a:p>
-        </p:txBody>
-      </p:sp>
-      <p:sp>
-        <p:nvSpPr>
-          <p:cNvPr id="13" name="TextBox 12"/>
-          <p:cNvSpPr txBox="1"/>
-          <p:nvPr/>
-        </p:nvSpPr>
-        <p:spPr>
-          <a:xfrm>
-            <a:off x="1005840" y="4297680"/>
-            <a:ext cx="10149840" cy="1280160"/>
-          </a:xfrm>
-          <a:prstGeom prst="rect">
-            <a:avLst/>
-          </a:prstGeom>
-          <a:noFill/>
-        </p:spPr>
-        <p:txBody>
-          <a:bodyPr wrap="square" anchor="t" lIns="0" rIns="0" tIns="0" bIns="0">
-            <a:spAutoFit/>
-          </a:bodyPr>
-          <a:lstStyle/>
-          <a:p>
-            <a:pPr algn="l">
-              <a:lnSpc>
-                <a:spcPct val="110000"/>
-              </a:lnSpc>
-            </a:pPr>
-            <a:r>
-              <a:rPr sz="1600" b="0" i="0">
+              <a:t>Why  </a:t>
+            </a:r>
+            <a:r>
+              <a:rPr sz="1200" b="0" i="0">
                 <a:solidFill>
                   <a:srgbClr val="1D2433"/>
                 </a:solidFill>
@@ -7888,7 +9112,7 @@
                 </a:solidFill>
                 <a:latin typeface="Calibri"/>
               </a:rPr>
-              <a:t>Q3 — Shadow colour</a:t>
+              <a:t>Q3 - Shadow colour</a:t>
             </a:r>
           </a:p>
         </p:txBody>
@@ -8184,7 +9408,7 @@
         <p:spPr>
           <a:xfrm>
             <a:off x="1508760" y="3749039"/>
-            <a:ext cx="4297680" cy="868680"/>
+            <a:ext cx="3840480" cy="868680"/>
           </a:xfrm>
           <a:prstGeom prst="rect">
             <a:avLst/>
@@ -8344,7 +9568,7 @@
         <p:spPr>
           <a:xfrm>
             <a:off x="7040880" y="3749039"/>
-            <a:ext cx="4297680" cy="868680"/>
+            <a:ext cx="3840480" cy="868680"/>
           </a:xfrm>
           <a:prstGeom prst="rect">
             <a:avLst/>
@@ -8504,7 +9728,7 @@
         <p:spPr>
           <a:xfrm>
             <a:off x="1508760" y="4782312"/>
-            <a:ext cx="4297680" cy="868680"/>
+            <a:ext cx="3840480" cy="868680"/>
           </a:xfrm>
           <a:prstGeom prst="rect">
             <a:avLst/>
@@ -8664,7 +9888,7 @@
         <p:spPr>
           <a:xfrm>
             <a:off x="7040880" y="4782312"/>
-            <a:ext cx="4297680" cy="868680"/>
+            <a:ext cx="3840480" cy="868680"/>
           </a:xfrm>
           <a:prstGeom prst="rect">
             <a:avLst/>
@@ -8731,7 +9955,7 @@
             <a:avLst/>
           </a:prstGeom>
           <a:solidFill>
-            <a:srgbClr val="2A9D8F"/>
+            <a:srgbClr val="0A9396"/>
           </a:solidFill>
           <a:ln>
             <a:noFill/>
@@ -8786,11 +10010,11 @@
             <a:r>
               <a:rPr sz="1300" b="1" i="0">
                 <a:solidFill>
-                  <a:srgbClr val="2A9D8F"/>
+                  <a:srgbClr val="0A9396"/>
                 </a:solidFill>
                 <a:latin typeface="Arial"/>
               </a:rPr>
-              <a:t>ANSWER REVEAL</a:t>
+              <a:t>QUIZ QUESTION</a:t>
             </a:r>
           </a:p>
         </p:txBody>
@@ -8825,7 +10049,7 @@
                 </a:solidFill>
                 <a:latin typeface="Calibri"/>
               </a:rPr>
-              <a:t>Q3 — Answer</a:t>
+              <a:t>Q3 - Shadow colour</a:t>
             </a:r>
           </a:p>
         </p:txBody>
@@ -8914,166 +10138,6 @@
           <a:prstGeom prst="roundRect">
             <a:avLst>
               <a:gd name="adj" fmla="val 4000"/>
-            </a:avLst>
-          </a:prstGeom>
-          <a:solidFill>
-            <a:srgbClr val="E9F5F0"/>
-          </a:solidFill>
-          <a:ln>
-            <a:noFill/>
-          </a:ln>
-          <a:effectLst/>
-        </p:spPr>
-        <p:style>
-          <a:lnRef idx="1">
-            <a:schemeClr val="accent1"/>
-          </a:lnRef>
-          <a:fillRef idx="3">
-            <a:schemeClr val="accent1"/>
-          </a:fillRef>
-          <a:effectRef idx="2">
-            <a:schemeClr val="accent1"/>
-          </a:effectRef>
-          <a:fontRef idx="minor">
-            <a:schemeClr val="lt1"/>
-          </a:fontRef>
-        </p:style>
-        <p:txBody>
-          <a:bodyPr rtlCol="0" anchor="ctr"/>
-          <a:lstStyle/>
-          <a:p>
-            <a:pPr algn="ctr"/>
-          </a:p>
-        </p:txBody>
-      </p:sp>
-      <p:sp>
-        <p:nvSpPr>
-          <p:cNvPr id="8" name="Oval 7"/>
-          <p:cNvSpPr/>
-          <p:nvPr/>
-        </p:nvSpPr>
-        <p:spPr>
-          <a:xfrm>
-            <a:off x="1005840" y="2240280"/>
-            <a:ext cx="731520" cy="731520"/>
-          </a:xfrm>
-          <a:prstGeom prst="ellipse">
-            <a:avLst/>
-          </a:prstGeom>
-          <a:solidFill>
-            <a:srgbClr val="2A9D8F"/>
-          </a:solidFill>
-          <a:ln>
-            <a:noFill/>
-          </a:ln>
-          <a:effectLst/>
-        </p:spPr>
-        <p:style>
-          <a:lnRef idx="1">
-            <a:schemeClr val="accent1"/>
-          </a:lnRef>
-          <a:fillRef idx="3">
-            <a:schemeClr val="accent1"/>
-          </a:fillRef>
-          <a:effectRef idx="2">
-            <a:schemeClr val="accent1"/>
-          </a:effectRef>
-          <a:fontRef idx="minor">
-            <a:schemeClr val="lt1"/>
-          </a:fontRef>
-        </p:style>
-        <p:txBody>
-          <a:bodyPr rtlCol="0" anchor="ctr"/>
-          <a:lstStyle/>
-          <a:p>
-            <a:pPr algn="ctr"/>
-          </a:p>
-        </p:txBody>
-      </p:sp>
-      <p:sp>
-        <p:nvSpPr>
-          <p:cNvPr id="9" name="TextBox 8"/>
-          <p:cNvSpPr txBox="1"/>
-          <p:nvPr/>
-        </p:nvSpPr>
-        <p:spPr>
-          <a:xfrm>
-            <a:off x="1005840" y="2240280"/>
-            <a:ext cx="731520" cy="731520"/>
-          </a:xfrm>
-          <a:prstGeom prst="rect">
-            <a:avLst/>
-          </a:prstGeom>
-          <a:noFill/>
-        </p:spPr>
-        <p:txBody>
-          <a:bodyPr wrap="square" anchor="ctr" lIns="0" rIns="0" tIns="0" bIns="0">
-            <a:spAutoFit/>
-          </a:bodyPr>
-          <a:lstStyle/>
-          <a:p>
-            <a:pPr algn="ctr"/>
-            <a:r>
-              <a:rPr sz="3000" b="1" i="0">
-                <a:solidFill>
-                  <a:srgbClr val="FFFFFF"/>
-                </a:solidFill>
-                <a:latin typeface="Calibri"/>
-              </a:rPr>
-              <a:t>✓</a:t>
-            </a:r>
-          </a:p>
-        </p:txBody>
-      </p:sp>
-      <p:sp>
-        <p:nvSpPr>
-          <p:cNvPr id="10" name="TextBox 9"/>
-          <p:cNvSpPr txBox="1"/>
-          <p:nvPr/>
-        </p:nvSpPr>
-        <p:spPr>
-          <a:xfrm>
-            <a:off x="1920240" y="1828800"/>
-            <a:ext cx="9326880" cy="1554480"/>
-          </a:xfrm>
-          <a:prstGeom prst="rect">
-            <a:avLst/>
-          </a:prstGeom>
-          <a:noFill/>
-        </p:spPr>
-        <p:txBody>
-          <a:bodyPr wrap="square" anchor="ctr" lIns="0" rIns="0" tIns="0" bIns="0">
-            <a:spAutoFit/>
-          </a:bodyPr>
-          <a:lstStyle/>
-          <a:p>
-            <a:pPr algn="l"/>
-            <a:r>
-              <a:rPr sz="2200" b="1" i="0">
-                <a:solidFill>
-                  <a:srgbClr val="1D2433"/>
-                </a:solidFill>
-                <a:latin typeface="Calibri"/>
-              </a:rPr>
-              <a:t>B. Black</a:t>
-            </a:r>
-          </a:p>
-        </p:txBody>
-      </p:sp>
-      <p:sp>
-        <p:nvSpPr>
-          <p:cNvPr id="11" name="Rounded Rectangle 10"/>
-          <p:cNvSpPr/>
-          <p:nvPr/>
-        </p:nvSpPr>
-        <p:spPr>
-          <a:xfrm>
-            <a:off x="640080" y="3657600"/>
-            <a:ext cx="10881360" cy="2011680"/>
-          </a:xfrm>
-          <a:prstGeom prst="roundRect">
-            <a:avLst>
-              <a:gd name="adj" fmla="val 3000"/>
             </a:avLst>
           </a:prstGeom>
           <a:solidFill>
@@ -9114,68 +10178,840 @@
       </p:sp>
       <p:sp>
         <p:nvSpPr>
+          <p:cNvPr id="8" name="TextBox 7"/>
+          <p:cNvSpPr txBox="1"/>
+          <p:nvPr/>
+        </p:nvSpPr>
+        <p:spPr>
+          <a:xfrm>
+            <a:off x="1005840" y="1828800"/>
+            <a:ext cx="10149840" cy="1554480"/>
+          </a:xfrm>
+          <a:prstGeom prst="rect">
+            <a:avLst/>
+          </a:prstGeom>
+          <a:noFill/>
+        </p:spPr>
+        <p:txBody>
+          <a:bodyPr wrap="square" anchor="ctr" lIns="0" rIns="0" tIns="0" bIns="0">
+            <a:spAutoFit/>
+          </a:bodyPr>
+          <a:lstStyle/>
+          <a:p>
+            <a:pPr algn="l"/>
+            <a:r>
+              <a:rPr sz="1900" b="1" i="0">
+                <a:solidFill>
+                  <a:srgbClr val="1D2433"/>
+                </a:solidFill>
+                <a:latin typeface="Calibri"/>
+              </a:rPr>
+              <a:t>The colour of a shadow is always:</a:t>
+            </a:r>
+          </a:p>
+        </p:txBody>
+      </p:sp>
+      <p:sp>
+        <p:nvSpPr>
+          <p:cNvPr id="9" name="Rounded Rectangle 8"/>
+          <p:cNvSpPr/>
+          <p:nvPr/>
+        </p:nvSpPr>
+        <p:spPr>
+          <a:xfrm>
+            <a:off x="640080" y="3749039"/>
+            <a:ext cx="5349240" cy="868680"/>
+          </a:xfrm>
+          <a:prstGeom prst="roundRect">
+            <a:avLst>
+              <a:gd name="adj" fmla="val 12000"/>
+            </a:avLst>
+          </a:prstGeom>
+          <a:solidFill>
+            <a:srgbClr val="EAF1F4"/>
+          </a:solidFill>
+          <a:ln>
+            <a:noFill/>
+          </a:ln>
+          <a:effectLst/>
+        </p:spPr>
+        <p:style>
+          <a:lnRef idx="1">
+            <a:schemeClr val="accent1"/>
+          </a:lnRef>
+          <a:fillRef idx="3">
+            <a:schemeClr val="accent1"/>
+          </a:fillRef>
+          <a:effectRef idx="2">
+            <a:schemeClr val="accent1"/>
+          </a:effectRef>
+          <a:fontRef idx="minor">
+            <a:schemeClr val="lt1"/>
+          </a:fontRef>
+        </p:style>
+        <p:txBody>
+          <a:bodyPr rtlCol="0" anchor="ctr"/>
+          <a:lstStyle/>
+          <a:p>
+            <a:pPr algn="ctr"/>
+          </a:p>
+        </p:txBody>
+      </p:sp>
+      <p:sp>
+        <p:nvSpPr>
+          <p:cNvPr id="10" name="Oval 9"/>
+          <p:cNvSpPr/>
+          <p:nvPr/>
+        </p:nvSpPr>
+        <p:spPr>
+          <a:xfrm>
+            <a:off x="914400" y="3977639"/>
+            <a:ext cx="411480" cy="411480"/>
+          </a:xfrm>
+          <a:prstGeom prst="ellipse">
+            <a:avLst/>
+          </a:prstGeom>
+          <a:solidFill>
+            <a:srgbClr val="0A9396"/>
+          </a:solidFill>
+          <a:ln>
+            <a:noFill/>
+          </a:ln>
+          <a:effectLst/>
+        </p:spPr>
+        <p:style>
+          <a:lnRef idx="1">
+            <a:schemeClr val="accent1"/>
+          </a:lnRef>
+          <a:fillRef idx="3">
+            <a:schemeClr val="accent1"/>
+          </a:fillRef>
+          <a:effectRef idx="2">
+            <a:schemeClr val="accent1"/>
+          </a:effectRef>
+          <a:fontRef idx="minor">
+            <a:schemeClr val="lt1"/>
+          </a:fontRef>
+        </p:style>
+        <p:txBody>
+          <a:bodyPr rtlCol="0" anchor="ctr"/>
+          <a:lstStyle/>
+          <a:p>
+            <a:pPr algn="ctr"/>
+          </a:p>
+        </p:txBody>
+      </p:sp>
+      <p:sp>
+        <p:nvSpPr>
+          <p:cNvPr id="11" name="TextBox 10"/>
+          <p:cNvSpPr txBox="1"/>
+          <p:nvPr/>
+        </p:nvSpPr>
+        <p:spPr>
+          <a:xfrm>
+            <a:off x="914400" y="3977639"/>
+            <a:ext cx="411480" cy="411480"/>
+          </a:xfrm>
+          <a:prstGeom prst="rect">
+            <a:avLst/>
+          </a:prstGeom>
+          <a:noFill/>
+        </p:spPr>
+        <p:txBody>
+          <a:bodyPr wrap="square" anchor="ctr" lIns="0" rIns="0" tIns="0" bIns="0">
+            <a:spAutoFit/>
+          </a:bodyPr>
+          <a:lstStyle/>
+          <a:p>
+            <a:pPr algn="ctr"/>
+            <a:r>
+              <a:rPr sz="1400" b="1" i="0">
+                <a:solidFill>
+                  <a:srgbClr val="FFFFFF"/>
+                </a:solidFill>
+                <a:latin typeface="Calibri"/>
+              </a:rPr>
+              <a:t>A</a:t>
+            </a:r>
+          </a:p>
+        </p:txBody>
+      </p:sp>
+      <p:sp>
+        <p:nvSpPr>
           <p:cNvPr id="12" name="TextBox 11"/>
           <p:cNvSpPr txBox="1"/>
           <p:nvPr/>
         </p:nvSpPr>
         <p:spPr>
           <a:xfrm>
-            <a:off x="1005840" y="3886200"/>
-            <a:ext cx="4572000" cy="365760"/>
-          </a:xfrm>
-          <a:prstGeom prst="rect">
-            <a:avLst/>
-          </a:prstGeom>
-          <a:noFill/>
-        </p:spPr>
-        <p:txBody>
-          <a:bodyPr wrap="square" anchor="t" lIns="0" rIns="0" tIns="0" bIns="0">
+            <a:off x="1508760" y="3749039"/>
+            <a:ext cx="3840480" cy="868680"/>
+          </a:xfrm>
+          <a:prstGeom prst="rect">
+            <a:avLst/>
+          </a:prstGeom>
+          <a:noFill/>
+        </p:spPr>
+        <p:txBody>
+          <a:bodyPr wrap="square" anchor="ctr" lIns="0" rIns="0" tIns="0" bIns="0">
             <a:spAutoFit/>
           </a:bodyPr>
           <a:lstStyle/>
           <a:p>
             <a:pPr algn="l"/>
             <a:r>
+              <a:rPr sz="1450" b="0" i="0">
+                <a:solidFill>
+                  <a:srgbClr val="1D2433"/>
+                </a:solidFill>
+                <a:latin typeface="Calibri"/>
+              </a:rPr>
+              <a:t>The colour of the object</a:t>
+            </a:r>
+          </a:p>
+        </p:txBody>
+      </p:sp>
+      <p:sp>
+        <p:nvSpPr>
+          <p:cNvPr id="13" name="Rounded Rectangle 12"/>
+          <p:cNvSpPr/>
+          <p:nvPr/>
+        </p:nvSpPr>
+        <p:spPr>
+          <a:xfrm>
+            <a:off x="6172200" y="3749039"/>
+            <a:ext cx="5349240" cy="868680"/>
+          </a:xfrm>
+          <a:prstGeom prst="roundRect">
+            <a:avLst>
+              <a:gd name="adj" fmla="val 12000"/>
+            </a:avLst>
+          </a:prstGeom>
+          <a:solidFill>
+            <a:srgbClr val="E9F5F0"/>
+          </a:solidFill>
+          <a:ln w="31750">
+            <a:solidFill>
+              <a:srgbClr val="2A9D8F"/>
+            </a:solidFill>
+          </a:ln>
+          <a:effectLst/>
+        </p:spPr>
+        <p:style>
+          <a:lnRef idx="1">
+            <a:schemeClr val="accent1"/>
+          </a:lnRef>
+          <a:fillRef idx="3">
+            <a:schemeClr val="accent1"/>
+          </a:fillRef>
+          <a:effectRef idx="2">
+            <a:schemeClr val="accent1"/>
+          </a:effectRef>
+          <a:fontRef idx="minor">
+            <a:schemeClr val="lt1"/>
+          </a:fontRef>
+        </p:style>
+        <p:txBody>
+          <a:bodyPr rtlCol="0" anchor="ctr"/>
+          <a:lstStyle/>
+          <a:p>
+            <a:pPr algn="ctr"/>
+          </a:p>
+        </p:txBody>
+      </p:sp>
+      <p:sp>
+        <p:nvSpPr>
+          <p:cNvPr id="14" name="Oval 13"/>
+          <p:cNvSpPr/>
+          <p:nvPr/>
+        </p:nvSpPr>
+        <p:spPr>
+          <a:xfrm>
+            <a:off x="6446520" y="3977639"/>
+            <a:ext cx="411480" cy="411480"/>
+          </a:xfrm>
+          <a:prstGeom prst="ellipse">
+            <a:avLst/>
+          </a:prstGeom>
+          <a:solidFill>
+            <a:srgbClr val="2A9D8F"/>
+          </a:solidFill>
+          <a:ln>
+            <a:noFill/>
+          </a:ln>
+          <a:effectLst/>
+        </p:spPr>
+        <p:style>
+          <a:lnRef idx="1">
+            <a:schemeClr val="accent1"/>
+          </a:lnRef>
+          <a:fillRef idx="3">
+            <a:schemeClr val="accent1"/>
+          </a:fillRef>
+          <a:effectRef idx="2">
+            <a:schemeClr val="accent1"/>
+          </a:effectRef>
+          <a:fontRef idx="minor">
+            <a:schemeClr val="lt1"/>
+          </a:fontRef>
+        </p:style>
+        <p:txBody>
+          <a:bodyPr rtlCol="0" anchor="ctr"/>
+          <a:lstStyle/>
+          <a:p>
+            <a:pPr algn="ctr"/>
+          </a:p>
+        </p:txBody>
+      </p:sp>
+      <p:sp>
+        <p:nvSpPr>
+          <p:cNvPr id="15" name="TextBox 14"/>
+          <p:cNvSpPr txBox="1"/>
+          <p:nvPr/>
+        </p:nvSpPr>
+        <p:spPr>
+          <a:xfrm>
+            <a:off x="6446520" y="3977639"/>
+            <a:ext cx="411480" cy="411480"/>
+          </a:xfrm>
+          <a:prstGeom prst="rect">
+            <a:avLst/>
+          </a:prstGeom>
+          <a:noFill/>
+        </p:spPr>
+        <p:txBody>
+          <a:bodyPr wrap="square" anchor="ctr" lIns="0" rIns="0" tIns="0" bIns="0">
+            <a:spAutoFit/>
+          </a:bodyPr>
+          <a:lstStyle/>
+          <a:p>
+            <a:pPr algn="ctr"/>
+            <a:r>
               <a:rPr sz="1400" b="1" i="0">
                 <a:solidFill>
+                  <a:srgbClr val="FFFFFF"/>
+                </a:solidFill>
+                <a:latin typeface="Calibri"/>
+              </a:rPr>
+              <a:t>B</a:t>
+            </a:r>
+          </a:p>
+        </p:txBody>
+      </p:sp>
+      <p:sp>
+        <p:nvSpPr>
+          <p:cNvPr id="16" name="TextBox 15"/>
+          <p:cNvSpPr txBox="1"/>
+          <p:nvPr/>
+        </p:nvSpPr>
+        <p:spPr>
+          <a:xfrm>
+            <a:off x="7040880" y="3749039"/>
+            <a:ext cx="3840480" cy="868680"/>
+          </a:xfrm>
+          <a:prstGeom prst="rect">
+            <a:avLst/>
+          </a:prstGeom>
+          <a:noFill/>
+        </p:spPr>
+        <p:txBody>
+          <a:bodyPr wrap="square" anchor="ctr" lIns="0" rIns="0" tIns="0" bIns="0">
+            <a:spAutoFit/>
+          </a:bodyPr>
+          <a:lstStyle/>
+          <a:p>
+            <a:pPr algn="l"/>
+            <a:r>
+              <a:rPr sz="1450" b="1" i="0">
+                <a:solidFill>
+                  <a:srgbClr val="1D2433"/>
+                </a:solidFill>
+                <a:latin typeface="Calibri"/>
+              </a:rPr>
+              <a:t>Black</a:t>
+            </a:r>
+          </a:p>
+        </p:txBody>
+      </p:sp>
+      <p:sp>
+        <p:nvSpPr>
+          <p:cNvPr id="17" name="Oval 16"/>
+          <p:cNvSpPr/>
+          <p:nvPr/>
+        </p:nvSpPr>
+        <p:spPr>
+          <a:xfrm>
+            <a:off x="10972800" y="3995927"/>
+            <a:ext cx="365760" cy="365760"/>
+          </a:xfrm>
+          <a:prstGeom prst="ellipse">
+            <a:avLst/>
+          </a:prstGeom>
+          <a:solidFill>
+            <a:srgbClr val="2A9D8F"/>
+          </a:solidFill>
+          <a:ln>
+            <a:noFill/>
+          </a:ln>
+          <a:effectLst/>
+        </p:spPr>
+        <p:style>
+          <a:lnRef idx="1">
+            <a:schemeClr val="accent1"/>
+          </a:lnRef>
+          <a:fillRef idx="3">
+            <a:schemeClr val="accent1"/>
+          </a:fillRef>
+          <a:effectRef idx="2">
+            <a:schemeClr val="accent1"/>
+          </a:effectRef>
+          <a:fontRef idx="minor">
+            <a:schemeClr val="lt1"/>
+          </a:fontRef>
+        </p:style>
+        <p:txBody>
+          <a:bodyPr rtlCol="0" anchor="ctr"/>
+          <a:lstStyle/>
+          <a:p>
+            <a:pPr algn="ctr"/>
+          </a:p>
+        </p:txBody>
+      </p:sp>
+      <p:sp>
+        <p:nvSpPr>
+          <p:cNvPr id="18" name="TextBox 17"/>
+          <p:cNvSpPr txBox="1"/>
+          <p:nvPr/>
+        </p:nvSpPr>
+        <p:spPr>
+          <a:xfrm>
+            <a:off x="10972800" y="3950207"/>
+            <a:ext cx="365760" cy="365760"/>
+          </a:xfrm>
+          <a:prstGeom prst="rect">
+            <a:avLst/>
+          </a:prstGeom>
+          <a:noFill/>
+        </p:spPr>
+        <p:txBody>
+          <a:bodyPr wrap="square" anchor="ctr" lIns="0" rIns="0" tIns="0" bIns="0">
+            <a:spAutoFit/>
+          </a:bodyPr>
+          <a:lstStyle/>
+          <a:p>
+            <a:pPr algn="ctr"/>
+            <a:r>
+              <a:rPr sz="1600" b="1" i="0">
+                <a:solidFill>
+                  <a:srgbClr val="FFFFFF"/>
+                </a:solidFill>
+                <a:latin typeface="Calibri"/>
+              </a:rPr>
+              <a:t>✓</a:t>
+            </a:r>
+          </a:p>
+        </p:txBody>
+      </p:sp>
+      <p:sp>
+        <p:nvSpPr>
+          <p:cNvPr id="19" name="Rounded Rectangle 18"/>
+          <p:cNvSpPr/>
+          <p:nvPr/>
+        </p:nvSpPr>
+        <p:spPr>
+          <a:xfrm>
+            <a:off x="640080" y="4782312"/>
+            <a:ext cx="5349240" cy="868680"/>
+          </a:xfrm>
+          <a:prstGeom prst="roundRect">
+            <a:avLst>
+              <a:gd name="adj" fmla="val 12000"/>
+            </a:avLst>
+          </a:prstGeom>
+          <a:solidFill>
+            <a:srgbClr val="EAF1F4"/>
+          </a:solidFill>
+          <a:ln>
+            <a:noFill/>
+          </a:ln>
+          <a:effectLst/>
+        </p:spPr>
+        <p:style>
+          <a:lnRef idx="1">
+            <a:schemeClr val="accent1"/>
+          </a:lnRef>
+          <a:fillRef idx="3">
+            <a:schemeClr val="accent1"/>
+          </a:fillRef>
+          <a:effectRef idx="2">
+            <a:schemeClr val="accent1"/>
+          </a:effectRef>
+          <a:fontRef idx="minor">
+            <a:schemeClr val="lt1"/>
+          </a:fontRef>
+        </p:style>
+        <p:txBody>
+          <a:bodyPr rtlCol="0" anchor="ctr"/>
+          <a:lstStyle/>
+          <a:p>
+            <a:pPr algn="ctr"/>
+          </a:p>
+        </p:txBody>
+      </p:sp>
+      <p:sp>
+        <p:nvSpPr>
+          <p:cNvPr id="20" name="Oval 19"/>
+          <p:cNvSpPr/>
+          <p:nvPr/>
+        </p:nvSpPr>
+        <p:spPr>
+          <a:xfrm>
+            <a:off x="914400" y="5010912"/>
+            <a:ext cx="411480" cy="411480"/>
+          </a:xfrm>
+          <a:prstGeom prst="ellipse">
+            <a:avLst/>
+          </a:prstGeom>
+          <a:solidFill>
+            <a:srgbClr val="0A9396"/>
+          </a:solidFill>
+          <a:ln>
+            <a:noFill/>
+          </a:ln>
+          <a:effectLst/>
+        </p:spPr>
+        <p:style>
+          <a:lnRef idx="1">
+            <a:schemeClr val="accent1"/>
+          </a:lnRef>
+          <a:fillRef idx="3">
+            <a:schemeClr val="accent1"/>
+          </a:fillRef>
+          <a:effectRef idx="2">
+            <a:schemeClr val="accent1"/>
+          </a:effectRef>
+          <a:fontRef idx="minor">
+            <a:schemeClr val="lt1"/>
+          </a:fontRef>
+        </p:style>
+        <p:txBody>
+          <a:bodyPr rtlCol="0" anchor="ctr"/>
+          <a:lstStyle/>
+          <a:p>
+            <a:pPr algn="ctr"/>
+          </a:p>
+        </p:txBody>
+      </p:sp>
+      <p:sp>
+        <p:nvSpPr>
+          <p:cNvPr id="21" name="TextBox 20"/>
+          <p:cNvSpPr txBox="1"/>
+          <p:nvPr/>
+        </p:nvSpPr>
+        <p:spPr>
+          <a:xfrm>
+            <a:off x="914400" y="5010912"/>
+            <a:ext cx="411480" cy="411480"/>
+          </a:xfrm>
+          <a:prstGeom prst="rect">
+            <a:avLst/>
+          </a:prstGeom>
+          <a:noFill/>
+        </p:spPr>
+        <p:txBody>
+          <a:bodyPr wrap="square" anchor="ctr" lIns="0" rIns="0" tIns="0" bIns="0">
+            <a:spAutoFit/>
+          </a:bodyPr>
+          <a:lstStyle/>
+          <a:p>
+            <a:pPr algn="ctr"/>
+            <a:r>
+              <a:rPr sz="1400" b="1" i="0">
+                <a:solidFill>
+                  <a:srgbClr val="FFFFFF"/>
+                </a:solidFill>
+                <a:latin typeface="Calibri"/>
+              </a:rPr>
+              <a:t>C</a:t>
+            </a:r>
+          </a:p>
+        </p:txBody>
+      </p:sp>
+      <p:sp>
+        <p:nvSpPr>
+          <p:cNvPr id="22" name="TextBox 21"/>
+          <p:cNvSpPr txBox="1"/>
+          <p:nvPr/>
+        </p:nvSpPr>
+        <p:spPr>
+          <a:xfrm>
+            <a:off x="1508760" y="4782312"/>
+            <a:ext cx="3840480" cy="868680"/>
+          </a:xfrm>
+          <a:prstGeom prst="rect">
+            <a:avLst/>
+          </a:prstGeom>
+          <a:noFill/>
+        </p:spPr>
+        <p:txBody>
+          <a:bodyPr wrap="square" anchor="ctr" lIns="0" rIns="0" tIns="0" bIns="0">
+            <a:spAutoFit/>
+          </a:bodyPr>
+          <a:lstStyle/>
+          <a:p>
+            <a:pPr algn="l"/>
+            <a:r>
+              <a:rPr sz="1450" b="0" i="0">
+                <a:solidFill>
+                  <a:srgbClr val="1D2433"/>
+                </a:solidFill>
+                <a:latin typeface="Calibri"/>
+              </a:rPr>
+              <a:t>The colour of the light</a:t>
+            </a:r>
+          </a:p>
+        </p:txBody>
+      </p:sp>
+      <p:sp>
+        <p:nvSpPr>
+          <p:cNvPr id="23" name="Rounded Rectangle 22"/>
+          <p:cNvSpPr/>
+          <p:nvPr/>
+        </p:nvSpPr>
+        <p:spPr>
+          <a:xfrm>
+            <a:off x="6172200" y="4782312"/>
+            <a:ext cx="5349240" cy="868680"/>
+          </a:xfrm>
+          <a:prstGeom prst="roundRect">
+            <a:avLst>
+              <a:gd name="adj" fmla="val 12000"/>
+            </a:avLst>
+          </a:prstGeom>
+          <a:solidFill>
+            <a:srgbClr val="EAF1F4"/>
+          </a:solidFill>
+          <a:ln>
+            <a:noFill/>
+          </a:ln>
+          <a:effectLst/>
+        </p:spPr>
+        <p:style>
+          <a:lnRef idx="1">
+            <a:schemeClr val="accent1"/>
+          </a:lnRef>
+          <a:fillRef idx="3">
+            <a:schemeClr val="accent1"/>
+          </a:fillRef>
+          <a:effectRef idx="2">
+            <a:schemeClr val="accent1"/>
+          </a:effectRef>
+          <a:fontRef idx="minor">
+            <a:schemeClr val="lt1"/>
+          </a:fontRef>
+        </p:style>
+        <p:txBody>
+          <a:bodyPr rtlCol="0" anchor="ctr"/>
+          <a:lstStyle/>
+          <a:p>
+            <a:pPr algn="ctr"/>
+          </a:p>
+        </p:txBody>
+      </p:sp>
+      <p:sp>
+        <p:nvSpPr>
+          <p:cNvPr id="24" name="Oval 23"/>
+          <p:cNvSpPr/>
+          <p:nvPr/>
+        </p:nvSpPr>
+        <p:spPr>
+          <a:xfrm>
+            <a:off x="6446520" y="5010912"/>
+            <a:ext cx="411480" cy="411480"/>
+          </a:xfrm>
+          <a:prstGeom prst="ellipse">
+            <a:avLst/>
+          </a:prstGeom>
+          <a:solidFill>
+            <a:srgbClr val="0A9396"/>
+          </a:solidFill>
+          <a:ln>
+            <a:noFill/>
+          </a:ln>
+          <a:effectLst/>
+        </p:spPr>
+        <p:style>
+          <a:lnRef idx="1">
+            <a:schemeClr val="accent1"/>
+          </a:lnRef>
+          <a:fillRef idx="3">
+            <a:schemeClr val="accent1"/>
+          </a:fillRef>
+          <a:effectRef idx="2">
+            <a:schemeClr val="accent1"/>
+          </a:effectRef>
+          <a:fontRef idx="minor">
+            <a:schemeClr val="lt1"/>
+          </a:fontRef>
+        </p:style>
+        <p:txBody>
+          <a:bodyPr rtlCol="0" anchor="ctr"/>
+          <a:lstStyle/>
+          <a:p>
+            <a:pPr algn="ctr"/>
+          </a:p>
+        </p:txBody>
+      </p:sp>
+      <p:sp>
+        <p:nvSpPr>
+          <p:cNvPr id="25" name="TextBox 24"/>
+          <p:cNvSpPr txBox="1"/>
+          <p:nvPr/>
+        </p:nvSpPr>
+        <p:spPr>
+          <a:xfrm>
+            <a:off x="6446520" y="5010912"/>
+            <a:ext cx="411480" cy="411480"/>
+          </a:xfrm>
+          <a:prstGeom prst="rect">
+            <a:avLst/>
+          </a:prstGeom>
+          <a:noFill/>
+        </p:spPr>
+        <p:txBody>
+          <a:bodyPr wrap="square" anchor="ctr" lIns="0" rIns="0" tIns="0" bIns="0">
+            <a:spAutoFit/>
+          </a:bodyPr>
+          <a:lstStyle/>
+          <a:p>
+            <a:pPr algn="ctr"/>
+            <a:r>
+              <a:rPr sz="1400" b="1" i="0">
+                <a:solidFill>
+                  <a:srgbClr val="FFFFFF"/>
+                </a:solidFill>
+                <a:latin typeface="Calibri"/>
+              </a:rPr>
+              <a:t>D</a:t>
+            </a:r>
+          </a:p>
+        </p:txBody>
+      </p:sp>
+      <p:sp>
+        <p:nvSpPr>
+          <p:cNvPr id="26" name="TextBox 25"/>
+          <p:cNvSpPr txBox="1"/>
+          <p:nvPr/>
+        </p:nvSpPr>
+        <p:spPr>
+          <a:xfrm>
+            <a:off x="7040880" y="4782312"/>
+            <a:ext cx="3840480" cy="868680"/>
+          </a:xfrm>
+          <a:prstGeom prst="rect">
+            <a:avLst/>
+          </a:prstGeom>
+          <a:noFill/>
+        </p:spPr>
+        <p:txBody>
+          <a:bodyPr wrap="square" anchor="ctr" lIns="0" rIns="0" tIns="0" bIns="0">
+            <a:spAutoFit/>
+          </a:bodyPr>
+          <a:lstStyle/>
+          <a:p>
+            <a:pPr algn="l"/>
+            <a:r>
+              <a:rPr sz="1450" b="0" i="0">
+                <a:solidFill>
+                  <a:srgbClr val="1D2433"/>
+                </a:solidFill>
+                <a:latin typeface="Calibri"/>
+              </a:rPr>
+              <a:t>White</a:t>
+            </a:r>
+          </a:p>
+        </p:txBody>
+      </p:sp>
+      <p:sp>
+        <p:nvSpPr>
+          <p:cNvPr id="27" name="Rounded Rectangle 26"/>
+          <p:cNvSpPr/>
+          <p:nvPr/>
+        </p:nvSpPr>
+        <p:spPr>
+          <a:xfrm>
+            <a:off x="640080" y="5779008"/>
+            <a:ext cx="10881360" cy="566928"/>
+          </a:xfrm>
+          <a:prstGeom prst="roundRect">
+            <a:avLst>
+              <a:gd name="adj" fmla="val 10000"/>
+            </a:avLst>
+          </a:prstGeom>
+          <a:solidFill>
+            <a:srgbClr val="EEF2F7"/>
+          </a:solidFill>
+          <a:ln>
+            <a:noFill/>
+          </a:ln>
+          <a:effectLst/>
+        </p:spPr>
+        <p:style>
+          <a:lnRef idx="1">
+            <a:schemeClr val="accent1"/>
+          </a:lnRef>
+          <a:fillRef idx="3">
+            <a:schemeClr val="accent1"/>
+          </a:fillRef>
+          <a:effectRef idx="2">
+            <a:schemeClr val="accent1"/>
+          </a:effectRef>
+          <a:fontRef idx="minor">
+            <a:schemeClr val="lt1"/>
+          </a:fontRef>
+        </p:style>
+        <p:txBody>
+          <a:bodyPr rtlCol="0" anchor="ctr"/>
+          <a:lstStyle/>
+          <a:p>
+            <a:pPr algn="ctr"/>
+          </a:p>
+        </p:txBody>
+      </p:sp>
+      <p:sp>
+        <p:nvSpPr>
+          <p:cNvPr id="28" name="TextBox 27"/>
+          <p:cNvSpPr txBox="1"/>
+          <p:nvPr/>
+        </p:nvSpPr>
+        <p:spPr>
+          <a:xfrm>
+            <a:off x="914400" y="5779008"/>
+            <a:ext cx="10332720" cy="566928"/>
+          </a:xfrm>
+          <a:prstGeom prst="rect">
+            <a:avLst/>
+          </a:prstGeom>
+          <a:noFill/>
+        </p:spPr>
+        <p:txBody>
+          <a:bodyPr wrap="square" anchor="ctr" lIns="0" rIns="0" tIns="0" bIns="0">
+            <a:spAutoFit/>
+          </a:bodyPr>
+          <a:lstStyle/>
+          <a:p>
+            <a:pPr algn="l"/>
+            <a:r>
+              <a:rPr sz="1250" b="1" i="0">
+                <a:solidFill>
                   <a:srgbClr val="2A9D8F"/>
                 </a:solidFill>
                 <a:latin typeface="Arial"/>
               </a:rPr>
-              <a:t>WHY</a:t>
-            </a:r>
-          </a:p>
-        </p:txBody>
-      </p:sp>
-      <p:sp>
-        <p:nvSpPr>
-          <p:cNvPr id="13" name="TextBox 12"/>
-          <p:cNvSpPr txBox="1"/>
-          <p:nvPr/>
-        </p:nvSpPr>
-        <p:spPr>
-          <a:xfrm>
-            <a:off x="1005840" y="4297680"/>
-            <a:ext cx="10149840" cy="1280160"/>
-          </a:xfrm>
-          <a:prstGeom prst="rect">
-            <a:avLst/>
-          </a:prstGeom>
-          <a:noFill/>
-        </p:spPr>
-        <p:txBody>
-          <a:bodyPr wrap="square" anchor="t" lIns="0" rIns="0" tIns="0" bIns="0">
-            <a:spAutoFit/>
-          </a:bodyPr>
-          <a:lstStyle/>
-          <a:p>
-            <a:pPr algn="l">
-              <a:lnSpc>
-                <a:spcPct val="110000"/>
-              </a:lnSpc>
-            </a:pPr>
-            <a:r>
-              <a:rPr sz="1600" b="0" i="0">
+              <a:t>Why  </a:t>
+            </a:r>
+            <a:r>
+              <a:rPr sz="1200" b="0" i="0">
                 <a:solidFill>
                   <a:srgbClr val="1D2433"/>
                 </a:solidFill>
@@ -9321,7 +11157,7 @@
                 </a:solidFill>
                 <a:latin typeface="Calibri"/>
               </a:rPr>
-              <a:t>Q4 — Umbra</a:t>
+              <a:t>Q4 - Umbra</a:t>
             </a:r>
           </a:p>
         </p:txBody>
@@ -9617,7 +11453,7 @@
         <p:spPr>
           <a:xfrm>
             <a:off x="1508760" y="3749039"/>
-            <a:ext cx="4297680" cy="868680"/>
+            <a:ext cx="3840480" cy="868680"/>
           </a:xfrm>
           <a:prstGeom prst="rect">
             <a:avLst/>
@@ -9777,7 +11613,7 @@
         <p:spPr>
           <a:xfrm>
             <a:off x="7040880" y="3749039"/>
-            <a:ext cx="4297680" cy="868680"/>
+            <a:ext cx="3840480" cy="868680"/>
           </a:xfrm>
           <a:prstGeom prst="rect">
             <a:avLst/>
@@ -9937,7 +11773,7 @@
         <p:spPr>
           <a:xfrm>
             <a:off x="1508760" y="4782312"/>
-            <a:ext cx="4297680" cy="868680"/>
+            <a:ext cx="3840480" cy="868680"/>
           </a:xfrm>
           <a:prstGeom prst="rect">
             <a:avLst/>
@@ -10097,7 +11933,7 @@
         <p:spPr>
           <a:xfrm>
             <a:off x="7040880" y="4782312"/>
-            <a:ext cx="4297680" cy="868680"/>
+            <a:ext cx="3840480" cy="868680"/>
           </a:xfrm>
           <a:prstGeom prst="rect">
             <a:avLst/>
@@ -10164,7 +12000,7 @@
             <a:avLst/>
           </a:prstGeom>
           <a:solidFill>
-            <a:srgbClr val="2A9D8F"/>
+            <a:srgbClr val="0A9396"/>
           </a:solidFill>
           <a:ln>
             <a:noFill/>
@@ -10219,11 +12055,11 @@
             <a:r>
               <a:rPr sz="1300" b="1" i="0">
                 <a:solidFill>
-                  <a:srgbClr val="2A9D8F"/>
+                  <a:srgbClr val="0A9396"/>
                 </a:solidFill>
                 <a:latin typeface="Arial"/>
               </a:rPr>
-              <a:t>ANSWER REVEAL</a:t>
+              <a:t>QUIZ QUESTION</a:t>
             </a:r>
           </a:p>
         </p:txBody>
@@ -10258,7 +12094,7 @@
                 </a:solidFill>
                 <a:latin typeface="Calibri"/>
               </a:rPr>
-              <a:t>Q4 — Answer</a:t>
+              <a:t>Q4 - Umbra</a:t>
             </a:r>
           </a:p>
         </p:txBody>
@@ -10347,166 +12183,6 @@
           <a:prstGeom prst="roundRect">
             <a:avLst>
               <a:gd name="adj" fmla="val 4000"/>
-            </a:avLst>
-          </a:prstGeom>
-          <a:solidFill>
-            <a:srgbClr val="E9F5F0"/>
-          </a:solidFill>
-          <a:ln>
-            <a:noFill/>
-          </a:ln>
-          <a:effectLst/>
-        </p:spPr>
-        <p:style>
-          <a:lnRef idx="1">
-            <a:schemeClr val="accent1"/>
-          </a:lnRef>
-          <a:fillRef idx="3">
-            <a:schemeClr val="accent1"/>
-          </a:fillRef>
-          <a:effectRef idx="2">
-            <a:schemeClr val="accent1"/>
-          </a:effectRef>
-          <a:fontRef idx="minor">
-            <a:schemeClr val="lt1"/>
-          </a:fontRef>
-        </p:style>
-        <p:txBody>
-          <a:bodyPr rtlCol="0" anchor="ctr"/>
-          <a:lstStyle/>
-          <a:p>
-            <a:pPr algn="ctr"/>
-          </a:p>
-        </p:txBody>
-      </p:sp>
-      <p:sp>
-        <p:nvSpPr>
-          <p:cNvPr id="8" name="Oval 7"/>
-          <p:cNvSpPr/>
-          <p:nvPr/>
-        </p:nvSpPr>
-        <p:spPr>
-          <a:xfrm>
-            <a:off x="1005840" y="2240280"/>
-            <a:ext cx="731520" cy="731520"/>
-          </a:xfrm>
-          <a:prstGeom prst="ellipse">
-            <a:avLst/>
-          </a:prstGeom>
-          <a:solidFill>
-            <a:srgbClr val="2A9D8F"/>
-          </a:solidFill>
-          <a:ln>
-            <a:noFill/>
-          </a:ln>
-          <a:effectLst/>
-        </p:spPr>
-        <p:style>
-          <a:lnRef idx="1">
-            <a:schemeClr val="accent1"/>
-          </a:lnRef>
-          <a:fillRef idx="3">
-            <a:schemeClr val="accent1"/>
-          </a:fillRef>
-          <a:effectRef idx="2">
-            <a:schemeClr val="accent1"/>
-          </a:effectRef>
-          <a:fontRef idx="minor">
-            <a:schemeClr val="lt1"/>
-          </a:fontRef>
-        </p:style>
-        <p:txBody>
-          <a:bodyPr rtlCol="0" anchor="ctr"/>
-          <a:lstStyle/>
-          <a:p>
-            <a:pPr algn="ctr"/>
-          </a:p>
-        </p:txBody>
-      </p:sp>
-      <p:sp>
-        <p:nvSpPr>
-          <p:cNvPr id="9" name="TextBox 8"/>
-          <p:cNvSpPr txBox="1"/>
-          <p:nvPr/>
-        </p:nvSpPr>
-        <p:spPr>
-          <a:xfrm>
-            <a:off x="1005840" y="2240280"/>
-            <a:ext cx="731520" cy="731520"/>
-          </a:xfrm>
-          <a:prstGeom prst="rect">
-            <a:avLst/>
-          </a:prstGeom>
-          <a:noFill/>
-        </p:spPr>
-        <p:txBody>
-          <a:bodyPr wrap="square" anchor="ctr" lIns="0" rIns="0" tIns="0" bIns="0">
-            <a:spAutoFit/>
-          </a:bodyPr>
-          <a:lstStyle/>
-          <a:p>
-            <a:pPr algn="ctr"/>
-            <a:r>
-              <a:rPr sz="3000" b="1" i="0">
-                <a:solidFill>
-                  <a:srgbClr val="FFFFFF"/>
-                </a:solidFill>
-                <a:latin typeface="Calibri"/>
-              </a:rPr>
-              <a:t>✓</a:t>
-            </a:r>
-          </a:p>
-        </p:txBody>
-      </p:sp>
-      <p:sp>
-        <p:nvSpPr>
-          <p:cNvPr id="10" name="TextBox 9"/>
-          <p:cNvSpPr txBox="1"/>
-          <p:nvPr/>
-        </p:nvSpPr>
-        <p:spPr>
-          <a:xfrm>
-            <a:off x="1920240" y="1828800"/>
-            <a:ext cx="9326880" cy="1554480"/>
-          </a:xfrm>
-          <a:prstGeom prst="rect">
-            <a:avLst/>
-          </a:prstGeom>
-          <a:noFill/>
-        </p:spPr>
-        <p:txBody>
-          <a:bodyPr wrap="square" anchor="ctr" lIns="0" rIns="0" tIns="0" bIns="0">
-            <a:spAutoFit/>
-          </a:bodyPr>
-          <a:lstStyle/>
-          <a:p>
-            <a:pPr algn="l"/>
-            <a:r>
-              <a:rPr sz="2200" b="1" i="0">
-                <a:solidFill>
-                  <a:srgbClr val="1D2433"/>
-                </a:solidFill>
-                <a:latin typeface="Calibri"/>
-              </a:rPr>
-              <a:t>B. Umbra</a:t>
-            </a:r>
-          </a:p>
-        </p:txBody>
-      </p:sp>
-      <p:sp>
-        <p:nvSpPr>
-          <p:cNvPr id="11" name="Rounded Rectangle 10"/>
-          <p:cNvSpPr/>
-          <p:nvPr/>
-        </p:nvSpPr>
-        <p:spPr>
-          <a:xfrm>
-            <a:off x="640080" y="3657600"/>
-            <a:ext cx="10881360" cy="2011680"/>
-          </a:xfrm>
-          <a:prstGeom prst="roundRect">
-            <a:avLst>
-              <a:gd name="adj" fmla="val 3000"/>
             </a:avLst>
           </a:prstGeom>
           <a:solidFill>
@@ -10547,68 +12223,840 @@
       </p:sp>
       <p:sp>
         <p:nvSpPr>
+          <p:cNvPr id="8" name="TextBox 7"/>
+          <p:cNvSpPr txBox="1"/>
+          <p:nvPr/>
+        </p:nvSpPr>
+        <p:spPr>
+          <a:xfrm>
+            <a:off x="1005840" y="1828800"/>
+            <a:ext cx="10149840" cy="1554480"/>
+          </a:xfrm>
+          <a:prstGeom prst="rect">
+            <a:avLst/>
+          </a:prstGeom>
+          <a:noFill/>
+        </p:spPr>
+        <p:txBody>
+          <a:bodyPr wrap="square" anchor="ctr" lIns="0" rIns="0" tIns="0" bIns="0">
+            <a:spAutoFit/>
+          </a:bodyPr>
+          <a:lstStyle/>
+          <a:p>
+            <a:pPr algn="l"/>
+            <a:r>
+              <a:rPr sz="1900" b="1" i="0">
+                <a:solidFill>
+                  <a:srgbClr val="1D2433"/>
+                </a:solidFill>
+                <a:latin typeface="Calibri"/>
+              </a:rPr>
+              <a:t>The fully dark central part of a shadow is the:</a:t>
+            </a:r>
+          </a:p>
+        </p:txBody>
+      </p:sp>
+      <p:sp>
+        <p:nvSpPr>
+          <p:cNvPr id="9" name="Rounded Rectangle 8"/>
+          <p:cNvSpPr/>
+          <p:nvPr/>
+        </p:nvSpPr>
+        <p:spPr>
+          <a:xfrm>
+            <a:off x="640080" y="3749039"/>
+            <a:ext cx="5349240" cy="868680"/>
+          </a:xfrm>
+          <a:prstGeom prst="roundRect">
+            <a:avLst>
+              <a:gd name="adj" fmla="val 12000"/>
+            </a:avLst>
+          </a:prstGeom>
+          <a:solidFill>
+            <a:srgbClr val="EAF1F4"/>
+          </a:solidFill>
+          <a:ln>
+            <a:noFill/>
+          </a:ln>
+          <a:effectLst/>
+        </p:spPr>
+        <p:style>
+          <a:lnRef idx="1">
+            <a:schemeClr val="accent1"/>
+          </a:lnRef>
+          <a:fillRef idx="3">
+            <a:schemeClr val="accent1"/>
+          </a:fillRef>
+          <a:effectRef idx="2">
+            <a:schemeClr val="accent1"/>
+          </a:effectRef>
+          <a:fontRef idx="minor">
+            <a:schemeClr val="lt1"/>
+          </a:fontRef>
+        </p:style>
+        <p:txBody>
+          <a:bodyPr rtlCol="0" anchor="ctr"/>
+          <a:lstStyle/>
+          <a:p>
+            <a:pPr algn="ctr"/>
+          </a:p>
+        </p:txBody>
+      </p:sp>
+      <p:sp>
+        <p:nvSpPr>
+          <p:cNvPr id="10" name="Oval 9"/>
+          <p:cNvSpPr/>
+          <p:nvPr/>
+        </p:nvSpPr>
+        <p:spPr>
+          <a:xfrm>
+            <a:off x="914400" y="3977639"/>
+            <a:ext cx="411480" cy="411480"/>
+          </a:xfrm>
+          <a:prstGeom prst="ellipse">
+            <a:avLst/>
+          </a:prstGeom>
+          <a:solidFill>
+            <a:srgbClr val="0A9396"/>
+          </a:solidFill>
+          <a:ln>
+            <a:noFill/>
+          </a:ln>
+          <a:effectLst/>
+        </p:spPr>
+        <p:style>
+          <a:lnRef idx="1">
+            <a:schemeClr val="accent1"/>
+          </a:lnRef>
+          <a:fillRef idx="3">
+            <a:schemeClr val="accent1"/>
+          </a:fillRef>
+          <a:effectRef idx="2">
+            <a:schemeClr val="accent1"/>
+          </a:effectRef>
+          <a:fontRef idx="minor">
+            <a:schemeClr val="lt1"/>
+          </a:fontRef>
+        </p:style>
+        <p:txBody>
+          <a:bodyPr rtlCol="0" anchor="ctr"/>
+          <a:lstStyle/>
+          <a:p>
+            <a:pPr algn="ctr"/>
+          </a:p>
+        </p:txBody>
+      </p:sp>
+      <p:sp>
+        <p:nvSpPr>
+          <p:cNvPr id="11" name="TextBox 10"/>
+          <p:cNvSpPr txBox="1"/>
+          <p:nvPr/>
+        </p:nvSpPr>
+        <p:spPr>
+          <a:xfrm>
+            <a:off x="914400" y="3977639"/>
+            <a:ext cx="411480" cy="411480"/>
+          </a:xfrm>
+          <a:prstGeom prst="rect">
+            <a:avLst/>
+          </a:prstGeom>
+          <a:noFill/>
+        </p:spPr>
+        <p:txBody>
+          <a:bodyPr wrap="square" anchor="ctr" lIns="0" rIns="0" tIns="0" bIns="0">
+            <a:spAutoFit/>
+          </a:bodyPr>
+          <a:lstStyle/>
+          <a:p>
+            <a:pPr algn="ctr"/>
+            <a:r>
+              <a:rPr sz="1400" b="1" i="0">
+                <a:solidFill>
+                  <a:srgbClr val="FFFFFF"/>
+                </a:solidFill>
+                <a:latin typeface="Calibri"/>
+              </a:rPr>
+              <a:t>A</a:t>
+            </a:r>
+          </a:p>
+        </p:txBody>
+      </p:sp>
+      <p:sp>
+        <p:nvSpPr>
           <p:cNvPr id="12" name="TextBox 11"/>
           <p:cNvSpPr txBox="1"/>
           <p:nvPr/>
         </p:nvSpPr>
         <p:spPr>
           <a:xfrm>
-            <a:off x="1005840" y="3886200"/>
-            <a:ext cx="4572000" cy="365760"/>
-          </a:xfrm>
-          <a:prstGeom prst="rect">
-            <a:avLst/>
-          </a:prstGeom>
-          <a:noFill/>
-        </p:spPr>
-        <p:txBody>
-          <a:bodyPr wrap="square" anchor="t" lIns="0" rIns="0" tIns="0" bIns="0">
+            <a:off x="1508760" y="3749039"/>
+            <a:ext cx="3840480" cy="868680"/>
+          </a:xfrm>
+          <a:prstGeom prst="rect">
+            <a:avLst/>
+          </a:prstGeom>
+          <a:noFill/>
+        </p:spPr>
+        <p:txBody>
+          <a:bodyPr wrap="square" anchor="ctr" lIns="0" rIns="0" tIns="0" bIns="0">
             <a:spAutoFit/>
           </a:bodyPr>
           <a:lstStyle/>
           <a:p>
             <a:pPr algn="l"/>
             <a:r>
+              <a:rPr sz="1450" b="0" i="0">
+                <a:solidFill>
+                  <a:srgbClr val="1D2433"/>
+                </a:solidFill>
+                <a:latin typeface="Calibri"/>
+              </a:rPr>
+              <a:t>Penumbra</a:t>
+            </a:r>
+          </a:p>
+        </p:txBody>
+      </p:sp>
+      <p:sp>
+        <p:nvSpPr>
+          <p:cNvPr id="13" name="Rounded Rectangle 12"/>
+          <p:cNvSpPr/>
+          <p:nvPr/>
+        </p:nvSpPr>
+        <p:spPr>
+          <a:xfrm>
+            <a:off x="6172200" y="3749039"/>
+            <a:ext cx="5349240" cy="868680"/>
+          </a:xfrm>
+          <a:prstGeom prst="roundRect">
+            <a:avLst>
+              <a:gd name="adj" fmla="val 12000"/>
+            </a:avLst>
+          </a:prstGeom>
+          <a:solidFill>
+            <a:srgbClr val="E9F5F0"/>
+          </a:solidFill>
+          <a:ln w="31750">
+            <a:solidFill>
+              <a:srgbClr val="2A9D8F"/>
+            </a:solidFill>
+          </a:ln>
+          <a:effectLst/>
+        </p:spPr>
+        <p:style>
+          <a:lnRef idx="1">
+            <a:schemeClr val="accent1"/>
+          </a:lnRef>
+          <a:fillRef idx="3">
+            <a:schemeClr val="accent1"/>
+          </a:fillRef>
+          <a:effectRef idx="2">
+            <a:schemeClr val="accent1"/>
+          </a:effectRef>
+          <a:fontRef idx="minor">
+            <a:schemeClr val="lt1"/>
+          </a:fontRef>
+        </p:style>
+        <p:txBody>
+          <a:bodyPr rtlCol="0" anchor="ctr"/>
+          <a:lstStyle/>
+          <a:p>
+            <a:pPr algn="ctr"/>
+          </a:p>
+        </p:txBody>
+      </p:sp>
+      <p:sp>
+        <p:nvSpPr>
+          <p:cNvPr id="14" name="Oval 13"/>
+          <p:cNvSpPr/>
+          <p:nvPr/>
+        </p:nvSpPr>
+        <p:spPr>
+          <a:xfrm>
+            <a:off x="6446520" y="3977639"/>
+            <a:ext cx="411480" cy="411480"/>
+          </a:xfrm>
+          <a:prstGeom prst="ellipse">
+            <a:avLst/>
+          </a:prstGeom>
+          <a:solidFill>
+            <a:srgbClr val="2A9D8F"/>
+          </a:solidFill>
+          <a:ln>
+            <a:noFill/>
+          </a:ln>
+          <a:effectLst/>
+        </p:spPr>
+        <p:style>
+          <a:lnRef idx="1">
+            <a:schemeClr val="accent1"/>
+          </a:lnRef>
+          <a:fillRef idx="3">
+            <a:schemeClr val="accent1"/>
+          </a:fillRef>
+          <a:effectRef idx="2">
+            <a:schemeClr val="accent1"/>
+          </a:effectRef>
+          <a:fontRef idx="minor">
+            <a:schemeClr val="lt1"/>
+          </a:fontRef>
+        </p:style>
+        <p:txBody>
+          <a:bodyPr rtlCol="0" anchor="ctr"/>
+          <a:lstStyle/>
+          <a:p>
+            <a:pPr algn="ctr"/>
+          </a:p>
+        </p:txBody>
+      </p:sp>
+      <p:sp>
+        <p:nvSpPr>
+          <p:cNvPr id="15" name="TextBox 14"/>
+          <p:cNvSpPr txBox="1"/>
+          <p:nvPr/>
+        </p:nvSpPr>
+        <p:spPr>
+          <a:xfrm>
+            <a:off x="6446520" y="3977639"/>
+            <a:ext cx="411480" cy="411480"/>
+          </a:xfrm>
+          <a:prstGeom prst="rect">
+            <a:avLst/>
+          </a:prstGeom>
+          <a:noFill/>
+        </p:spPr>
+        <p:txBody>
+          <a:bodyPr wrap="square" anchor="ctr" lIns="0" rIns="0" tIns="0" bIns="0">
+            <a:spAutoFit/>
+          </a:bodyPr>
+          <a:lstStyle/>
+          <a:p>
+            <a:pPr algn="ctr"/>
+            <a:r>
               <a:rPr sz="1400" b="1" i="0">
                 <a:solidFill>
+                  <a:srgbClr val="FFFFFF"/>
+                </a:solidFill>
+                <a:latin typeface="Calibri"/>
+              </a:rPr>
+              <a:t>B</a:t>
+            </a:r>
+          </a:p>
+        </p:txBody>
+      </p:sp>
+      <p:sp>
+        <p:nvSpPr>
+          <p:cNvPr id="16" name="TextBox 15"/>
+          <p:cNvSpPr txBox="1"/>
+          <p:nvPr/>
+        </p:nvSpPr>
+        <p:spPr>
+          <a:xfrm>
+            <a:off x="7040880" y="3749039"/>
+            <a:ext cx="3840480" cy="868680"/>
+          </a:xfrm>
+          <a:prstGeom prst="rect">
+            <a:avLst/>
+          </a:prstGeom>
+          <a:noFill/>
+        </p:spPr>
+        <p:txBody>
+          <a:bodyPr wrap="square" anchor="ctr" lIns="0" rIns="0" tIns="0" bIns="0">
+            <a:spAutoFit/>
+          </a:bodyPr>
+          <a:lstStyle/>
+          <a:p>
+            <a:pPr algn="l"/>
+            <a:r>
+              <a:rPr sz="1450" b="1" i="0">
+                <a:solidFill>
+                  <a:srgbClr val="1D2433"/>
+                </a:solidFill>
+                <a:latin typeface="Calibri"/>
+              </a:rPr>
+              <a:t>Umbra</a:t>
+            </a:r>
+          </a:p>
+        </p:txBody>
+      </p:sp>
+      <p:sp>
+        <p:nvSpPr>
+          <p:cNvPr id="17" name="Oval 16"/>
+          <p:cNvSpPr/>
+          <p:nvPr/>
+        </p:nvSpPr>
+        <p:spPr>
+          <a:xfrm>
+            <a:off x="10972800" y="3995927"/>
+            <a:ext cx="365760" cy="365760"/>
+          </a:xfrm>
+          <a:prstGeom prst="ellipse">
+            <a:avLst/>
+          </a:prstGeom>
+          <a:solidFill>
+            <a:srgbClr val="2A9D8F"/>
+          </a:solidFill>
+          <a:ln>
+            <a:noFill/>
+          </a:ln>
+          <a:effectLst/>
+        </p:spPr>
+        <p:style>
+          <a:lnRef idx="1">
+            <a:schemeClr val="accent1"/>
+          </a:lnRef>
+          <a:fillRef idx="3">
+            <a:schemeClr val="accent1"/>
+          </a:fillRef>
+          <a:effectRef idx="2">
+            <a:schemeClr val="accent1"/>
+          </a:effectRef>
+          <a:fontRef idx="minor">
+            <a:schemeClr val="lt1"/>
+          </a:fontRef>
+        </p:style>
+        <p:txBody>
+          <a:bodyPr rtlCol="0" anchor="ctr"/>
+          <a:lstStyle/>
+          <a:p>
+            <a:pPr algn="ctr"/>
+          </a:p>
+        </p:txBody>
+      </p:sp>
+      <p:sp>
+        <p:nvSpPr>
+          <p:cNvPr id="18" name="TextBox 17"/>
+          <p:cNvSpPr txBox="1"/>
+          <p:nvPr/>
+        </p:nvSpPr>
+        <p:spPr>
+          <a:xfrm>
+            <a:off x="10972800" y="3950207"/>
+            <a:ext cx="365760" cy="365760"/>
+          </a:xfrm>
+          <a:prstGeom prst="rect">
+            <a:avLst/>
+          </a:prstGeom>
+          <a:noFill/>
+        </p:spPr>
+        <p:txBody>
+          <a:bodyPr wrap="square" anchor="ctr" lIns="0" rIns="0" tIns="0" bIns="0">
+            <a:spAutoFit/>
+          </a:bodyPr>
+          <a:lstStyle/>
+          <a:p>
+            <a:pPr algn="ctr"/>
+            <a:r>
+              <a:rPr sz="1600" b="1" i="0">
+                <a:solidFill>
+                  <a:srgbClr val="FFFFFF"/>
+                </a:solidFill>
+                <a:latin typeface="Calibri"/>
+              </a:rPr>
+              <a:t>✓</a:t>
+            </a:r>
+          </a:p>
+        </p:txBody>
+      </p:sp>
+      <p:sp>
+        <p:nvSpPr>
+          <p:cNvPr id="19" name="Rounded Rectangle 18"/>
+          <p:cNvSpPr/>
+          <p:nvPr/>
+        </p:nvSpPr>
+        <p:spPr>
+          <a:xfrm>
+            <a:off x="640080" y="4782312"/>
+            <a:ext cx="5349240" cy="868680"/>
+          </a:xfrm>
+          <a:prstGeom prst="roundRect">
+            <a:avLst>
+              <a:gd name="adj" fmla="val 12000"/>
+            </a:avLst>
+          </a:prstGeom>
+          <a:solidFill>
+            <a:srgbClr val="EAF1F4"/>
+          </a:solidFill>
+          <a:ln>
+            <a:noFill/>
+          </a:ln>
+          <a:effectLst/>
+        </p:spPr>
+        <p:style>
+          <a:lnRef idx="1">
+            <a:schemeClr val="accent1"/>
+          </a:lnRef>
+          <a:fillRef idx="3">
+            <a:schemeClr val="accent1"/>
+          </a:fillRef>
+          <a:effectRef idx="2">
+            <a:schemeClr val="accent1"/>
+          </a:effectRef>
+          <a:fontRef idx="minor">
+            <a:schemeClr val="lt1"/>
+          </a:fontRef>
+        </p:style>
+        <p:txBody>
+          <a:bodyPr rtlCol="0" anchor="ctr"/>
+          <a:lstStyle/>
+          <a:p>
+            <a:pPr algn="ctr"/>
+          </a:p>
+        </p:txBody>
+      </p:sp>
+      <p:sp>
+        <p:nvSpPr>
+          <p:cNvPr id="20" name="Oval 19"/>
+          <p:cNvSpPr/>
+          <p:nvPr/>
+        </p:nvSpPr>
+        <p:spPr>
+          <a:xfrm>
+            <a:off x="914400" y="5010912"/>
+            <a:ext cx="411480" cy="411480"/>
+          </a:xfrm>
+          <a:prstGeom prst="ellipse">
+            <a:avLst/>
+          </a:prstGeom>
+          <a:solidFill>
+            <a:srgbClr val="0A9396"/>
+          </a:solidFill>
+          <a:ln>
+            <a:noFill/>
+          </a:ln>
+          <a:effectLst/>
+        </p:spPr>
+        <p:style>
+          <a:lnRef idx="1">
+            <a:schemeClr val="accent1"/>
+          </a:lnRef>
+          <a:fillRef idx="3">
+            <a:schemeClr val="accent1"/>
+          </a:fillRef>
+          <a:effectRef idx="2">
+            <a:schemeClr val="accent1"/>
+          </a:effectRef>
+          <a:fontRef idx="minor">
+            <a:schemeClr val="lt1"/>
+          </a:fontRef>
+        </p:style>
+        <p:txBody>
+          <a:bodyPr rtlCol="0" anchor="ctr"/>
+          <a:lstStyle/>
+          <a:p>
+            <a:pPr algn="ctr"/>
+          </a:p>
+        </p:txBody>
+      </p:sp>
+      <p:sp>
+        <p:nvSpPr>
+          <p:cNvPr id="21" name="TextBox 20"/>
+          <p:cNvSpPr txBox="1"/>
+          <p:nvPr/>
+        </p:nvSpPr>
+        <p:spPr>
+          <a:xfrm>
+            <a:off x="914400" y="5010912"/>
+            <a:ext cx="411480" cy="411480"/>
+          </a:xfrm>
+          <a:prstGeom prst="rect">
+            <a:avLst/>
+          </a:prstGeom>
+          <a:noFill/>
+        </p:spPr>
+        <p:txBody>
+          <a:bodyPr wrap="square" anchor="ctr" lIns="0" rIns="0" tIns="0" bIns="0">
+            <a:spAutoFit/>
+          </a:bodyPr>
+          <a:lstStyle/>
+          <a:p>
+            <a:pPr algn="ctr"/>
+            <a:r>
+              <a:rPr sz="1400" b="1" i="0">
+                <a:solidFill>
+                  <a:srgbClr val="FFFFFF"/>
+                </a:solidFill>
+                <a:latin typeface="Calibri"/>
+              </a:rPr>
+              <a:t>C</a:t>
+            </a:r>
+          </a:p>
+        </p:txBody>
+      </p:sp>
+      <p:sp>
+        <p:nvSpPr>
+          <p:cNvPr id="22" name="TextBox 21"/>
+          <p:cNvSpPr txBox="1"/>
+          <p:nvPr/>
+        </p:nvSpPr>
+        <p:spPr>
+          <a:xfrm>
+            <a:off x="1508760" y="4782312"/>
+            <a:ext cx="3840480" cy="868680"/>
+          </a:xfrm>
+          <a:prstGeom prst="rect">
+            <a:avLst/>
+          </a:prstGeom>
+          <a:noFill/>
+        </p:spPr>
+        <p:txBody>
+          <a:bodyPr wrap="square" anchor="ctr" lIns="0" rIns="0" tIns="0" bIns="0">
+            <a:spAutoFit/>
+          </a:bodyPr>
+          <a:lstStyle/>
+          <a:p>
+            <a:pPr algn="l"/>
+            <a:r>
+              <a:rPr sz="1450" b="0" i="0">
+                <a:solidFill>
+                  <a:srgbClr val="1D2433"/>
+                </a:solidFill>
+                <a:latin typeface="Calibri"/>
+              </a:rPr>
+              <a:t>Corona</a:t>
+            </a:r>
+          </a:p>
+        </p:txBody>
+      </p:sp>
+      <p:sp>
+        <p:nvSpPr>
+          <p:cNvPr id="23" name="Rounded Rectangle 22"/>
+          <p:cNvSpPr/>
+          <p:nvPr/>
+        </p:nvSpPr>
+        <p:spPr>
+          <a:xfrm>
+            <a:off x="6172200" y="4782312"/>
+            <a:ext cx="5349240" cy="868680"/>
+          </a:xfrm>
+          <a:prstGeom prst="roundRect">
+            <a:avLst>
+              <a:gd name="adj" fmla="val 12000"/>
+            </a:avLst>
+          </a:prstGeom>
+          <a:solidFill>
+            <a:srgbClr val="EAF1F4"/>
+          </a:solidFill>
+          <a:ln>
+            <a:noFill/>
+          </a:ln>
+          <a:effectLst/>
+        </p:spPr>
+        <p:style>
+          <a:lnRef idx="1">
+            <a:schemeClr val="accent1"/>
+          </a:lnRef>
+          <a:fillRef idx="3">
+            <a:schemeClr val="accent1"/>
+          </a:fillRef>
+          <a:effectRef idx="2">
+            <a:schemeClr val="accent1"/>
+          </a:effectRef>
+          <a:fontRef idx="minor">
+            <a:schemeClr val="lt1"/>
+          </a:fontRef>
+        </p:style>
+        <p:txBody>
+          <a:bodyPr rtlCol="0" anchor="ctr"/>
+          <a:lstStyle/>
+          <a:p>
+            <a:pPr algn="ctr"/>
+          </a:p>
+        </p:txBody>
+      </p:sp>
+      <p:sp>
+        <p:nvSpPr>
+          <p:cNvPr id="24" name="Oval 23"/>
+          <p:cNvSpPr/>
+          <p:nvPr/>
+        </p:nvSpPr>
+        <p:spPr>
+          <a:xfrm>
+            <a:off x="6446520" y="5010912"/>
+            <a:ext cx="411480" cy="411480"/>
+          </a:xfrm>
+          <a:prstGeom prst="ellipse">
+            <a:avLst/>
+          </a:prstGeom>
+          <a:solidFill>
+            <a:srgbClr val="0A9396"/>
+          </a:solidFill>
+          <a:ln>
+            <a:noFill/>
+          </a:ln>
+          <a:effectLst/>
+        </p:spPr>
+        <p:style>
+          <a:lnRef idx="1">
+            <a:schemeClr val="accent1"/>
+          </a:lnRef>
+          <a:fillRef idx="3">
+            <a:schemeClr val="accent1"/>
+          </a:fillRef>
+          <a:effectRef idx="2">
+            <a:schemeClr val="accent1"/>
+          </a:effectRef>
+          <a:fontRef idx="minor">
+            <a:schemeClr val="lt1"/>
+          </a:fontRef>
+        </p:style>
+        <p:txBody>
+          <a:bodyPr rtlCol="0" anchor="ctr"/>
+          <a:lstStyle/>
+          <a:p>
+            <a:pPr algn="ctr"/>
+          </a:p>
+        </p:txBody>
+      </p:sp>
+      <p:sp>
+        <p:nvSpPr>
+          <p:cNvPr id="25" name="TextBox 24"/>
+          <p:cNvSpPr txBox="1"/>
+          <p:nvPr/>
+        </p:nvSpPr>
+        <p:spPr>
+          <a:xfrm>
+            <a:off x="6446520" y="5010912"/>
+            <a:ext cx="411480" cy="411480"/>
+          </a:xfrm>
+          <a:prstGeom prst="rect">
+            <a:avLst/>
+          </a:prstGeom>
+          <a:noFill/>
+        </p:spPr>
+        <p:txBody>
+          <a:bodyPr wrap="square" anchor="ctr" lIns="0" rIns="0" tIns="0" bIns="0">
+            <a:spAutoFit/>
+          </a:bodyPr>
+          <a:lstStyle/>
+          <a:p>
+            <a:pPr algn="ctr"/>
+            <a:r>
+              <a:rPr sz="1400" b="1" i="0">
+                <a:solidFill>
+                  <a:srgbClr val="FFFFFF"/>
+                </a:solidFill>
+                <a:latin typeface="Calibri"/>
+              </a:rPr>
+              <a:t>D</a:t>
+            </a:r>
+          </a:p>
+        </p:txBody>
+      </p:sp>
+      <p:sp>
+        <p:nvSpPr>
+          <p:cNvPr id="26" name="TextBox 25"/>
+          <p:cNvSpPr txBox="1"/>
+          <p:nvPr/>
+        </p:nvSpPr>
+        <p:spPr>
+          <a:xfrm>
+            <a:off x="7040880" y="4782312"/>
+            <a:ext cx="3840480" cy="868680"/>
+          </a:xfrm>
+          <a:prstGeom prst="rect">
+            <a:avLst/>
+          </a:prstGeom>
+          <a:noFill/>
+        </p:spPr>
+        <p:txBody>
+          <a:bodyPr wrap="square" anchor="ctr" lIns="0" rIns="0" tIns="0" bIns="0">
+            <a:spAutoFit/>
+          </a:bodyPr>
+          <a:lstStyle/>
+          <a:p>
+            <a:pPr algn="l"/>
+            <a:r>
+              <a:rPr sz="1450" b="0" i="0">
+                <a:solidFill>
+                  <a:srgbClr val="1D2433"/>
+                </a:solidFill>
+                <a:latin typeface="Calibri"/>
+              </a:rPr>
+              <a:t>Image</a:t>
+            </a:r>
+          </a:p>
+        </p:txBody>
+      </p:sp>
+      <p:sp>
+        <p:nvSpPr>
+          <p:cNvPr id="27" name="Rounded Rectangle 26"/>
+          <p:cNvSpPr/>
+          <p:nvPr/>
+        </p:nvSpPr>
+        <p:spPr>
+          <a:xfrm>
+            <a:off x="640080" y="5779008"/>
+            <a:ext cx="10881360" cy="566928"/>
+          </a:xfrm>
+          <a:prstGeom prst="roundRect">
+            <a:avLst>
+              <a:gd name="adj" fmla="val 10000"/>
+            </a:avLst>
+          </a:prstGeom>
+          <a:solidFill>
+            <a:srgbClr val="EEF2F7"/>
+          </a:solidFill>
+          <a:ln>
+            <a:noFill/>
+          </a:ln>
+          <a:effectLst/>
+        </p:spPr>
+        <p:style>
+          <a:lnRef idx="1">
+            <a:schemeClr val="accent1"/>
+          </a:lnRef>
+          <a:fillRef idx="3">
+            <a:schemeClr val="accent1"/>
+          </a:fillRef>
+          <a:effectRef idx="2">
+            <a:schemeClr val="accent1"/>
+          </a:effectRef>
+          <a:fontRef idx="minor">
+            <a:schemeClr val="lt1"/>
+          </a:fontRef>
+        </p:style>
+        <p:txBody>
+          <a:bodyPr rtlCol="0" anchor="ctr"/>
+          <a:lstStyle/>
+          <a:p>
+            <a:pPr algn="ctr"/>
+          </a:p>
+        </p:txBody>
+      </p:sp>
+      <p:sp>
+        <p:nvSpPr>
+          <p:cNvPr id="28" name="TextBox 27"/>
+          <p:cNvSpPr txBox="1"/>
+          <p:nvPr/>
+        </p:nvSpPr>
+        <p:spPr>
+          <a:xfrm>
+            <a:off x="914400" y="5779008"/>
+            <a:ext cx="10332720" cy="566928"/>
+          </a:xfrm>
+          <a:prstGeom prst="rect">
+            <a:avLst/>
+          </a:prstGeom>
+          <a:noFill/>
+        </p:spPr>
+        <p:txBody>
+          <a:bodyPr wrap="square" anchor="ctr" lIns="0" rIns="0" tIns="0" bIns="0">
+            <a:spAutoFit/>
+          </a:bodyPr>
+          <a:lstStyle/>
+          <a:p>
+            <a:pPr algn="l"/>
+            <a:r>
+              <a:rPr sz="1250" b="1" i="0">
+                <a:solidFill>
                   <a:srgbClr val="2A9D8F"/>
                 </a:solidFill>
                 <a:latin typeface="Arial"/>
               </a:rPr>
-              <a:t>WHY</a:t>
-            </a:r>
-          </a:p>
-        </p:txBody>
-      </p:sp>
-      <p:sp>
-        <p:nvSpPr>
-          <p:cNvPr id="13" name="TextBox 12"/>
-          <p:cNvSpPr txBox="1"/>
-          <p:nvPr/>
-        </p:nvSpPr>
-        <p:spPr>
-          <a:xfrm>
-            <a:off x="1005840" y="4297680"/>
-            <a:ext cx="10149840" cy="1280160"/>
-          </a:xfrm>
-          <a:prstGeom prst="rect">
-            <a:avLst/>
-          </a:prstGeom>
-          <a:noFill/>
-        </p:spPr>
-        <p:txBody>
-          <a:bodyPr wrap="square" anchor="t" lIns="0" rIns="0" tIns="0" bIns="0">
-            <a:spAutoFit/>
-          </a:bodyPr>
-          <a:lstStyle/>
-          <a:p>
-            <a:pPr algn="l">
-              <a:lnSpc>
-                <a:spcPct val="110000"/>
-              </a:lnSpc>
-            </a:pPr>
-            <a:r>
-              <a:rPr sz="1600" b="0" i="0">
+              <a:t>Why  </a:t>
+            </a:r>
+            <a:r>
+              <a:rPr sz="1200" b="0" i="0">
                 <a:solidFill>
                   <a:srgbClr val="1D2433"/>
                 </a:solidFill>
@@ -13809,9 +16257,33 @@
           </a:p>
         </p:txBody>
       </p:sp>
-      <p:sp>
-        <p:nvSpPr>
-          <p:cNvPr id="9" name="TextBox 8"/>
+      <p:pic>
+        <p:nvPicPr>
+          <p:cNvPr id="9" name="Picture 8" descr="icon_sun.png"/>
+          <p:cNvPicPr>
+            <a:picLocks noChangeAspect="1"/>
+          </p:cNvPicPr>
+          <p:nvPr/>
+        </p:nvPicPr>
+        <p:blipFill>
+          <a:blip r:embed="rId2"/>
+          <a:stretch>
+            <a:fillRect/>
+          </a:stretch>
+        </p:blipFill>
+        <p:spPr>
+          <a:xfrm>
+            <a:off x="1051560" y="2304288"/>
+            <a:ext cx="320040" cy="320040"/>
+          </a:xfrm>
+          <a:prstGeom prst="rect">
+            <a:avLst/>
+          </a:prstGeom>
+        </p:spPr>
+      </p:pic>
+      <p:sp>
+        <p:nvSpPr>
+          <p:cNvPr id="10" name="TextBox 9"/>
           <p:cNvSpPr txBox="1"/>
           <p:nvPr/>
         </p:nvSpPr>
@@ -13846,7 +16318,7 @@
       </p:sp>
       <p:sp>
         <p:nvSpPr>
-          <p:cNvPr id="10" name="TextBox 9"/>
+          <p:cNvPr id="11" name="TextBox 10"/>
           <p:cNvSpPr txBox="1"/>
           <p:nvPr/>
         </p:nvSpPr>
@@ -13881,7 +16353,7 @@
       </p:sp>
       <p:sp>
         <p:nvSpPr>
-          <p:cNvPr id="11" name="Rounded Rectangle 10"/>
+          <p:cNvPr id="12" name="Rounded Rectangle 11"/>
           <p:cNvSpPr/>
           <p:nvPr/>
         </p:nvSpPr>
@@ -13933,7 +16405,7 @@
       </p:sp>
       <p:sp>
         <p:nvSpPr>
-          <p:cNvPr id="12" name="Rounded Rectangle 11"/>
+          <p:cNvPr id="13" name="Rounded Rectangle 12"/>
           <p:cNvSpPr/>
           <p:nvPr/>
         </p:nvSpPr>
@@ -13977,9 +16449,33 @@
           </a:p>
         </p:txBody>
       </p:sp>
-      <p:sp>
-        <p:nvSpPr>
-          <p:cNvPr id="13" name="TextBox 12"/>
+      <p:pic>
+        <p:nvPicPr>
+          <p:cNvPr id="14" name="Picture 13" descr="icon_sun.png"/>
+          <p:cNvPicPr>
+            <a:picLocks noChangeAspect="1"/>
+          </p:cNvPicPr>
+          <p:nvPr/>
+        </p:nvPicPr>
+        <p:blipFill>
+          <a:blip r:embed="rId2"/>
+          <a:stretch>
+            <a:fillRect/>
+          </a:stretch>
+        </p:blipFill>
+        <p:spPr>
+          <a:xfrm>
+            <a:off x="6629400" y="2304288"/>
+            <a:ext cx="320040" cy="320040"/>
+          </a:xfrm>
+          <a:prstGeom prst="rect">
+            <a:avLst/>
+          </a:prstGeom>
+        </p:spPr>
+      </p:pic>
+      <p:sp>
+        <p:nvSpPr>
+          <p:cNvPr id="15" name="TextBox 14"/>
           <p:cNvSpPr txBox="1"/>
           <p:nvPr/>
         </p:nvSpPr>
@@ -14014,7 +16510,7 @@
       </p:sp>
       <p:sp>
         <p:nvSpPr>
-          <p:cNvPr id="14" name="TextBox 13"/>
+          <p:cNvPr id="16" name="TextBox 15"/>
           <p:cNvSpPr txBox="1"/>
           <p:nvPr/>
         </p:nvSpPr>
@@ -14049,7 +16545,7 @@
       </p:sp>
       <p:sp>
         <p:nvSpPr>
-          <p:cNvPr id="15" name="Rounded Rectangle 14"/>
+          <p:cNvPr id="17" name="Rounded Rectangle 16"/>
           <p:cNvSpPr/>
           <p:nvPr/>
         </p:nvSpPr>
@@ -14101,7 +16597,7 @@
       </p:sp>
       <p:sp>
         <p:nvSpPr>
-          <p:cNvPr id="16" name="Rounded Rectangle 15"/>
+          <p:cNvPr id="18" name="Rounded Rectangle 17"/>
           <p:cNvSpPr/>
           <p:nvPr/>
         </p:nvSpPr>
@@ -14145,9 +16641,33 @@
           </a:p>
         </p:txBody>
       </p:sp>
-      <p:sp>
-        <p:nvSpPr>
-          <p:cNvPr id="17" name="TextBox 16"/>
+      <p:pic>
+        <p:nvPicPr>
+          <p:cNvPr id="19" name="Picture 18" descr="icon_sun.png"/>
+          <p:cNvPicPr>
+            <a:picLocks noChangeAspect="1"/>
+          </p:cNvPicPr>
+          <p:nvPr/>
+        </p:nvPicPr>
+        <p:blipFill>
+          <a:blip r:embed="rId2"/>
+          <a:stretch>
+            <a:fillRect/>
+          </a:stretch>
+        </p:blipFill>
+        <p:spPr>
+          <a:xfrm>
+            <a:off x="1051560" y="4133087"/>
+            <a:ext cx="320040" cy="320040"/>
+          </a:xfrm>
+          <a:prstGeom prst="rect">
+            <a:avLst/>
+          </a:prstGeom>
+        </p:spPr>
+      </p:pic>
+      <p:sp>
+        <p:nvSpPr>
+          <p:cNvPr id="20" name="TextBox 19"/>
           <p:cNvSpPr txBox="1"/>
           <p:nvPr/>
         </p:nvSpPr>
@@ -14182,7 +16702,7 @@
       </p:sp>
       <p:sp>
         <p:nvSpPr>
-          <p:cNvPr id="18" name="TextBox 17"/>
+          <p:cNvPr id="21" name="TextBox 20"/>
           <p:cNvSpPr txBox="1"/>
           <p:nvPr/>
         </p:nvSpPr>
@@ -14217,7 +16737,7 @@
       </p:sp>
       <p:sp>
         <p:nvSpPr>
-          <p:cNvPr id="19" name="Rounded Rectangle 18"/>
+          <p:cNvPr id="22" name="Rounded Rectangle 21"/>
           <p:cNvSpPr/>
           <p:nvPr/>
         </p:nvSpPr>
@@ -14269,7 +16789,7 @@
       </p:sp>
       <p:sp>
         <p:nvSpPr>
-          <p:cNvPr id="20" name="Rounded Rectangle 19"/>
+          <p:cNvPr id="23" name="Rounded Rectangle 22"/>
           <p:cNvSpPr/>
           <p:nvPr/>
         </p:nvSpPr>
@@ -14313,9 +16833,33 @@
           </a:p>
         </p:txBody>
       </p:sp>
-      <p:sp>
-        <p:nvSpPr>
-          <p:cNvPr id="21" name="TextBox 20"/>
+      <p:pic>
+        <p:nvPicPr>
+          <p:cNvPr id="24" name="Picture 23" descr="icon_sun.png"/>
+          <p:cNvPicPr>
+            <a:picLocks noChangeAspect="1"/>
+          </p:cNvPicPr>
+          <p:nvPr/>
+        </p:nvPicPr>
+        <p:blipFill>
+          <a:blip r:embed="rId2"/>
+          <a:stretch>
+            <a:fillRect/>
+          </a:stretch>
+        </p:blipFill>
+        <p:spPr>
+          <a:xfrm>
+            <a:off x="6629400" y="4133087"/>
+            <a:ext cx="320040" cy="320040"/>
+          </a:xfrm>
+          <a:prstGeom prst="rect">
+            <a:avLst/>
+          </a:prstGeom>
+        </p:spPr>
+      </p:pic>
+      <p:sp>
+        <p:nvSpPr>
+          <p:cNvPr id="25" name="TextBox 24"/>
           <p:cNvSpPr txBox="1"/>
           <p:nvPr/>
         </p:nvSpPr>
@@ -14350,7 +16894,7 @@
       </p:sp>
       <p:sp>
         <p:nvSpPr>
-          <p:cNvPr id="22" name="TextBox 21"/>
+          <p:cNvPr id="26" name="TextBox 25"/>
           <p:cNvSpPr txBox="1"/>
           <p:nvPr/>
         </p:nvSpPr>
@@ -14691,9 +17235,33 @@
           </a:p>
         </p:txBody>
       </p:sp>
-      <p:sp>
-        <p:nvSpPr>
-          <p:cNvPr id="9" name="TextBox 8"/>
+      <p:pic>
+        <p:nvPicPr>
+          <p:cNvPr id="9" name="Picture 8" descr="icon_bulb.png"/>
+          <p:cNvPicPr>
+            <a:picLocks noChangeAspect="1"/>
+          </p:cNvPicPr>
+          <p:nvPr/>
+        </p:nvPicPr>
+        <p:blipFill>
+          <a:blip r:embed="rId2"/>
+          <a:stretch>
+            <a:fillRect/>
+          </a:stretch>
+        </p:blipFill>
+        <p:spPr>
+          <a:xfrm>
+            <a:off x="1051560" y="2304288"/>
+            <a:ext cx="320040" cy="320040"/>
+          </a:xfrm>
+          <a:prstGeom prst="rect">
+            <a:avLst/>
+          </a:prstGeom>
+        </p:spPr>
+      </p:pic>
+      <p:sp>
+        <p:nvSpPr>
+          <p:cNvPr id="10" name="TextBox 9"/>
           <p:cNvSpPr txBox="1"/>
           <p:nvPr/>
         </p:nvSpPr>
@@ -14728,7 +17296,7 @@
       </p:sp>
       <p:sp>
         <p:nvSpPr>
-          <p:cNvPr id="10" name="TextBox 9"/>
+          <p:cNvPr id="11" name="TextBox 10"/>
           <p:cNvSpPr txBox="1"/>
           <p:nvPr/>
         </p:nvSpPr>
@@ -14763,7 +17331,7 @@
       </p:sp>
       <p:sp>
         <p:nvSpPr>
-          <p:cNvPr id="11" name="Rounded Rectangle 10"/>
+          <p:cNvPr id="12" name="Rounded Rectangle 11"/>
           <p:cNvSpPr/>
           <p:nvPr/>
         </p:nvSpPr>
@@ -14815,7 +17383,7 @@
       </p:sp>
       <p:sp>
         <p:nvSpPr>
-          <p:cNvPr id="12" name="Rounded Rectangle 11"/>
+          <p:cNvPr id="13" name="Rounded Rectangle 12"/>
           <p:cNvSpPr/>
           <p:nvPr/>
         </p:nvSpPr>
@@ -14859,9 +17427,33 @@
           </a:p>
         </p:txBody>
       </p:sp>
-      <p:sp>
-        <p:nvSpPr>
-          <p:cNvPr id="13" name="TextBox 12"/>
+      <p:pic>
+        <p:nvPicPr>
+          <p:cNvPr id="14" name="Picture 13" descr="icon_camera.png"/>
+          <p:cNvPicPr>
+            <a:picLocks noChangeAspect="1"/>
+          </p:cNvPicPr>
+          <p:nvPr/>
+        </p:nvPicPr>
+        <p:blipFill>
+          <a:blip r:embed="rId3"/>
+          <a:stretch>
+            <a:fillRect/>
+          </a:stretch>
+        </p:blipFill>
+        <p:spPr>
+          <a:xfrm>
+            <a:off x="6629400" y="2304288"/>
+            <a:ext cx="320040" cy="320040"/>
+          </a:xfrm>
+          <a:prstGeom prst="rect">
+            <a:avLst/>
+          </a:prstGeom>
+        </p:spPr>
+      </p:pic>
+      <p:sp>
+        <p:nvSpPr>
+          <p:cNvPr id="15" name="TextBox 14"/>
           <p:cNvSpPr txBox="1"/>
           <p:nvPr/>
         </p:nvSpPr>
@@ -14896,7 +17488,7 @@
       </p:sp>
       <p:sp>
         <p:nvSpPr>
-          <p:cNvPr id="14" name="TextBox 13"/>
+          <p:cNvPr id="16" name="TextBox 15"/>
           <p:cNvSpPr txBox="1"/>
           <p:nvPr/>
         </p:nvSpPr>
@@ -14931,7 +17523,7 @@
       </p:sp>
       <p:sp>
         <p:nvSpPr>
-          <p:cNvPr id="15" name="Rounded Rectangle 14"/>
+          <p:cNvPr id="17" name="Rounded Rectangle 16"/>
           <p:cNvSpPr/>
           <p:nvPr/>
         </p:nvSpPr>
@@ -14983,7 +17575,7 @@
       </p:sp>
       <p:sp>
         <p:nvSpPr>
-          <p:cNvPr id="16" name="Rounded Rectangle 15"/>
+          <p:cNvPr id="18" name="Rounded Rectangle 17"/>
           <p:cNvSpPr/>
           <p:nvPr/>
         </p:nvSpPr>
@@ -15027,9 +17619,33 @@
           </a:p>
         </p:txBody>
       </p:sp>
-      <p:sp>
-        <p:nvSpPr>
-          <p:cNvPr id="17" name="TextBox 16"/>
+      <p:pic>
+        <p:nvPicPr>
+          <p:cNvPr id="19" name="Picture 18" descr="icon_plug.png"/>
+          <p:cNvPicPr>
+            <a:picLocks noChangeAspect="1"/>
+          </p:cNvPicPr>
+          <p:nvPr/>
+        </p:nvPicPr>
+        <p:blipFill>
+          <a:blip r:embed="rId4"/>
+          <a:stretch>
+            <a:fillRect/>
+          </a:stretch>
+        </p:blipFill>
+        <p:spPr>
+          <a:xfrm>
+            <a:off x="1051560" y="4133087"/>
+            <a:ext cx="320040" cy="320040"/>
+          </a:xfrm>
+          <a:prstGeom prst="rect">
+            <a:avLst/>
+          </a:prstGeom>
+        </p:spPr>
+      </p:pic>
+      <p:sp>
+        <p:nvSpPr>
+          <p:cNvPr id="20" name="TextBox 19"/>
           <p:cNvSpPr txBox="1"/>
           <p:nvPr/>
         </p:nvSpPr>
@@ -15064,7 +17680,7 @@
       </p:sp>
       <p:sp>
         <p:nvSpPr>
-          <p:cNvPr id="18" name="TextBox 17"/>
+          <p:cNvPr id="21" name="TextBox 20"/>
           <p:cNvSpPr txBox="1"/>
           <p:nvPr/>
         </p:nvSpPr>
@@ -15099,7 +17715,7 @@
       </p:sp>
       <p:sp>
         <p:nvSpPr>
-          <p:cNvPr id="19" name="Rounded Rectangle 18"/>
+          <p:cNvPr id="22" name="Rounded Rectangle 21"/>
           <p:cNvSpPr/>
           <p:nvPr/>
         </p:nvSpPr>
@@ -15151,7 +17767,7 @@
       </p:sp>
       <p:sp>
         <p:nvSpPr>
-          <p:cNvPr id="20" name="Rounded Rectangle 19"/>
+          <p:cNvPr id="23" name="Rounded Rectangle 22"/>
           <p:cNvSpPr/>
           <p:nvPr/>
         </p:nvSpPr>
@@ -15195,9 +17811,33 @@
           </a:p>
         </p:txBody>
       </p:sp>
-      <p:sp>
-        <p:nvSpPr>
-          <p:cNvPr id="21" name="TextBox 20"/>
+      <p:pic>
+        <p:nvPicPr>
+          <p:cNvPr id="24" name="Picture 23" descr="icon_moon.png"/>
+          <p:cNvPicPr>
+            <a:picLocks noChangeAspect="1"/>
+          </p:cNvPicPr>
+          <p:nvPr/>
+        </p:nvPicPr>
+        <p:blipFill>
+          <a:blip r:embed="rId5"/>
+          <a:stretch>
+            <a:fillRect/>
+          </a:stretch>
+        </p:blipFill>
+        <p:spPr>
+          <a:xfrm>
+            <a:off x="6629400" y="4133087"/>
+            <a:ext cx="320040" cy="320040"/>
+          </a:xfrm>
+          <a:prstGeom prst="rect">
+            <a:avLst/>
+          </a:prstGeom>
+        </p:spPr>
+      </p:pic>
+      <p:sp>
+        <p:nvSpPr>
+          <p:cNvPr id="25" name="TextBox 24"/>
           <p:cNvSpPr txBox="1"/>
           <p:nvPr/>
         </p:nvSpPr>
@@ -15232,7 +17872,7 @@
       </p:sp>
       <p:sp>
         <p:nvSpPr>
-          <p:cNvPr id="22" name="TextBox 21"/>
+          <p:cNvPr id="26" name="TextBox 25"/>
           <p:cNvSpPr txBox="1"/>
           <p:nvPr/>
         </p:nvSpPr>
@@ -16152,7 +18792,7 @@
                 </a:solidFill>
                 <a:latin typeface="Calibri"/>
               </a:rPr>
-              <a:t>Q1 — Solar eclipse</a:t>
+              <a:t>Q1 - Solar eclipse</a:t>
             </a:r>
           </a:p>
         </p:txBody>
@@ -16448,7 +19088,7 @@
         <p:spPr>
           <a:xfrm>
             <a:off x="1508760" y="3749039"/>
-            <a:ext cx="4297680" cy="868680"/>
+            <a:ext cx="3840480" cy="868680"/>
           </a:xfrm>
           <a:prstGeom prst="rect">
             <a:avLst/>
@@ -16608,7 +19248,7 @@
         <p:spPr>
           <a:xfrm>
             <a:off x="7040880" y="3749039"/>
-            <a:ext cx="4297680" cy="868680"/>
+            <a:ext cx="3840480" cy="868680"/>
           </a:xfrm>
           <a:prstGeom prst="rect">
             <a:avLst/>
@@ -16768,7 +19408,7 @@
         <p:spPr>
           <a:xfrm>
             <a:off x="1508760" y="4782312"/>
-            <a:ext cx="4297680" cy="868680"/>
+            <a:ext cx="3840480" cy="868680"/>
           </a:xfrm>
           <a:prstGeom prst="rect">
             <a:avLst/>
@@ -16928,7 +19568,7 @@
         <p:spPr>
           <a:xfrm>
             <a:off x="7040880" y="4782312"/>
-            <a:ext cx="4297680" cy="868680"/>
+            <a:ext cx="3840480" cy="868680"/>
           </a:xfrm>
           <a:prstGeom prst="rect">
             <a:avLst/>
@@ -16995,7 +19635,7 @@
             <a:avLst/>
           </a:prstGeom>
           <a:solidFill>
-            <a:srgbClr val="2A9D8F"/>
+            <a:srgbClr val="0A9396"/>
           </a:solidFill>
           <a:ln>
             <a:noFill/>
@@ -17050,11 +19690,11 @@
             <a:r>
               <a:rPr sz="1300" b="1" i="0">
                 <a:solidFill>
-                  <a:srgbClr val="2A9D8F"/>
+                  <a:srgbClr val="0A9396"/>
                 </a:solidFill>
                 <a:latin typeface="Arial"/>
               </a:rPr>
-              <a:t>ANSWER REVEAL</a:t>
+              <a:t>QUIZ QUESTION</a:t>
             </a:r>
           </a:p>
         </p:txBody>
@@ -17089,7 +19729,7 @@
                 </a:solidFill>
                 <a:latin typeface="Calibri"/>
               </a:rPr>
-              <a:t>Q1 — Answer</a:t>
+              <a:t>Q1 - Solar eclipse</a:t>
             </a:r>
           </a:p>
         </p:txBody>
@@ -17178,166 +19818,6 @@
           <a:prstGeom prst="roundRect">
             <a:avLst>
               <a:gd name="adj" fmla="val 4000"/>
-            </a:avLst>
-          </a:prstGeom>
-          <a:solidFill>
-            <a:srgbClr val="E9F5F0"/>
-          </a:solidFill>
-          <a:ln>
-            <a:noFill/>
-          </a:ln>
-          <a:effectLst/>
-        </p:spPr>
-        <p:style>
-          <a:lnRef idx="1">
-            <a:schemeClr val="accent1"/>
-          </a:lnRef>
-          <a:fillRef idx="3">
-            <a:schemeClr val="accent1"/>
-          </a:fillRef>
-          <a:effectRef idx="2">
-            <a:schemeClr val="accent1"/>
-          </a:effectRef>
-          <a:fontRef idx="minor">
-            <a:schemeClr val="lt1"/>
-          </a:fontRef>
-        </p:style>
-        <p:txBody>
-          <a:bodyPr rtlCol="0" anchor="ctr"/>
-          <a:lstStyle/>
-          <a:p>
-            <a:pPr algn="ctr"/>
-          </a:p>
-        </p:txBody>
-      </p:sp>
-      <p:sp>
-        <p:nvSpPr>
-          <p:cNvPr id="8" name="Oval 7"/>
-          <p:cNvSpPr/>
-          <p:nvPr/>
-        </p:nvSpPr>
-        <p:spPr>
-          <a:xfrm>
-            <a:off x="1005840" y="2240280"/>
-            <a:ext cx="731520" cy="731520"/>
-          </a:xfrm>
-          <a:prstGeom prst="ellipse">
-            <a:avLst/>
-          </a:prstGeom>
-          <a:solidFill>
-            <a:srgbClr val="2A9D8F"/>
-          </a:solidFill>
-          <a:ln>
-            <a:noFill/>
-          </a:ln>
-          <a:effectLst/>
-        </p:spPr>
-        <p:style>
-          <a:lnRef idx="1">
-            <a:schemeClr val="accent1"/>
-          </a:lnRef>
-          <a:fillRef idx="3">
-            <a:schemeClr val="accent1"/>
-          </a:fillRef>
-          <a:effectRef idx="2">
-            <a:schemeClr val="accent1"/>
-          </a:effectRef>
-          <a:fontRef idx="minor">
-            <a:schemeClr val="lt1"/>
-          </a:fontRef>
-        </p:style>
-        <p:txBody>
-          <a:bodyPr rtlCol="0" anchor="ctr"/>
-          <a:lstStyle/>
-          <a:p>
-            <a:pPr algn="ctr"/>
-          </a:p>
-        </p:txBody>
-      </p:sp>
-      <p:sp>
-        <p:nvSpPr>
-          <p:cNvPr id="9" name="TextBox 8"/>
-          <p:cNvSpPr txBox="1"/>
-          <p:nvPr/>
-        </p:nvSpPr>
-        <p:spPr>
-          <a:xfrm>
-            <a:off x="1005840" y="2240280"/>
-            <a:ext cx="731520" cy="731520"/>
-          </a:xfrm>
-          <a:prstGeom prst="rect">
-            <a:avLst/>
-          </a:prstGeom>
-          <a:noFill/>
-        </p:spPr>
-        <p:txBody>
-          <a:bodyPr wrap="square" anchor="ctr" lIns="0" rIns="0" tIns="0" bIns="0">
-            <a:spAutoFit/>
-          </a:bodyPr>
-          <a:lstStyle/>
-          <a:p>
-            <a:pPr algn="ctr"/>
-            <a:r>
-              <a:rPr sz="3000" b="1" i="0">
-                <a:solidFill>
-                  <a:srgbClr val="FFFFFF"/>
-                </a:solidFill>
-                <a:latin typeface="Calibri"/>
-              </a:rPr>
-              <a:t>✓</a:t>
-            </a:r>
-          </a:p>
-        </p:txBody>
-      </p:sp>
-      <p:sp>
-        <p:nvSpPr>
-          <p:cNvPr id="10" name="TextBox 9"/>
-          <p:cNvSpPr txBox="1"/>
-          <p:nvPr/>
-        </p:nvSpPr>
-        <p:spPr>
-          <a:xfrm>
-            <a:off x="1920240" y="1828800"/>
-            <a:ext cx="9326880" cy="1554480"/>
-          </a:xfrm>
-          <a:prstGeom prst="rect">
-            <a:avLst/>
-          </a:prstGeom>
-          <a:noFill/>
-        </p:spPr>
-        <p:txBody>
-          <a:bodyPr wrap="square" anchor="ctr" lIns="0" rIns="0" tIns="0" bIns="0">
-            <a:spAutoFit/>
-          </a:bodyPr>
-          <a:lstStyle/>
-          <a:p>
-            <a:pPr algn="l"/>
-            <a:r>
-              <a:rPr sz="2200" b="1" i="0">
-                <a:solidFill>
-                  <a:srgbClr val="1D2433"/>
-                </a:solidFill>
-                <a:latin typeface="Calibri"/>
-              </a:rPr>
-              <a:t>B. The Moon is between the Sun and the Earth</a:t>
-            </a:r>
-          </a:p>
-        </p:txBody>
-      </p:sp>
-      <p:sp>
-        <p:nvSpPr>
-          <p:cNvPr id="11" name="Rounded Rectangle 10"/>
-          <p:cNvSpPr/>
-          <p:nvPr/>
-        </p:nvSpPr>
-        <p:spPr>
-          <a:xfrm>
-            <a:off x="640080" y="3657600"/>
-            <a:ext cx="10881360" cy="2011680"/>
-          </a:xfrm>
-          <a:prstGeom prst="roundRect">
-            <a:avLst>
-              <a:gd name="adj" fmla="val 3000"/>
             </a:avLst>
           </a:prstGeom>
           <a:solidFill>
@@ -17378,68 +19858,840 @@
       </p:sp>
       <p:sp>
         <p:nvSpPr>
+          <p:cNvPr id="8" name="TextBox 7"/>
+          <p:cNvSpPr txBox="1"/>
+          <p:nvPr/>
+        </p:nvSpPr>
+        <p:spPr>
+          <a:xfrm>
+            <a:off x="1005840" y="1828800"/>
+            <a:ext cx="10149840" cy="1554480"/>
+          </a:xfrm>
+          <a:prstGeom prst="rect">
+            <a:avLst/>
+          </a:prstGeom>
+          <a:noFill/>
+        </p:spPr>
+        <p:txBody>
+          <a:bodyPr wrap="square" anchor="ctr" lIns="0" rIns="0" tIns="0" bIns="0">
+            <a:spAutoFit/>
+          </a:bodyPr>
+          <a:lstStyle/>
+          <a:p>
+            <a:pPr algn="l"/>
+            <a:r>
+              <a:rPr sz="1900" b="1" i="0">
+                <a:solidFill>
+                  <a:srgbClr val="1D2433"/>
+                </a:solidFill>
+                <a:latin typeface="Calibri"/>
+              </a:rPr>
+              <a:t>A solar eclipse occurs when:</a:t>
+            </a:r>
+          </a:p>
+        </p:txBody>
+      </p:sp>
+      <p:sp>
+        <p:nvSpPr>
+          <p:cNvPr id="9" name="Rounded Rectangle 8"/>
+          <p:cNvSpPr/>
+          <p:nvPr/>
+        </p:nvSpPr>
+        <p:spPr>
+          <a:xfrm>
+            <a:off x="640080" y="3749039"/>
+            <a:ext cx="5349240" cy="868680"/>
+          </a:xfrm>
+          <a:prstGeom prst="roundRect">
+            <a:avLst>
+              <a:gd name="adj" fmla="val 12000"/>
+            </a:avLst>
+          </a:prstGeom>
+          <a:solidFill>
+            <a:srgbClr val="EAF1F4"/>
+          </a:solidFill>
+          <a:ln>
+            <a:noFill/>
+          </a:ln>
+          <a:effectLst/>
+        </p:spPr>
+        <p:style>
+          <a:lnRef idx="1">
+            <a:schemeClr val="accent1"/>
+          </a:lnRef>
+          <a:fillRef idx="3">
+            <a:schemeClr val="accent1"/>
+          </a:fillRef>
+          <a:effectRef idx="2">
+            <a:schemeClr val="accent1"/>
+          </a:effectRef>
+          <a:fontRef idx="minor">
+            <a:schemeClr val="lt1"/>
+          </a:fontRef>
+        </p:style>
+        <p:txBody>
+          <a:bodyPr rtlCol="0" anchor="ctr"/>
+          <a:lstStyle/>
+          <a:p>
+            <a:pPr algn="ctr"/>
+          </a:p>
+        </p:txBody>
+      </p:sp>
+      <p:sp>
+        <p:nvSpPr>
+          <p:cNvPr id="10" name="Oval 9"/>
+          <p:cNvSpPr/>
+          <p:nvPr/>
+        </p:nvSpPr>
+        <p:spPr>
+          <a:xfrm>
+            <a:off x="914400" y="3977639"/>
+            <a:ext cx="411480" cy="411480"/>
+          </a:xfrm>
+          <a:prstGeom prst="ellipse">
+            <a:avLst/>
+          </a:prstGeom>
+          <a:solidFill>
+            <a:srgbClr val="0A9396"/>
+          </a:solidFill>
+          <a:ln>
+            <a:noFill/>
+          </a:ln>
+          <a:effectLst/>
+        </p:spPr>
+        <p:style>
+          <a:lnRef idx="1">
+            <a:schemeClr val="accent1"/>
+          </a:lnRef>
+          <a:fillRef idx="3">
+            <a:schemeClr val="accent1"/>
+          </a:fillRef>
+          <a:effectRef idx="2">
+            <a:schemeClr val="accent1"/>
+          </a:effectRef>
+          <a:fontRef idx="minor">
+            <a:schemeClr val="lt1"/>
+          </a:fontRef>
+        </p:style>
+        <p:txBody>
+          <a:bodyPr rtlCol="0" anchor="ctr"/>
+          <a:lstStyle/>
+          <a:p>
+            <a:pPr algn="ctr"/>
+          </a:p>
+        </p:txBody>
+      </p:sp>
+      <p:sp>
+        <p:nvSpPr>
+          <p:cNvPr id="11" name="TextBox 10"/>
+          <p:cNvSpPr txBox="1"/>
+          <p:nvPr/>
+        </p:nvSpPr>
+        <p:spPr>
+          <a:xfrm>
+            <a:off x="914400" y="3977639"/>
+            <a:ext cx="411480" cy="411480"/>
+          </a:xfrm>
+          <a:prstGeom prst="rect">
+            <a:avLst/>
+          </a:prstGeom>
+          <a:noFill/>
+        </p:spPr>
+        <p:txBody>
+          <a:bodyPr wrap="square" anchor="ctr" lIns="0" rIns="0" tIns="0" bIns="0">
+            <a:spAutoFit/>
+          </a:bodyPr>
+          <a:lstStyle/>
+          <a:p>
+            <a:pPr algn="ctr"/>
+            <a:r>
+              <a:rPr sz="1400" b="1" i="0">
+                <a:solidFill>
+                  <a:srgbClr val="FFFFFF"/>
+                </a:solidFill>
+                <a:latin typeface="Calibri"/>
+              </a:rPr>
+              <a:t>A</a:t>
+            </a:r>
+          </a:p>
+        </p:txBody>
+      </p:sp>
+      <p:sp>
+        <p:nvSpPr>
           <p:cNvPr id="12" name="TextBox 11"/>
           <p:cNvSpPr txBox="1"/>
           <p:nvPr/>
         </p:nvSpPr>
         <p:spPr>
           <a:xfrm>
-            <a:off x="1005840" y="3886200"/>
-            <a:ext cx="4572000" cy="365760"/>
-          </a:xfrm>
-          <a:prstGeom prst="rect">
-            <a:avLst/>
-          </a:prstGeom>
-          <a:noFill/>
-        </p:spPr>
-        <p:txBody>
-          <a:bodyPr wrap="square" anchor="t" lIns="0" rIns="0" tIns="0" bIns="0">
+            <a:off x="1508760" y="3749039"/>
+            <a:ext cx="3840480" cy="868680"/>
+          </a:xfrm>
+          <a:prstGeom prst="rect">
+            <a:avLst/>
+          </a:prstGeom>
+          <a:noFill/>
+        </p:spPr>
+        <p:txBody>
+          <a:bodyPr wrap="square" anchor="ctr" lIns="0" rIns="0" tIns="0" bIns="0">
             <a:spAutoFit/>
           </a:bodyPr>
           <a:lstStyle/>
           <a:p>
             <a:pPr algn="l"/>
             <a:r>
+              <a:rPr sz="1450" b="0" i="0">
+                <a:solidFill>
+                  <a:srgbClr val="1D2433"/>
+                </a:solidFill>
+                <a:latin typeface="Calibri"/>
+              </a:rPr>
+              <a:t>The Earth is between the Sun and the Moon</a:t>
+            </a:r>
+          </a:p>
+        </p:txBody>
+      </p:sp>
+      <p:sp>
+        <p:nvSpPr>
+          <p:cNvPr id="13" name="Rounded Rectangle 12"/>
+          <p:cNvSpPr/>
+          <p:nvPr/>
+        </p:nvSpPr>
+        <p:spPr>
+          <a:xfrm>
+            <a:off x="6172200" y="3749039"/>
+            <a:ext cx="5349240" cy="868680"/>
+          </a:xfrm>
+          <a:prstGeom prst="roundRect">
+            <a:avLst>
+              <a:gd name="adj" fmla="val 12000"/>
+            </a:avLst>
+          </a:prstGeom>
+          <a:solidFill>
+            <a:srgbClr val="E9F5F0"/>
+          </a:solidFill>
+          <a:ln w="31750">
+            <a:solidFill>
+              <a:srgbClr val="2A9D8F"/>
+            </a:solidFill>
+          </a:ln>
+          <a:effectLst/>
+        </p:spPr>
+        <p:style>
+          <a:lnRef idx="1">
+            <a:schemeClr val="accent1"/>
+          </a:lnRef>
+          <a:fillRef idx="3">
+            <a:schemeClr val="accent1"/>
+          </a:fillRef>
+          <a:effectRef idx="2">
+            <a:schemeClr val="accent1"/>
+          </a:effectRef>
+          <a:fontRef idx="minor">
+            <a:schemeClr val="lt1"/>
+          </a:fontRef>
+        </p:style>
+        <p:txBody>
+          <a:bodyPr rtlCol="0" anchor="ctr"/>
+          <a:lstStyle/>
+          <a:p>
+            <a:pPr algn="ctr"/>
+          </a:p>
+        </p:txBody>
+      </p:sp>
+      <p:sp>
+        <p:nvSpPr>
+          <p:cNvPr id="14" name="Oval 13"/>
+          <p:cNvSpPr/>
+          <p:nvPr/>
+        </p:nvSpPr>
+        <p:spPr>
+          <a:xfrm>
+            <a:off x="6446520" y="3977639"/>
+            <a:ext cx="411480" cy="411480"/>
+          </a:xfrm>
+          <a:prstGeom prst="ellipse">
+            <a:avLst/>
+          </a:prstGeom>
+          <a:solidFill>
+            <a:srgbClr val="2A9D8F"/>
+          </a:solidFill>
+          <a:ln>
+            <a:noFill/>
+          </a:ln>
+          <a:effectLst/>
+        </p:spPr>
+        <p:style>
+          <a:lnRef idx="1">
+            <a:schemeClr val="accent1"/>
+          </a:lnRef>
+          <a:fillRef idx="3">
+            <a:schemeClr val="accent1"/>
+          </a:fillRef>
+          <a:effectRef idx="2">
+            <a:schemeClr val="accent1"/>
+          </a:effectRef>
+          <a:fontRef idx="minor">
+            <a:schemeClr val="lt1"/>
+          </a:fontRef>
+        </p:style>
+        <p:txBody>
+          <a:bodyPr rtlCol="0" anchor="ctr"/>
+          <a:lstStyle/>
+          <a:p>
+            <a:pPr algn="ctr"/>
+          </a:p>
+        </p:txBody>
+      </p:sp>
+      <p:sp>
+        <p:nvSpPr>
+          <p:cNvPr id="15" name="TextBox 14"/>
+          <p:cNvSpPr txBox="1"/>
+          <p:nvPr/>
+        </p:nvSpPr>
+        <p:spPr>
+          <a:xfrm>
+            <a:off x="6446520" y="3977639"/>
+            <a:ext cx="411480" cy="411480"/>
+          </a:xfrm>
+          <a:prstGeom prst="rect">
+            <a:avLst/>
+          </a:prstGeom>
+          <a:noFill/>
+        </p:spPr>
+        <p:txBody>
+          <a:bodyPr wrap="square" anchor="ctr" lIns="0" rIns="0" tIns="0" bIns="0">
+            <a:spAutoFit/>
+          </a:bodyPr>
+          <a:lstStyle/>
+          <a:p>
+            <a:pPr algn="ctr"/>
+            <a:r>
               <a:rPr sz="1400" b="1" i="0">
                 <a:solidFill>
+                  <a:srgbClr val="FFFFFF"/>
+                </a:solidFill>
+                <a:latin typeface="Calibri"/>
+              </a:rPr>
+              <a:t>B</a:t>
+            </a:r>
+          </a:p>
+        </p:txBody>
+      </p:sp>
+      <p:sp>
+        <p:nvSpPr>
+          <p:cNvPr id="16" name="TextBox 15"/>
+          <p:cNvSpPr txBox="1"/>
+          <p:nvPr/>
+        </p:nvSpPr>
+        <p:spPr>
+          <a:xfrm>
+            <a:off x="7040880" y="3749039"/>
+            <a:ext cx="3840480" cy="868680"/>
+          </a:xfrm>
+          <a:prstGeom prst="rect">
+            <a:avLst/>
+          </a:prstGeom>
+          <a:noFill/>
+        </p:spPr>
+        <p:txBody>
+          <a:bodyPr wrap="square" anchor="ctr" lIns="0" rIns="0" tIns="0" bIns="0">
+            <a:spAutoFit/>
+          </a:bodyPr>
+          <a:lstStyle/>
+          <a:p>
+            <a:pPr algn="l"/>
+            <a:r>
+              <a:rPr sz="1450" b="1" i="0">
+                <a:solidFill>
+                  <a:srgbClr val="1D2433"/>
+                </a:solidFill>
+                <a:latin typeface="Calibri"/>
+              </a:rPr>
+              <a:t>The Moon is between the Sun and the Earth</a:t>
+            </a:r>
+          </a:p>
+        </p:txBody>
+      </p:sp>
+      <p:sp>
+        <p:nvSpPr>
+          <p:cNvPr id="17" name="Oval 16"/>
+          <p:cNvSpPr/>
+          <p:nvPr/>
+        </p:nvSpPr>
+        <p:spPr>
+          <a:xfrm>
+            <a:off x="10972800" y="3995927"/>
+            <a:ext cx="365760" cy="365760"/>
+          </a:xfrm>
+          <a:prstGeom prst="ellipse">
+            <a:avLst/>
+          </a:prstGeom>
+          <a:solidFill>
+            <a:srgbClr val="2A9D8F"/>
+          </a:solidFill>
+          <a:ln>
+            <a:noFill/>
+          </a:ln>
+          <a:effectLst/>
+        </p:spPr>
+        <p:style>
+          <a:lnRef idx="1">
+            <a:schemeClr val="accent1"/>
+          </a:lnRef>
+          <a:fillRef idx="3">
+            <a:schemeClr val="accent1"/>
+          </a:fillRef>
+          <a:effectRef idx="2">
+            <a:schemeClr val="accent1"/>
+          </a:effectRef>
+          <a:fontRef idx="minor">
+            <a:schemeClr val="lt1"/>
+          </a:fontRef>
+        </p:style>
+        <p:txBody>
+          <a:bodyPr rtlCol="0" anchor="ctr"/>
+          <a:lstStyle/>
+          <a:p>
+            <a:pPr algn="ctr"/>
+          </a:p>
+        </p:txBody>
+      </p:sp>
+      <p:sp>
+        <p:nvSpPr>
+          <p:cNvPr id="18" name="TextBox 17"/>
+          <p:cNvSpPr txBox="1"/>
+          <p:nvPr/>
+        </p:nvSpPr>
+        <p:spPr>
+          <a:xfrm>
+            <a:off x="10972800" y="3950207"/>
+            <a:ext cx="365760" cy="365760"/>
+          </a:xfrm>
+          <a:prstGeom prst="rect">
+            <a:avLst/>
+          </a:prstGeom>
+          <a:noFill/>
+        </p:spPr>
+        <p:txBody>
+          <a:bodyPr wrap="square" anchor="ctr" lIns="0" rIns="0" tIns="0" bIns="0">
+            <a:spAutoFit/>
+          </a:bodyPr>
+          <a:lstStyle/>
+          <a:p>
+            <a:pPr algn="ctr"/>
+            <a:r>
+              <a:rPr sz="1600" b="1" i="0">
+                <a:solidFill>
+                  <a:srgbClr val="FFFFFF"/>
+                </a:solidFill>
+                <a:latin typeface="Calibri"/>
+              </a:rPr>
+              <a:t>✓</a:t>
+            </a:r>
+          </a:p>
+        </p:txBody>
+      </p:sp>
+      <p:sp>
+        <p:nvSpPr>
+          <p:cNvPr id="19" name="Rounded Rectangle 18"/>
+          <p:cNvSpPr/>
+          <p:nvPr/>
+        </p:nvSpPr>
+        <p:spPr>
+          <a:xfrm>
+            <a:off x="640080" y="4782312"/>
+            <a:ext cx="5349240" cy="868680"/>
+          </a:xfrm>
+          <a:prstGeom prst="roundRect">
+            <a:avLst>
+              <a:gd name="adj" fmla="val 12000"/>
+            </a:avLst>
+          </a:prstGeom>
+          <a:solidFill>
+            <a:srgbClr val="EAF1F4"/>
+          </a:solidFill>
+          <a:ln>
+            <a:noFill/>
+          </a:ln>
+          <a:effectLst/>
+        </p:spPr>
+        <p:style>
+          <a:lnRef idx="1">
+            <a:schemeClr val="accent1"/>
+          </a:lnRef>
+          <a:fillRef idx="3">
+            <a:schemeClr val="accent1"/>
+          </a:fillRef>
+          <a:effectRef idx="2">
+            <a:schemeClr val="accent1"/>
+          </a:effectRef>
+          <a:fontRef idx="minor">
+            <a:schemeClr val="lt1"/>
+          </a:fontRef>
+        </p:style>
+        <p:txBody>
+          <a:bodyPr rtlCol="0" anchor="ctr"/>
+          <a:lstStyle/>
+          <a:p>
+            <a:pPr algn="ctr"/>
+          </a:p>
+        </p:txBody>
+      </p:sp>
+      <p:sp>
+        <p:nvSpPr>
+          <p:cNvPr id="20" name="Oval 19"/>
+          <p:cNvSpPr/>
+          <p:nvPr/>
+        </p:nvSpPr>
+        <p:spPr>
+          <a:xfrm>
+            <a:off x="914400" y="5010912"/>
+            <a:ext cx="411480" cy="411480"/>
+          </a:xfrm>
+          <a:prstGeom prst="ellipse">
+            <a:avLst/>
+          </a:prstGeom>
+          <a:solidFill>
+            <a:srgbClr val="0A9396"/>
+          </a:solidFill>
+          <a:ln>
+            <a:noFill/>
+          </a:ln>
+          <a:effectLst/>
+        </p:spPr>
+        <p:style>
+          <a:lnRef idx="1">
+            <a:schemeClr val="accent1"/>
+          </a:lnRef>
+          <a:fillRef idx="3">
+            <a:schemeClr val="accent1"/>
+          </a:fillRef>
+          <a:effectRef idx="2">
+            <a:schemeClr val="accent1"/>
+          </a:effectRef>
+          <a:fontRef idx="minor">
+            <a:schemeClr val="lt1"/>
+          </a:fontRef>
+        </p:style>
+        <p:txBody>
+          <a:bodyPr rtlCol="0" anchor="ctr"/>
+          <a:lstStyle/>
+          <a:p>
+            <a:pPr algn="ctr"/>
+          </a:p>
+        </p:txBody>
+      </p:sp>
+      <p:sp>
+        <p:nvSpPr>
+          <p:cNvPr id="21" name="TextBox 20"/>
+          <p:cNvSpPr txBox="1"/>
+          <p:nvPr/>
+        </p:nvSpPr>
+        <p:spPr>
+          <a:xfrm>
+            <a:off x="914400" y="5010912"/>
+            <a:ext cx="411480" cy="411480"/>
+          </a:xfrm>
+          <a:prstGeom prst="rect">
+            <a:avLst/>
+          </a:prstGeom>
+          <a:noFill/>
+        </p:spPr>
+        <p:txBody>
+          <a:bodyPr wrap="square" anchor="ctr" lIns="0" rIns="0" tIns="0" bIns="0">
+            <a:spAutoFit/>
+          </a:bodyPr>
+          <a:lstStyle/>
+          <a:p>
+            <a:pPr algn="ctr"/>
+            <a:r>
+              <a:rPr sz="1400" b="1" i="0">
+                <a:solidFill>
+                  <a:srgbClr val="FFFFFF"/>
+                </a:solidFill>
+                <a:latin typeface="Calibri"/>
+              </a:rPr>
+              <a:t>C</a:t>
+            </a:r>
+          </a:p>
+        </p:txBody>
+      </p:sp>
+      <p:sp>
+        <p:nvSpPr>
+          <p:cNvPr id="22" name="TextBox 21"/>
+          <p:cNvSpPr txBox="1"/>
+          <p:nvPr/>
+        </p:nvSpPr>
+        <p:spPr>
+          <a:xfrm>
+            <a:off x="1508760" y="4782312"/>
+            <a:ext cx="3840480" cy="868680"/>
+          </a:xfrm>
+          <a:prstGeom prst="rect">
+            <a:avLst/>
+          </a:prstGeom>
+          <a:noFill/>
+        </p:spPr>
+        <p:txBody>
+          <a:bodyPr wrap="square" anchor="ctr" lIns="0" rIns="0" tIns="0" bIns="0">
+            <a:spAutoFit/>
+          </a:bodyPr>
+          <a:lstStyle/>
+          <a:p>
+            <a:pPr algn="l"/>
+            <a:r>
+              <a:rPr sz="1450" b="0" i="0">
+                <a:solidFill>
+                  <a:srgbClr val="1D2433"/>
+                </a:solidFill>
+                <a:latin typeface="Calibri"/>
+              </a:rPr>
+              <a:t>The Sun is between the Earth and the Moon</a:t>
+            </a:r>
+          </a:p>
+        </p:txBody>
+      </p:sp>
+      <p:sp>
+        <p:nvSpPr>
+          <p:cNvPr id="23" name="Rounded Rectangle 22"/>
+          <p:cNvSpPr/>
+          <p:nvPr/>
+        </p:nvSpPr>
+        <p:spPr>
+          <a:xfrm>
+            <a:off x="6172200" y="4782312"/>
+            <a:ext cx="5349240" cy="868680"/>
+          </a:xfrm>
+          <a:prstGeom prst="roundRect">
+            <a:avLst>
+              <a:gd name="adj" fmla="val 12000"/>
+            </a:avLst>
+          </a:prstGeom>
+          <a:solidFill>
+            <a:srgbClr val="EAF1F4"/>
+          </a:solidFill>
+          <a:ln>
+            <a:noFill/>
+          </a:ln>
+          <a:effectLst/>
+        </p:spPr>
+        <p:style>
+          <a:lnRef idx="1">
+            <a:schemeClr val="accent1"/>
+          </a:lnRef>
+          <a:fillRef idx="3">
+            <a:schemeClr val="accent1"/>
+          </a:fillRef>
+          <a:effectRef idx="2">
+            <a:schemeClr val="accent1"/>
+          </a:effectRef>
+          <a:fontRef idx="minor">
+            <a:schemeClr val="lt1"/>
+          </a:fontRef>
+        </p:style>
+        <p:txBody>
+          <a:bodyPr rtlCol="0" anchor="ctr"/>
+          <a:lstStyle/>
+          <a:p>
+            <a:pPr algn="ctr"/>
+          </a:p>
+        </p:txBody>
+      </p:sp>
+      <p:sp>
+        <p:nvSpPr>
+          <p:cNvPr id="24" name="Oval 23"/>
+          <p:cNvSpPr/>
+          <p:nvPr/>
+        </p:nvSpPr>
+        <p:spPr>
+          <a:xfrm>
+            <a:off x="6446520" y="5010912"/>
+            <a:ext cx="411480" cy="411480"/>
+          </a:xfrm>
+          <a:prstGeom prst="ellipse">
+            <a:avLst/>
+          </a:prstGeom>
+          <a:solidFill>
+            <a:srgbClr val="0A9396"/>
+          </a:solidFill>
+          <a:ln>
+            <a:noFill/>
+          </a:ln>
+          <a:effectLst/>
+        </p:spPr>
+        <p:style>
+          <a:lnRef idx="1">
+            <a:schemeClr val="accent1"/>
+          </a:lnRef>
+          <a:fillRef idx="3">
+            <a:schemeClr val="accent1"/>
+          </a:fillRef>
+          <a:effectRef idx="2">
+            <a:schemeClr val="accent1"/>
+          </a:effectRef>
+          <a:fontRef idx="minor">
+            <a:schemeClr val="lt1"/>
+          </a:fontRef>
+        </p:style>
+        <p:txBody>
+          <a:bodyPr rtlCol="0" anchor="ctr"/>
+          <a:lstStyle/>
+          <a:p>
+            <a:pPr algn="ctr"/>
+          </a:p>
+        </p:txBody>
+      </p:sp>
+      <p:sp>
+        <p:nvSpPr>
+          <p:cNvPr id="25" name="TextBox 24"/>
+          <p:cNvSpPr txBox="1"/>
+          <p:nvPr/>
+        </p:nvSpPr>
+        <p:spPr>
+          <a:xfrm>
+            <a:off x="6446520" y="5010912"/>
+            <a:ext cx="411480" cy="411480"/>
+          </a:xfrm>
+          <a:prstGeom prst="rect">
+            <a:avLst/>
+          </a:prstGeom>
+          <a:noFill/>
+        </p:spPr>
+        <p:txBody>
+          <a:bodyPr wrap="square" anchor="ctr" lIns="0" rIns="0" tIns="0" bIns="0">
+            <a:spAutoFit/>
+          </a:bodyPr>
+          <a:lstStyle/>
+          <a:p>
+            <a:pPr algn="ctr"/>
+            <a:r>
+              <a:rPr sz="1400" b="1" i="0">
+                <a:solidFill>
+                  <a:srgbClr val="FFFFFF"/>
+                </a:solidFill>
+                <a:latin typeface="Calibri"/>
+              </a:rPr>
+              <a:t>D</a:t>
+            </a:r>
+          </a:p>
+        </p:txBody>
+      </p:sp>
+      <p:sp>
+        <p:nvSpPr>
+          <p:cNvPr id="26" name="TextBox 25"/>
+          <p:cNvSpPr txBox="1"/>
+          <p:nvPr/>
+        </p:nvSpPr>
+        <p:spPr>
+          <a:xfrm>
+            <a:off x="7040880" y="4782312"/>
+            <a:ext cx="3840480" cy="868680"/>
+          </a:xfrm>
+          <a:prstGeom prst="rect">
+            <a:avLst/>
+          </a:prstGeom>
+          <a:noFill/>
+        </p:spPr>
+        <p:txBody>
+          <a:bodyPr wrap="square" anchor="ctr" lIns="0" rIns="0" tIns="0" bIns="0">
+            <a:spAutoFit/>
+          </a:bodyPr>
+          <a:lstStyle/>
+          <a:p>
+            <a:pPr algn="l"/>
+            <a:r>
+              <a:rPr sz="1450" b="0" i="0">
+                <a:solidFill>
+                  <a:srgbClr val="1D2433"/>
+                </a:solidFill>
+                <a:latin typeface="Calibri"/>
+              </a:rPr>
+              <a:t>The Moon is full</a:t>
+            </a:r>
+          </a:p>
+        </p:txBody>
+      </p:sp>
+      <p:sp>
+        <p:nvSpPr>
+          <p:cNvPr id="27" name="Rounded Rectangle 26"/>
+          <p:cNvSpPr/>
+          <p:nvPr/>
+        </p:nvSpPr>
+        <p:spPr>
+          <a:xfrm>
+            <a:off x="640080" y="5779008"/>
+            <a:ext cx="10881360" cy="566928"/>
+          </a:xfrm>
+          <a:prstGeom prst="roundRect">
+            <a:avLst>
+              <a:gd name="adj" fmla="val 10000"/>
+            </a:avLst>
+          </a:prstGeom>
+          <a:solidFill>
+            <a:srgbClr val="EEF2F7"/>
+          </a:solidFill>
+          <a:ln>
+            <a:noFill/>
+          </a:ln>
+          <a:effectLst/>
+        </p:spPr>
+        <p:style>
+          <a:lnRef idx="1">
+            <a:schemeClr val="accent1"/>
+          </a:lnRef>
+          <a:fillRef idx="3">
+            <a:schemeClr val="accent1"/>
+          </a:fillRef>
+          <a:effectRef idx="2">
+            <a:schemeClr val="accent1"/>
+          </a:effectRef>
+          <a:fontRef idx="minor">
+            <a:schemeClr val="lt1"/>
+          </a:fontRef>
+        </p:style>
+        <p:txBody>
+          <a:bodyPr rtlCol="0" anchor="ctr"/>
+          <a:lstStyle/>
+          <a:p>
+            <a:pPr algn="ctr"/>
+          </a:p>
+        </p:txBody>
+      </p:sp>
+      <p:sp>
+        <p:nvSpPr>
+          <p:cNvPr id="28" name="TextBox 27"/>
+          <p:cNvSpPr txBox="1"/>
+          <p:nvPr/>
+        </p:nvSpPr>
+        <p:spPr>
+          <a:xfrm>
+            <a:off x="914400" y="5779008"/>
+            <a:ext cx="10332720" cy="566928"/>
+          </a:xfrm>
+          <a:prstGeom prst="rect">
+            <a:avLst/>
+          </a:prstGeom>
+          <a:noFill/>
+        </p:spPr>
+        <p:txBody>
+          <a:bodyPr wrap="square" anchor="ctr" lIns="0" rIns="0" tIns="0" bIns="0">
+            <a:spAutoFit/>
+          </a:bodyPr>
+          <a:lstStyle/>
+          <a:p>
+            <a:pPr algn="l"/>
+            <a:r>
+              <a:rPr sz="1250" b="1" i="0">
+                <a:solidFill>
                   <a:srgbClr val="2A9D8F"/>
                 </a:solidFill>
                 <a:latin typeface="Arial"/>
               </a:rPr>
-              <a:t>WHY</a:t>
-            </a:r>
-          </a:p>
-        </p:txBody>
-      </p:sp>
-      <p:sp>
-        <p:nvSpPr>
-          <p:cNvPr id="13" name="TextBox 12"/>
-          <p:cNvSpPr txBox="1"/>
-          <p:nvPr/>
-        </p:nvSpPr>
-        <p:spPr>
-          <a:xfrm>
-            <a:off x="1005840" y="4297680"/>
-            <a:ext cx="10149840" cy="1280160"/>
-          </a:xfrm>
-          <a:prstGeom prst="rect">
-            <a:avLst/>
-          </a:prstGeom>
-          <a:noFill/>
-        </p:spPr>
-        <p:txBody>
-          <a:bodyPr wrap="square" anchor="t" lIns="0" rIns="0" tIns="0" bIns="0">
-            <a:spAutoFit/>
-          </a:bodyPr>
-          <a:lstStyle/>
-          <a:p>
-            <a:pPr algn="l">
-              <a:lnSpc>
-                <a:spcPct val="110000"/>
-              </a:lnSpc>
-            </a:pPr>
-            <a:r>
-              <a:rPr sz="1600" b="0" i="0">
+              <a:t>Why  </a:t>
+            </a:r>
+            <a:r>
+              <a:rPr sz="1200" b="0" i="0">
                 <a:solidFill>
                   <a:srgbClr val="1D2433"/>
                 </a:solidFill>
@@ -17585,7 +20837,7 @@
                 </a:solidFill>
                 <a:latin typeface="Calibri"/>
               </a:rPr>
-              <a:t>Q2 — Lunar eclipse</a:t>
+              <a:t>Q2 - Lunar eclipse</a:t>
             </a:r>
           </a:p>
         </p:txBody>
@@ -17881,7 +21133,7 @@
         <p:spPr>
           <a:xfrm>
             <a:off x="1508760" y="3749039"/>
-            <a:ext cx="4297680" cy="868680"/>
+            <a:ext cx="3840480" cy="868680"/>
           </a:xfrm>
           <a:prstGeom prst="rect">
             <a:avLst/>
@@ -18041,7 +21293,7 @@
         <p:spPr>
           <a:xfrm>
             <a:off x="7040880" y="3749039"/>
-            <a:ext cx="4297680" cy="868680"/>
+            <a:ext cx="3840480" cy="868680"/>
           </a:xfrm>
           <a:prstGeom prst="rect">
             <a:avLst/>
@@ -18201,7 +21453,7 @@
         <p:spPr>
           <a:xfrm>
             <a:off x="1508760" y="4782312"/>
-            <a:ext cx="4297680" cy="868680"/>
+            <a:ext cx="3840480" cy="868680"/>
           </a:xfrm>
           <a:prstGeom prst="rect">
             <a:avLst/>
@@ -18361,7 +21613,7 @@
         <p:spPr>
           <a:xfrm>
             <a:off x="7040880" y="4782312"/>
-            <a:ext cx="4297680" cy="868680"/>
+            <a:ext cx="3840480" cy="868680"/>
           </a:xfrm>
           <a:prstGeom prst="rect">
             <a:avLst/>
@@ -18708,7 +21960,7 @@
             <a:avLst/>
           </a:prstGeom>
           <a:solidFill>
-            <a:srgbClr val="2A9D8F"/>
+            <a:srgbClr val="0A9396"/>
           </a:solidFill>
           <a:ln>
             <a:noFill/>
@@ -18763,11 +22015,11 @@
             <a:r>
               <a:rPr sz="1300" b="1" i="0">
                 <a:solidFill>
-                  <a:srgbClr val="2A9D8F"/>
+                  <a:srgbClr val="0A9396"/>
                 </a:solidFill>
                 <a:latin typeface="Arial"/>
               </a:rPr>
-              <a:t>ANSWER REVEAL</a:t>
+              <a:t>QUIZ QUESTION</a:t>
             </a:r>
           </a:p>
         </p:txBody>
@@ -18802,7 +22054,7 @@
                 </a:solidFill>
                 <a:latin typeface="Calibri"/>
               </a:rPr>
-              <a:t>Q2 — Answer</a:t>
+              <a:t>Q2 - Lunar eclipse</a:t>
             </a:r>
           </a:p>
         </p:txBody>
@@ -18891,166 +22143,6 @@
           <a:prstGeom prst="roundRect">
             <a:avLst>
               <a:gd name="adj" fmla="val 4000"/>
-            </a:avLst>
-          </a:prstGeom>
-          <a:solidFill>
-            <a:srgbClr val="E9F5F0"/>
-          </a:solidFill>
-          <a:ln>
-            <a:noFill/>
-          </a:ln>
-          <a:effectLst/>
-        </p:spPr>
-        <p:style>
-          <a:lnRef idx="1">
-            <a:schemeClr val="accent1"/>
-          </a:lnRef>
-          <a:fillRef idx="3">
-            <a:schemeClr val="accent1"/>
-          </a:fillRef>
-          <a:effectRef idx="2">
-            <a:schemeClr val="accent1"/>
-          </a:effectRef>
-          <a:fontRef idx="minor">
-            <a:schemeClr val="lt1"/>
-          </a:fontRef>
-        </p:style>
-        <p:txBody>
-          <a:bodyPr rtlCol="0" anchor="ctr"/>
-          <a:lstStyle/>
-          <a:p>
-            <a:pPr algn="ctr"/>
-          </a:p>
-        </p:txBody>
-      </p:sp>
-      <p:sp>
-        <p:nvSpPr>
-          <p:cNvPr id="8" name="Oval 7"/>
-          <p:cNvSpPr/>
-          <p:nvPr/>
-        </p:nvSpPr>
-        <p:spPr>
-          <a:xfrm>
-            <a:off x="1005840" y="2240280"/>
-            <a:ext cx="731520" cy="731520"/>
-          </a:xfrm>
-          <a:prstGeom prst="ellipse">
-            <a:avLst/>
-          </a:prstGeom>
-          <a:solidFill>
-            <a:srgbClr val="2A9D8F"/>
-          </a:solidFill>
-          <a:ln>
-            <a:noFill/>
-          </a:ln>
-          <a:effectLst/>
-        </p:spPr>
-        <p:style>
-          <a:lnRef idx="1">
-            <a:schemeClr val="accent1"/>
-          </a:lnRef>
-          <a:fillRef idx="3">
-            <a:schemeClr val="accent1"/>
-          </a:fillRef>
-          <a:effectRef idx="2">
-            <a:schemeClr val="accent1"/>
-          </a:effectRef>
-          <a:fontRef idx="minor">
-            <a:schemeClr val="lt1"/>
-          </a:fontRef>
-        </p:style>
-        <p:txBody>
-          <a:bodyPr rtlCol="0" anchor="ctr"/>
-          <a:lstStyle/>
-          <a:p>
-            <a:pPr algn="ctr"/>
-          </a:p>
-        </p:txBody>
-      </p:sp>
-      <p:sp>
-        <p:nvSpPr>
-          <p:cNvPr id="9" name="TextBox 8"/>
-          <p:cNvSpPr txBox="1"/>
-          <p:nvPr/>
-        </p:nvSpPr>
-        <p:spPr>
-          <a:xfrm>
-            <a:off x="1005840" y="2240280"/>
-            <a:ext cx="731520" cy="731520"/>
-          </a:xfrm>
-          <a:prstGeom prst="rect">
-            <a:avLst/>
-          </a:prstGeom>
-          <a:noFill/>
-        </p:spPr>
-        <p:txBody>
-          <a:bodyPr wrap="square" anchor="ctr" lIns="0" rIns="0" tIns="0" bIns="0">
-            <a:spAutoFit/>
-          </a:bodyPr>
-          <a:lstStyle/>
-          <a:p>
-            <a:pPr algn="ctr"/>
-            <a:r>
-              <a:rPr sz="3000" b="1" i="0">
-                <a:solidFill>
-                  <a:srgbClr val="FFFFFF"/>
-                </a:solidFill>
-                <a:latin typeface="Calibri"/>
-              </a:rPr>
-              <a:t>✓</a:t>
-            </a:r>
-          </a:p>
-        </p:txBody>
-      </p:sp>
-      <p:sp>
-        <p:nvSpPr>
-          <p:cNvPr id="10" name="TextBox 9"/>
-          <p:cNvSpPr txBox="1"/>
-          <p:nvPr/>
-        </p:nvSpPr>
-        <p:spPr>
-          <a:xfrm>
-            <a:off x="1920240" y="1828800"/>
-            <a:ext cx="9326880" cy="1554480"/>
-          </a:xfrm>
-          <a:prstGeom prst="rect">
-            <a:avLst/>
-          </a:prstGeom>
-          <a:noFill/>
-        </p:spPr>
-        <p:txBody>
-          <a:bodyPr wrap="square" anchor="ctr" lIns="0" rIns="0" tIns="0" bIns="0">
-            <a:spAutoFit/>
-          </a:bodyPr>
-          <a:lstStyle/>
-          <a:p>
-            <a:pPr algn="l"/>
-            <a:r>
-              <a:rPr sz="2200" b="1" i="0">
-                <a:solidFill>
-                  <a:srgbClr val="1D2433"/>
-                </a:solidFill>
-                <a:latin typeface="Calibri"/>
-              </a:rPr>
-              <a:t>B. Full-moon day</a:t>
-            </a:r>
-          </a:p>
-        </p:txBody>
-      </p:sp>
-      <p:sp>
-        <p:nvSpPr>
-          <p:cNvPr id="11" name="Rounded Rectangle 10"/>
-          <p:cNvSpPr/>
-          <p:nvPr/>
-        </p:nvSpPr>
-        <p:spPr>
-          <a:xfrm>
-            <a:off x="640080" y="3657600"/>
-            <a:ext cx="10881360" cy="2011680"/>
-          </a:xfrm>
-          <a:prstGeom prst="roundRect">
-            <a:avLst>
-              <a:gd name="adj" fmla="val 3000"/>
             </a:avLst>
           </a:prstGeom>
           <a:solidFill>
@@ -19091,68 +22183,840 @@
       </p:sp>
       <p:sp>
         <p:nvSpPr>
+          <p:cNvPr id="8" name="TextBox 7"/>
+          <p:cNvSpPr txBox="1"/>
+          <p:nvPr/>
+        </p:nvSpPr>
+        <p:spPr>
+          <a:xfrm>
+            <a:off x="1005840" y="1828800"/>
+            <a:ext cx="10149840" cy="1554480"/>
+          </a:xfrm>
+          <a:prstGeom prst="rect">
+            <a:avLst/>
+          </a:prstGeom>
+          <a:noFill/>
+        </p:spPr>
+        <p:txBody>
+          <a:bodyPr wrap="square" anchor="ctr" lIns="0" rIns="0" tIns="0" bIns="0">
+            <a:spAutoFit/>
+          </a:bodyPr>
+          <a:lstStyle/>
+          <a:p>
+            <a:pPr algn="l"/>
+            <a:r>
+              <a:rPr sz="1900" b="1" i="0">
+                <a:solidFill>
+                  <a:srgbClr val="1D2433"/>
+                </a:solidFill>
+                <a:latin typeface="Calibri"/>
+              </a:rPr>
+              <a:t>A lunar eclipse occurs on a:</a:t>
+            </a:r>
+          </a:p>
+        </p:txBody>
+      </p:sp>
+      <p:sp>
+        <p:nvSpPr>
+          <p:cNvPr id="9" name="Rounded Rectangle 8"/>
+          <p:cNvSpPr/>
+          <p:nvPr/>
+        </p:nvSpPr>
+        <p:spPr>
+          <a:xfrm>
+            <a:off x="640080" y="3749039"/>
+            <a:ext cx="5349240" cy="868680"/>
+          </a:xfrm>
+          <a:prstGeom prst="roundRect">
+            <a:avLst>
+              <a:gd name="adj" fmla="val 12000"/>
+            </a:avLst>
+          </a:prstGeom>
+          <a:solidFill>
+            <a:srgbClr val="EAF1F4"/>
+          </a:solidFill>
+          <a:ln>
+            <a:noFill/>
+          </a:ln>
+          <a:effectLst/>
+        </p:spPr>
+        <p:style>
+          <a:lnRef idx="1">
+            <a:schemeClr val="accent1"/>
+          </a:lnRef>
+          <a:fillRef idx="3">
+            <a:schemeClr val="accent1"/>
+          </a:fillRef>
+          <a:effectRef idx="2">
+            <a:schemeClr val="accent1"/>
+          </a:effectRef>
+          <a:fontRef idx="minor">
+            <a:schemeClr val="lt1"/>
+          </a:fontRef>
+        </p:style>
+        <p:txBody>
+          <a:bodyPr rtlCol="0" anchor="ctr"/>
+          <a:lstStyle/>
+          <a:p>
+            <a:pPr algn="ctr"/>
+          </a:p>
+        </p:txBody>
+      </p:sp>
+      <p:sp>
+        <p:nvSpPr>
+          <p:cNvPr id="10" name="Oval 9"/>
+          <p:cNvSpPr/>
+          <p:nvPr/>
+        </p:nvSpPr>
+        <p:spPr>
+          <a:xfrm>
+            <a:off x="914400" y="3977639"/>
+            <a:ext cx="411480" cy="411480"/>
+          </a:xfrm>
+          <a:prstGeom prst="ellipse">
+            <a:avLst/>
+          </a:prstGeom>
+          <a:solidFill>
+            <a:srgbClr val="0A9396"/>
+          </a:solidFill>
+          <a:ln>
+            <a:noFill/>
+          </a:ln>
+          <a:effectLst/>
+        </p:spPr>
+        <p:style>
+          <a:lnRef idx="1">
+            <a:schemeClr val="accent1"/>
+          </a:lnRef>
+          <a:fillRef idx="3">
+            <a:schemeClr val="accent1"/>
+          </a:fillRef>
+          <a:effectRef idx="2">
+            <a:schemeClr val="accent1"/>
+          </a:effectRef>
+          <a:fontRef idx="minor">
+            <a:schemeClr val="lt1"/>
+          </a:fontRef>
+        </p:style>
+        <p:txBody>
+          <a:bodyPr rtlCol="0" anchor="ctr"/>
+          <a:lstStyle/>
+          <a:p>
+            <a:pPr algn="ctr"/>
+          </a:p>
+        </p:txBody>
+      </p:sp>
+      <p:sp>
+        <p:nvSpPr>
+          <p:cNvPr id="11" name="TextBox 10"/>
+          <p:cNvSpPr txBox="1"/>
+          <p:nvPr/>
+        </p:nvSpPr>
+        <p:spPr>
+          <a:xfrm>
+            <a:off x="914400" y="3977639"/>
+            <a:ext cx="411480" cy="411480"/>
+          </a:xfrm>
+          <a:prstGeom prst="rect">
+            <a:avLst/>
+          </a:prstGeom>
+          <a:noFill/>
+        </p:spPr>
+        <p:txBody>
+          <a:bodyPr wrap="square" anchor="ctr" lIns="0" rIns="0" tIns="0" bIns="0">
+            <a:spAutoFit/>
+          </a:bodyPr>
+          <a:lstStyle/>
+          <a:p>
+            <a:pPr algn="ctr"/>
+            <a:r>
+              <a:rPr sz="1400" b="1" i="0">
+                <a:solidFill>
+                  <a:srgbClr val="FFFFFF"/>
+                </a:solidFill>
+                <a:latin typeface="Calibri"/>
+              </a:rPr>
+              <a:t>A</a:t>
+            </a:r>
+          </a:p>
+        </p:txBody>
+      </p:sp>
+      <p:sp>
+        <p:nvSpPr>
           <p:cNvPr id="12" name="TextBox 11"/>
           <p:cNvSpPr txBox="1"/>
           <p:nvPr/>
         </p:nvSpPr>
         <p:spPr>
           <a:xfrm>
-            <a:off x="1005840" y="3886200"/>
-            <a:ext cx="4572000" cy="365760"/>
-          </a:xfrm>
-          <a:prstGeom prst="rect">
-            <a:avLst/>
-          </a:prstGeom>
-          <a:noFill/>
-        </p:spPr>
-        <p:txBody>
-          <a:bodyPr wrap="square" anchor="t" lIns="0" rIns="0" tIns="0" bIns="0">
+            <a:off x="1508760" y="3749039"/>
+            <a:ext cx="3840480" cy="868680"/>
+          </a:xfrm>
+          <a:prstGeom prst="rect">
+            <a:avLst/>
+          </a:prstGeom>
+          <a:noFill/>
+        </p:spPr>
+        <p:txBody>
+          <a:bodyPr wrap="square" anchor="ctr" lIns="0" rIns="0" tIns="0" bIns="0">
             <a:spAutoFit/>
           </a:bodyPr>
           <a:lstStyle/>
           <a:p>
             <a:pPr algn="l"/>
             <a:r>
+              <a:rPr sz="1450" b="0" i="0">
+                <a:solidFill>
+                  <a:srgbClr val="1D2433"/>
+                </a:solidFill>
+                <a:latin typeface="Calibri"/>
+              </a:rPr>
+              <a:t>New-moon day</a:t>
+            </a:r>
+          </a:p>
+        </p:txBody>
+      </p:sp>
+      <p:sp>
+        <p:nvSpPr>
+          <p:cNvPr id="13" name="Rounded Rectangle 12"/>
+          <p:cNvSpPr/>
+          <p:nvPr/>
+        </p:nvSpPr>
+        <p:spPr>
+          <a:xfrm>
+            <a:off x="6172200" y="3749039"/>
+            <a:ext cx="5349240" cy="868680"/>
+          </a:xfrm>
+          <a:prstGeom prst="roundRect">
+            <a:avLst>
+              <a:gd name="adj" fmla="val 12000"/>
+            </a:avLst>
+          </a:prstGeom>
+          <a:solidFill>
+            <a:srgbClr val="E9F5F0"/>
+          </a:solidFill>
+          <a:ln w="31750">
+            <a:solidFill>
+              <a:srgbClr val="2A9D8F"/>
+            </a:solidFill>
+          </a:ln>
+          <a:effectLst/>
+        </p:spPr>
+        <p:style>
+          <a:lnRef idx="1">
+            <a:schemeClr val="accent1"/>
+          </a:lnRef>
+          <a:fillRef idx="3">
+            <a:schemeClr val="accent1"/>
+          </a:fillRef>
+          <a:effectRef idx="2">
+            <a:schemeClr val="accent1"/>
+          </a:effectRef>
+          <a:fontRef idx="minor">
+            <a:schemeClr val="lt1"/>
+          </a:fontRef>
+        </p:style>
+        <p:txBody>
+          <a:bodyPr rtlCol="0" anchor="ctr"/>
+          <a:lstStyle/>
+          <a:p>
+            <a:pPr algn="ctr"/>
+          </a:p>
+        </p:txBody>
+      </p:sp>
+      <p:sp>
+        <p:nvSpPr>
+          <p:cNvPr id="14" name="Oval 13"/>
+          <p:cNvSpPr/>
+          <p:nvPr/>
+        </p:nvSpPr>
+        <p:spPr>
+          <a:xfrm>
+            <a:off x="6446520" y="3977639"/>
+            <a:ext cx="411480" cy="411480"/>
+          </a:xfrm>
+          <a:prstGeom prst="ellipse">
+            <a:avLst/>
+          </a:prstGeom>
+          <a:solidFill>
+            <a:srgbClr val="2A9D8F"/>
+          </a:solidFill>
+          <a:ln>
+            <a:noFill/>
+          </a:ln>
+          <a:effectLst/>
+        </p:spPr>
+        <p:style>
+          <a:lnRef idx="1">
+            <a:schemeClr val="accent1"/>
+          </a:lnRef>
+          <a:fillRef idx="3">
+            <a:schemeClr val="accent1"/>
+          </a:fillRef>
+          <a:effectRef idx="2">
+            <a:schemeClr val="accent1"/>
+          </a:effectRef>
+          <a:fontRef idx="minor">
+            <a:schemeClr val="lt1"/>
+          </a:fontRef>
+        </p:style>
+        <p:txBody>
+          <a:bodyPr rtlCol="0" anchor="ctr"/>
+          <a:lstStyle/>
+          <a:p>
+            <a:pPr algn="ctr"/>
+          </a:p>
+        </p:txBody>
+      </p:sp>
+      <p:sp>
+        <p:nvSpPr>
+          <p:cNvPr id="15" name="TextBox 14"/>
+          <p:cNvSpPr txBox="1"/>
+          <p:nvPr/>
+        </p:nvSpPr>
+        <p:spPr>
+          <a:xfrm>
+            <a:off x="6446520" y="3977639"/>
+            <a:ext cx="411480" cy="411480"/>
+          </a:xfrm>
+          <a:prstGeom prst="rect">
+            <a:avLst/>
+          </a:prstGeom>
+          <a:noFill/>
+        </p:spPr>
+        <p:txBody>
+          <a:bodyPr wrap="square" anchor="ctr" lIns="0" rIns="0" tIns="0" bIns="0">
+            <a:spAutoFit/>
+          </a:bodyPr>
+          <a:lstStyle/>
+          <a:p>
+            <a:pPr algn="ctr"/>
+            <a:r>
               <a:rPr sz="1400" b="1" i="0">
                 <a:solidFill>
+                  <a:srgbClr val="FFFFFF"/>
+                </a:solidFill>
+                <a:latin typeface="Calibri"/>
+              </a:rPr>
+              <a:t>B</a:t>
+            </a:r>
+          </a:p>
+        </p:txBody>
+      </p:sp>
+      <p:sp>
+        <p:nvSpPr>
+          <p:cNvPr id="16" name="TextBox 15"/>
+          <p:cNvSpPr txBox="1"/>
+          <p:nvPr/>
+        </p:nvSpPr>
+        <p:spPr>
+          <a:xfrm>
+            <a:off x="7040880" y="3749039"/>
+            <a:ext cx="3840480" cy="868680"/>
+          </a:xfrm>
+          <a:prstGeom prst="rect">
+            <a:avLst/>
+          </a:prstGeom>
+          <a:noFill/>
+        </p:spPr>
+        <p:txBody>
+          <a:bodyPr wrap="square" anchor="ctr" lIns="0" rIns="0" tIns="0" bIns="0">
+            <a:spAutoFit/>
+          </a:bodyPr>
+          <a:lstStyle/>
+          <a:p>
+            <a:pPr algn="l"/>
+            <a:r>
+              <a:rPr sz="1450" b="1" i="0">
+                <a:solidFill>
+                  <a:srgbClr val="1D2433"/>
+                </a:solidFill>
+                <a:latin typeface="Calibri"/>
+              </a:rPr>
+              <a:t>Full-moon day</a:t>
+            </a:r>
+          </a:p>
+        </p:txBody>
+      </p:sp>
+      <p:sp>
+        <p:nvSpPr>
+          <p:cNvPr id="17" name="Oval 16"/>
+          <p:cNvSpPr/>
+          <p:nvPr/>
+        </p:nvSpPr>
+        <p:spPr>
+          <a:xfrm>
+            <a:off x="10972800" y="3995927"/>
+            <a:ext cx="365760" cy="365760"/>
+          </a:xfrm>
+          <a:prstGeom prst="ellipse">
+            <a:avLst/>
+          </a:prstGeom>
+          <a:solidFill>
+            <a:srgbClr val="2A9D8F"/>
+          </a:solidFill>
+          <a:ln>
+            <a:noFill/>
+          </a:ln>
+          <a:effectLst/>
+        </p:spPr>
+        <p:style>
+          <a:lnRef idx="1">
+            <a:schemeClr val="accent1"/>
+          </a:lnRef>
+          <a:fillRef idx="3">
+            <a:schemeClr val="accent1"/>
+          </a:fillRef>
+          <a:effectRef idx="2">
+            <a:schemeClr val="accent1"/>
+          </a:effectRef>
+          <a:fontRef idx="minor">
+            <a:schemeClr val="lt1"/>
+          </a:fontRef>
+        </p:style>
+        <p:txBody>
+          <a:bodyPr rtlCol="0" anchor="ctr"/>
+          <a:lstStyle/>
+          <a:p>
+            <a:pPr algn="ctr"/>
+          </a:p>
+        </p:txBody>
+      </p:sp>
+      <p:sp>
+        <p:nvSpPr>
+          <p:cNvPr id="18" name="TextBox 17"/>
+          <p:cNvSpPr txBox="1"/>
+          <p:nvPr/>
+        </p:nvSpPr>
+        <p:spPr>
+          <a:xfrm>
+            <a:off x="10972800" y="3950207"/>
+            <a:ext cx="365760" cy="365760"/>
+          </a:xfrm>
+          <a:prstGeom prst="rect">
+            <a:avLst/>
+          </a:prstGeom>
+          <a:noFill/>
+        </p:spPr>
+        <p:txBody>
+          <a:bodyPr wrap="square" anchor="ctr" lIns="0" rIns="0" tIns="0" bIns="0">
+            <a:spAutoFit/>
+          </a:bodyPr>
+          <a:lstStyle/>
+          <a:p>
+            <a:pPr algn="ctr"/>
+            <a:r>
+              <a:rPr sz="1600" b="1" i="0">
+                <a:solidFill>
+                  <a:srgbClr val="FFFFFF"/>
+                </a:solidFill>
+                <a:latin typeface="Calibri"/>
+              </a:rPr>
+              <a:t>✓</a:t>
+            </a:r>
+          </a:p>
+        </p:txBody>
+      </p:sp>
+      <p:sp>
+        <p:nvSpPr>
+          <p:cNvPr id="19" name="Rounded Rectangle 18"/>
+          <p:cNvSpPr/>
+          <p:nvPr/>
+        </p:nvSpPr>
+        <p:spPr>
+          <a:xfrm>
+            <a:off x="640080" y="4782312"/>
+            <a:ext cx="5349240" cy="868680"/>
+          </a:xfrm>
+          <a:prstGeom prst="roundRect">
+            <a:avLst>
+              <a:gd name="adj" fmla="val 12000"/>
+            </a:avLst>
+          </a:prstGeom>
+          <a:solidFill>
+            <a:srgbClr val="EAF1F4"/>
+          </a:solidFill>
+          <a:ln>
+            <a:noFill/>
+          </a:ln>
+          <a:effectLst/>
+        </p:spPr>
+        <p:style>
+          <a:lnRef idx="1">
+            <a:schemeClr val="accent1"/>
+          </a:lnRef>
+          <a:fillRef idx="3">
+            <a:schemeClr val="accent1"/>
+          </a:fillRef>
+          <a:effectRef idx="2">
+            <a:schemeClr val="accent1"/>
+          </a:effectRef>
+          <a:fontRef idx="minor">
+            <a:schemeClr val="lt1"/>
+          </a:fontRef>
+        </p:style>
+        <p:txBody>
+          <a:bodyPr rtlCol="0" anchor="ctr"/>
+          <a:lstStyle/>
+          <a:p>
+            <a:pPr algn="ctr"/>
+          </a:p>
+        </p:txBody>
+      </p:sp>
+      <p:sp>
+        <p:nvSpPr>
+          <p:cNvPr id="20" name="Oval 19"/>
+          <p:cNvSpPr/>
+          <p:nvPr/>
+        </p:nvSpPr>
+        <p:spPr>
+          <a:xfrm>
+            <a:off x="914400" y="5010912"/>
+            <a:ext cx="411480" cy="411480"/>
+          </a:xfrm>
+          <a:prstGeom prst="ellipse">
+            <a:avLst/>
+          </a:prstGeom>
+          <a:solidFill>
+            <a:srgbClr val="0A9396"/>
+          </a:solidFill>
+          <a:ln>
+            <a:noFill/>
+          </a:ln>
+          <a:effectLst/>
+        </p:spPr>
+        <p:style>
+          <a:lnRef idx="1">
+            <a:schemeClr val="accent1"/>
+          </a:lnRef>
+          <a:fillRef idx="3">
+            <a:schemeClr val="accent1"/>
+          </a:fillRef>
+          <a:effectRef idx="2">
+            <a:schemeClr val="accent1"/>
+          </a:effectRef>
+          <a:fontRef idx="minor">
+            <a:schemeClr val="lt1"/>
+          </a:fontRef>
+        </p:style>
+        <p:txBody>
+          <a:bodyPr rtlCol="0" anchor="ctr"/>
+          <a:lstStyle/>
+          <a:p>
+            <a:pPr algn="ctr"/>
+          </a:p>
+        </p:txBody>
+      </p:sp>
+      <p:sp>
+        <p:nvSpPr>
+          <p:cNvPr id="21" name="TextBox 20"/>
+          <p:cNvSpPr txBox="1"/>
+          <p:nvPr/>
+        </p:nvSpPr>
+        <p:spPr>
+          <a:xfrm>
+            <a:off x="914400" y="5010912"/>
+            <a:ext cx="411480" cy="411480"/>
+          </a:xfrm>
+          <a:prstGeom prst="rect">
+            <a:avLst/>
+          </a:prstGeom>
+          <a:noFill/>
+        </p:spPr>
+        <p:txBody>
+          <a:bodyPr wrap="square" anchor="ctr" lIns="0" rIns="0" tIns="0" bIns="0">
+            <a:spAutoFit/>
+          </a:bodyPr>
+          <a:lstStyle/>
+          <a:p>
+            <a:pPr algn="ctr"/>
+            <a:r>
+              <a:rPr sz="1400" b="1" i="0">
+                <a:solidFill>
+                  <a:srgbClr val="FFFFFF"/>
+                </a:solidFill>
+                <a:latin typeface="Calibri"/>
+              </a:rPr>
+              <a:t>C</a:t>
+            </a:r>
+          </a:p>
+        </p:txBody>
+      </p:sp>
+      <p:sp>
+        <p:nvSpPr>
+          <p:cNvPr id="22" name="TextBox 21"/>
+          <p:cNvSpPr txBox="1"/>
+          <p:nvPr/>
+        </p:nvSpPr>
+        <p:spPr>
+          <a:xfrm>
+            <a:off x="1508760" y="4782312"/>
+            <a:ext cx="3840480" cy="868680"/>
+          </a:xfrm>
+          <a:prstGeom prst="rect">
+            <a:avLst/>
+          </a:prstGeom>
+          <a:noFill/>
+        </p:spPr>
+        <p:txBody>
+          <a:bodyPr wrap="square" anchor="ctr" lIns="0" rIns="0" tIns="0" bIns="0">
+            <a:spAutoFit/>
+          </a:bodyPr>
+          <a:lstStyle/>
+          <a:p>
+            <a:pPr algn="l"/>
+            <a:r>
+              <a:rPr sz="1450" b="0" i="0">
+                <a:solidFill>
+                  <a:srgbClr val="1D2433"/>
+                </a:solidFill>
+                <a:latin typeface="Calibri"/>
+              </a:rPr>
+              <a:t>Half-moon day</a:t>
+            </a:r>
+          </a:p>
+        </p:txBody>
+      </p:sp>
+      <p:sp>
+        <p:nvSpPr>
+          <p:cNvPr id="23" name="Rounded Rectangle 22"/>
+          <p:cNvSpPr/>
+          <p:nvPr/>
+        </p:nvSpPr>
+        <p:spPr>
+          <a:xfrm>
+            <a:off x="6172200" y="4782312"/>
+            <a:ext cx="5349240" cy="868680"/>
+          </a:xfrm>
+          <a:prstGeom prst="roundRect">
+            <a:avLst>
+              <a:gd name="adj" fmla="val 12000"/>
+            </a:avLst>
+          </a:prstGeom>
+          <a:solidFill>
+            <a:srgbClr val="EAF1F4"/>
+          </a:solidFill>
+          <a:ln>
+            <a:noFill/>
+          </a:ln>
+          <a:effectLst/>
+        </p:spPr>
+        <p:style>
+          <a:lnRef idx="1">
+            <a:schemeClr val="accent1"/>
+          </a:lnRef>
+          <a:fillRef idx="3">
+            <a:schemeClr val="accent1"/>
+          </a:fillRef>
+          <a:effectRef idx="2">
+            <a:schemeClr val="accent1"/>
+          </a:effectRef>
+          <a:fontRef idx="minor">
+            <a:schemeClr val="lt1"/>
+          </a:fontRef>
+        </p:style>
+        <p:txBody>
+          <a:bodyPr rtlCol="0" anchor="ctr"/>
+          <a:lstStyle/>
+          <a:p>
+            <a:pPr algn="ctr"/>
+          </a:p>
+        </p:txBody>
+      </p:sp>
+      <p:sp>
+        <p:nvSpPr>
+          <p:cNvPr id="24" name="Oval 23"/>
+          <p:cNvSpPr/>
+          <p:nvPr/>
+        </p:nvSpPr>
+        <p:spPr>
+          <a:xfrm>
+            <a:off x="6446520" y="5010912"/>
+            <a:ext cx="411480" cy="411480"/>
+          </a:xfrm>
+          <a:prstGeom prst="ellipse">
+            <a:avLst/>
+          </a:prstGeom>
+          <a:solidFill>
+            <a:srgbClr val="0A9396"/>
+          </a:solidFill>
+          <a:ln>
+            <a:noFill/>
+          </a:ln>
+          <a:effectLst/>
+        </p:spPr>
+        <p:style>
+          <a:lnRef idx="1">
+            <a:schemeClr val="accent1"/>
+          </a:lnRef>
+          <a:fillRef idx="3">
+            <a:schemeClr val="accent1"/>
+          </a:fillRef>
+          <a:effectRef idx="2">
+            <a:schemeClr val="accent1"/>
+          </a:effectRef>
+          <a:fontRef idx="minor">
+            <a:schemeClr val="lt1"/>
+          </a:fontRef>
+        </p:style>
+        <p:txBody>
+          <a:bodyPr rtlCol="0" anchor="ctr"/>
+          <a:lstStyle/>
+          <a:p>
+            <a:pPr algn="ctr"/>
+          </a:p>
+        </p:txBody>
+      </p:sp>
+      <p:sp>
+        <p:nvSpPr>
+          <p:cNvPr id="25" name="TextBox 24"/>
+          <p:cNvSpPr txBox="1"/>
+          <p:nvPr/>
+        </p:nvSpPr>
+        <p:spPr>
+          <a:xfrm>
+            <a:off x="6446520" y="5010912"/>
+            <a:ext cx="411480" cy="411480"/>
+          </a:xfrm>
+          <a:prstGeom prst="rect">
+            <a:avLst/>
+          </a:prstGeom>
+          <a:noFill/>
+        </p:spPr>
+        <p:txBody>
+          <a:bodyPr wrap="square" anchor="ctr" lIns="0" rIns="0" tIns="0" bIns="0">
+            <a:spAutoFit/>
+          </a:bodyPr>
+          <a:lstStyle/>
+          <a:p>
+            <a:pPr algn="ctr"/>
+            <a:r>
+              <a:rPr sz="1400" b="1" i="0">
+                <a:solidFill>
+                  <a:srgbClr val="FFFFFF"/>
+                </a:solidFill>
+                <a:latin typeface="Calibri"/>
+              </a:rPr>
+              <a:t>D</a:t>
+            </a:r>
+          </a:p>
+        </p:txBody>
+      </p:sp>
+      <p:sp>
+        <p:nvSpPr>
+          <p:cNvPr id="26" name="TextBox 25"/>
+          <p:cNvSpPr txBox="1"/>
+          <p:nvPr/>
+        </p:nvSpPr>
+        <p:spPr>
+          <a:xfrm>
+            <a:off x="7040880" y="4782312"/>
+            <a:ext cx="3840480" cy="868680"/>
+          </a:xfrm>
+          <a:prstGeom prst="rect">
+            <a:avLst/>
+          </a:prstGeom>
+          <a:noFill/>
+        </p:spPr>
+        <p:txBody>
+          <a:bodyPr wrap="square" anchor="ctr" lIns="0" rIns="0" tIns="0" bIns="0">
+            <a:spAutoFit/>
+          </a:bodyPr>
+          <a:lstStyle/>
+          <a:p>
+            <a:pPr algn="l"/>
+            <a:r>
+              <a:rPr sz="1450" b="0" i="0">
+                <a:solidFill>
+                  <a:srgbClr val="1D2433"/>
+                </a:solidFill>
+                <a:latin typeface="Calibri"/>
+              </a:rPr>
+              <a:t>Any day</a:t>
+            </a:r>
+          </a:p>
+        </p:txBody>
+      </p:sp>
+      <p:sp>
+        <p:nvSpPr>
+          <p:cNvPr id="27" name="Rounded Rectangle 26"/>
+          <p:cNvSpPr/>
+          <p:nvPr/>
+        </p:nvSpPr>
+        <p:spPr>
+          <a:xfrm>
+            <a:off x="640080" y="5779008"/>
+            <a:ext cx="10881360" cy="566928"/>
+          </a:xfrm>
+          <a:prstGeom prst="roundRect">
+            <a:avLst>
+              <a:gd name="adj" fmla="val 10000"/>
+            </a:avLst>
+          </a:prstGeom>
+          <a:solidFill>
+            <a:srgbClr val="EEF2F7"/>
+          </a:solidFill>
+          <a:ln>
+            <a:noFill/>
+          </a:ln>
+          <a:effectLst/>
+        </p:spPr>
+        <p:style>
+          <a:lnRef idx="1">
+            <a:schemeClr val="accent1"/>
+          </a:lnRef>
+          <a:fillRef idx="3">
+            <a:schemeClr val="accent1"/>
+          </a:fillRef>
+          <a:effectRef idx="2">
+            <a:schemeClr val="accent1"/>
+          </a:effectRef>
+          <a:fontRef idx="minor">
+            <a:schemeClr val="lt1"/>
+          </a:fontRef>
+        </p:style>
+        <p:txBody>
+          <a:bodyPr rtlCol="0" anchor="ctr"/>
+          <a:lstStyle/>
+          <a:p>
+            <a:pPr algn="ctr"/>
+          </a:p>
+        </p:txBody>
+      </p:sp>
+      <p:sp>
+        <p:nvSpPr>
+          <p:cNvPr id="28" name="TextBox 27"/>
+          <p:cNvSpPr txBox="1"/>
+          <p:nvPr/>
+        </p:nvSpPr>
+        <p:spPr>
+          <a:xfrm>
+            <a:off x="914400" y="5779008"/>
+            <a:ext cx="10332720" cy="566928"/>
+          </a:xfrm>
+          <a:prstGeom prst="rect">
+            <a:avLst/>
+          </a:prstGeom>
+          <a:noFill/>
+        </p:spPr>
+        <p:txBody>
+          <a:bodyPr wrap="square" anchor="ctr" lIns="0" rIns="0" tIns="0" bIns="0">
+            <a:spAutoFit/>
+          </a:bodyPr>
+          <a:lstStyle/>
+          <a:p>
+            <a:pPr algn="l"/>
+            <a:r>
+              <a:rPr sz="1250" b="1" i="0">
+                <a:solidFill>
                   <a:srgbClr val="2A9D8F"/>
                 </a:solidFill>
                 <a:latin typeface="Arial"/>
               </a:rPr>
-              <a:t>WHY</a:t>
-            </a:r>
-          </a:p>
-        </p:txBody>
-      </p:sp>
-      <p:sp>
-        <p:nvSpPr>
-          <p:cNvPr id="13" name="TextBox 12"/>
-          <p:cNvSpPr txBox="1"/>
-          <p:nvPr/>
-        </p:nvSpPr>
-        <p:spPr>
-          <a:xfrm>
-            <a:off x="1005840" y="4297680"/>
-            <a:ext cx="10149840" cy="1280160"/>
-          </a:xfrm>
-          <a:prstGeom prst="rect">
-            <a:avLst/>
-          </a:prstGeom>
-          <a:noFill/>
-        </p:spPr>
-        <p:txBody>
-          <a:bodyPr wrap="square" anchor="t" lIns="0" rIns="0" tIns="0" bIns="0">
-            <a:spAutoFit/>
-          </a:bodyPr>
-          <a:lstStyle/>
-          <a:p>
-            <a:pPr algn="l">
-              <a:lnSpc>
-                <a:spcPct val="110000"/>
-              </a:lnSpc>
-            </a:pPr>
-            <a:r>
-              <a:rPr sz="1600" b="0" i="0">
+              <a:t>Why  </a:t>
+            </a:r>
+            <a:r>
+              <a:rPr sz="1200" b="0" i="0">
                 <a:solidFill>
                   <a:srgbClr val="1D2433"/>
                 </a:solidFill>
@@ -19298,7 +23162,7 @@
                 </a:solidFill>
                 <a:latin typeface="Calibri"/>
               </a:rPr>
-              <a:t>Q3 — Shadows</a:t>
+              <a:t>Q3 - Shadows</a:t>
             </a:r>
           </a:p>
         </p:txBody>
@@ -19594,7 +23458,7 @@
         <p:spPr>
           <a:xfrm>
             <a:off x="1508760" y="3749039"/>
-            <a:ext cx="4297680" cy="868680"/>
+            <a:ext cx="3840480" cy="868680"/>
           </a:xfrm>
           <a:prstGeom prst="rect">
             <a:avLst/>
@@ -19754,7 +23618,7 @@
         <p:spPr>
           <a:xfrm>
             <a:off x="7040880" y="3749039"/>
-            <a:ext cx="4297680" cy="868680"/>
+            <a:ext cx="3840480" cy="868680"/>
           </a:xfrm>
           <a:prstGeom prst="rect">
             <a:avLst/>
@@ -19914,7 +23778,7 @@
         <p:spPr>
           <a:xfrm>
             <a:off x="1508760" y="4782312"/>
-            <a:ext cx="4297680" cy="868680"/>
+            <a:ext cx="3840480" cy="868680"/>
           </a:xfrm>
           <a:prstGeom prst="rect">
             <a:avLst/>
@@ -20074,7 +23938,7 @@
         <p:spPr>
           <a:xfrm>
             <a:off x="7040880" y="4782312"/>
-            <a:ext cx="4297680" cy="868680"/>
+            <a:ext cx="3840480" cy="868680"/>
           </a:xfrm>
           <a:prstGeom prst="rect">
             <a:avLst/>
@@ -20141,7 +24005,7 @@
             <a:avLst/>
           </a:prstGeom>
           <a:solidFill>
-            <a:srgbClr val="2A9D8F"/>
+            <a:srgbClr val="0A9396"/>
           </a:solidFill>
           <a:ln>
             <a:noFill/>
@@ -20196,11 +24060,11 @@
             <a:r>
               <a:rPr sz="1300" b="1" i="0">
                 <a:solidFill>
-                  <a:srgbClr val="2A9D8F"/>
+                  <a:srgbClr val="0A9396"/>
                 </a:solidFill>
                 <a:latin typeface="Arial"/>
               </a:rPr>
-              <a:t>ANSWER REVEAL</a:t>
+              <a:t>QUIZ QUESTION</a:t>
             </a:r>
           </a:p>
         </p:txBody>
@@ -20235,7 +24099,7 @@
                 </a:solidFill>
                 <a:latin typeface="Calibri"/>
               </a:rPr>
-              <a:t>Q3 — Answer</a:t>
+              <a:t>Q3 - Shadows</a:t>
             </a:r>
           </a:p>
         </p:txBody>
@@ -20324,166 +24188,6 @@
           <a:prstGeom prst="roundRect">
             <a:avLst>
               <a:gd name="adj" fmla="val 4000"/>
-            </a:avLst>
-          </a:prstGeom>
-          <a:solidFill>
-            <a:srgbClr val="E9F5F0"/>
-          </a:solidFill>
-          <a:ln>
-            <a:noFill/>
-          </a:ln>
-          <a:effectLst/>
-        </p:spPr>
-        <p:style>
-          <a:lnRef idx="1">
-            <a:schemeClr val="accent1"/>
-          </a:lnRef>
-          <a:fillRef idx="3">
-            <a:schemeClr val="accent1"/>
-          </a:fillRef>
-          <a:effectRef idx="2">
-            <a:schemeClr val="accent1"/>
-          </a:effectRef>
-          <a:fontRef idx="minor">
-            <a:schemeClr val="lt1"/>
-          </a:fontRef>
-        </p:style>
-        <p:txBody>
-          <a:bodyPr rtlCol="0" anchor="ctr"/>
-          <a:lstStyle/>
-          <a:p>
-            <a:pPr algn="ctr"/>
-          </a:p>
-        </p:txBody>
-      </p:sp>
-      <p:sp>
-        <p:nvSpPr>
-          <p:cNvPr id="8" name="Oval 7"/>
-          <p:cNvSpPr/>
-          <p:nvPr/>
-        </p:nvSpPr>
-        <p:spPr>
-          <a:xfrm>
-            <a:off x="1005840" y="2240280"/>
-            <a:ext cx="731520" cy="731520"/>
-          </a:xfrm>
-          <a:prstGeom prst="ellipse">
-            <a:avLst/>
-          </a:prstGeom>
-          <a:solidFill>
-            <a:srgbClr val="2A9D8F"/>
-          </a:solidFill>
-          <a:ln>
-            <a:noFill/>
-          </a:ln>
-          <a:effectLst/>
-        </p:spPr>
-        <p:style>
-          <a:lnRef idx="1">
-            <a:schemeClr val="accent1"/>
-          </a:lnRef>
-          <a:fillRef idx="3">
-            <a:schemeClr val="accent1"/>
-          </a:fillRef>
-          <a:effectRef idx="2">
-            <a:schemeClr val="accent1"/>
-          </a:effectRef>
-          <a:fontRef idx="minor">
-            <a:schemeClr val="lt1"/>
-          </a:fontRef>
-        </p:style>
-        <p:txBody>
-          <a:bodyPr rtlCol="0" anchor="ctr"/>
-          <a:lstStyle/>
-          <a:p>
-            <a:pPr algn="ctr"/>
-          </a:p>
-        </p:txBody>
-      </p:sp>
-      <p:sp>
-        <p:nvSpPr>
-          <p:cNvPr id="9" name="TextBox 8"/>
-          <p:cNvSpPr txBox="1"/>
-          <p:nvPr/>
-        </p:nvSpPr>
-        <p:spPr>
-          <a:xfrm>
-            <a:off x="1005840" y="2240280"/>
-            <a:ext cx="731520" cy="731520"/>
-          </a:xfrm>
-          <a:prstGeom prst="rect">
-            <a:avLst/>
-          </a:prstGeom>
-          <a:noFill/>
-        </p:spPr>
-        <p:txBody>
-          <a:bodyPr wrap="square" anchor="ctr" lIns="0" rIns="0" tIns="0" bIns="0">
-            <a:spAutoFit/>
-          </a:bodyPr>
-          <a:lstStyle/>
-          <a:p>
-            <a:pPr algn="ctr"/>
-            <a:r>
-              <a:rPr sz="3000" b="1" i="0">
-                <a:solidFill>
-                  <a:srgbClr val="FFFFFF"/>
-                </a:solidFill>
-                <a:latin typeface="Calibri"/>
-              </a:rPr>
-              <a:t>✓</a:t>
-            </a:r>
-          </a:p>
-        </p:txBody>
-      </p:sp>
-      <p:sp>
-        <p:nvSpPr>
-          <p:cNvPr id="10" name="TextBox 9"/>
-          <p:cNvSpPr txBox="1"/>
-          <p:nvPr/>
-        </p:nvSpPr>
-        <p:spPr>
-          <a:xfrm>
-            <a:off x="1920240" y="1828800"/>
-            <a:ext cx="9326880" cy="1554480"/>
-          </a:xfrm>
-          <a:prstGeom prst="rect">
-            <a:avLst/>
-          </a:prstGeom>
-          <a:noFill/>
-        </p:spPr>
-        <p:txBody>
-          <a:bodyPr wrap="square" anchor="ctr" lIns="0" rIns="0" tIns="0" bIns="0">
-            <a:spAutoFit/>
-          </a:bodyPr>
-          <a:lstStyle/>
-          <a:p>
-            <a:pPr algn="l"/>
-            <a:r>
-              <a:rPr sz="2200" b="1" i="0">
-                <a:solidFill>
-                  <a:srgbClr val="1D2433"/>
-                </a:solidFill>
-                <a:latin typeface="Calibri"/>
-              </a:rPr>
-              <a:t>C. The Earth's shadow</a:t>
-            </a:r>
-          </a:p>
-        </p:txBody>
-      </p:sp>
-      <p:sp>
-        <p:nvSpPr>
-          <p:cNvPr id="11" name="Rounded Rectangle 10"/>
-          <p:cNvSpPr/>
-          <p:nvPr/>
-        </p:nvSpPr>
-        <p:spPr>
-          <a:xfrm>
-            <a:off x="640080" y="3657600"/>
-            <a:ext cx="10881360" cy="2011680"/>
-          </a:xfrm>
-          <a:prstGeom prst="roundRect">
-            <a:avLst>
-              <a:gd name="adj" fmla="val 3000"/>
             </a:avLst>
           </a:prstGeom>
           <a:solidFill>
@@ -20524,68 +24228,840 @@
       </p:sp>
       <p:sp>
         <p:nvSpPr>
+          <p:cNvPr id="8" name="TextBox 7"/>
+          <p:cNvSpPr txBox="1"/>
+          <p:nvPr/>
+        </p:nvSpPr>
+        <p:spPr>
+          <a:xfrm>
+            <a:off x="1005840" y="1828800"/>
+            <a:ext cx="10149840" cy="1554480"/>
+          </a:xfrm>
+          <a:prstGeom prst="rect">
+            <a:avLst/>
+          </a:prstGeom>
+          <a:noFill/>
+        </p:spPr>
+        <p:txBody>
+          <a:bodyPr wrap="square" anchor="ctr" lIns="0" rIns="0" tIns="0" bIns="0">
+            <a:spAutoFit/>
+          </a:bodyPr>
+          <a:lstStyle/>
+          <a:p>
+            <a:pPr algn="l"/>
+            <a:r>
+              <a:rPr sz="1900" b="1" i="0">
+                <a:solidFill>
+                  <a:srgbClr val="1D2433"/>
+                </a:solidFill>
+                <a:latin typeface="Calibri"/>
+              </a:rPr>
+              <a:t>In a lunar eclipse, whose shadow falls on the Moon?</a:t>
+            </a:r>
+          </a:p>
+        </p:txBody>
+      </p:sp>
+      <p:sp>
+        <p:nvSpPr>
+          <p:cNvPr id="9" name="Rounded Rectangle 8"/>
+          <p:cNvSpPr/>
+          <p:nvPr/>
+        </p:nvSpPr>
+        <p:spPr>
+          <a:xfrm>
+            <a:off x="640080" y="3749039"/>
+            <a:ext cx="5349240" cy="868680"/>
+          </a:xfrm>
+          <a:prstGeom prst="roundRect">
+            <a:avLst>
+              <a:gd name="adj" fmla="val 12000"/>
+            </a:avLst>
+          </a:prstGeom>
+          <a:solidFill>
+            <a:srgbClr val="EAF1F4"/>
+          </a:solidFill>
+          <a:ln>
+            <a:noFill/>
+          </a:ln>
+          <a:effectLst/>
+        </p:spPr>
+        <p:style>
+          <a:lnRef idx="1">
+            <a:schemeClr val="accent1"/>
+          </a:lnRef>
+          <a:fillRef idx="3">
+            <a:schemeClr val="accent1"/>
+          </a:fillRef>
+          <a:effectRef idx="2">
+            <a:schemeClr val="accent1"/>
+          </a:effectRef>
+          <a:fontRef idx="minor">
+            <a:schemeClr val="lt1"/>
+          </a:fontRef>
+        </p:style>
+        <p:txBody>
+          <a:bodyPr rtlCol="0" anchor="ctr"/>
+          <a:lstStyle/>
+          <a:p>
+            <a:pPr algn="ctr"/>
+          </a:p>
+        </p:txBody>
+      </p:sp>
+      <p:sp>
+        <p:nvSpPr>
+          <p:cNvPr id="10" name="Oval 9"/>
+          <p:cNvSpPr/>
+          <p:nvPr/>
+        </p:nvSpPr>
+        <p:spPr>
+          <a:xfrm>
+            <a:off x="914400" y="3977639"/>
+            <a:ext cx="411480" cy="411480"/>
+          </a:xfrm>
+          <a:prstGeom prst="ellipse">
+            <a:avLst/>
+          </a:prstGeom>
+          <a:solidFill>
+            <a:srgbClr val="0A9396"/>
+          </a:solidFill>
+          <a:ln>
+            <a:noFill/>
+          </a:ln>
+          <a:effectLst/>
+        </p:spPr>
+        <p:style>
+          <a:lnRef idx="1">
+            <a:schemeClr val="accent1"/>
+          </a:lnRef>
+          <a:fillRef idx="3">
+            <a:schemeClr val="accent1"/>
+          </a:fillRef>
+          <a:effectRef idx="2">
+            <a:schemeClr val="accent1"/>
+          </a:effectRef>
+          <a:fontRef idx="minor">
+            <a:schemeClr val="lt1"/>
+          </a:fontRef>
+        </p:style>
+        <p:txBody>
+          <a:bodyPr rtlCol="0" anchor="ctr"/>
+          <a:lstStyle/>
+          <a:p>
+            <a:pPr algn="ctr"/>
+          </a:p>
+        </p:txBody>
+      </p:sp>
+      <p:sp>
+        <p:nvSpPr>
+          <p:cNvPr id="11" name="TextBox 10"/>
+          <p:cNvSpPr txBox="1"/>
+          <p:nvPr/>
+        </p:nvSpPr>
+        <p:spPr>
+          <a:xfrm>
+            <a:off x="914400" y="3977639"/>
+            <a:ext cx="411480" cy="411480"/>
+          </a:xfrm>
+          <a:prstGeom prst="rect">
+            <a:avLst/>
+          </a:prstGeom>
+          <a:noFill/>
+        </p:spPr>
+        <p:txBody>
+          <a:bodyPr wrap="square" anchor="ctr" lIns="0" rIns="0" tIns="0" bIns="0">
+            <a:spAutoFit/>
+          </a:bodyPr>
+          <a:lstStyle/>
+          <a:p>
+            <a:pPr algn="ctr"/>
+            <a:r>
+              <a:rPr sz="1400" b="1" i="0">
+                <a:solidFill>
+                  <a:srgbClr val="FFFFFF"/>
+                </a:solidFill>
+                <a:latin typeface="Calibri"/>
+              </a:rPr>
+              <a:t>A</a:t>
+            </a:r>
+          </a:p>
+        </p:txBody>
+      </p:sp>
+      <p:sp>
+        <p:nvSpPr>
           <p:cNvPr id="12" name="TextBox 11"/>
           <p:cNvSpPr txBox="1"/>
           <p:nvPr/>
         </p:nvSpPr>
         <p:spPr>
           <a:xfrm>
-            <a:off x="1005840" y="3886200"/>
-            <a:ext cx="4572000" cy="365760"/>
-          </a:xfrm>
-          <a:prstGeom prst="rect">
-            <a:avLst/>
-          </a:prstGeom>
-          <a:noFill/>
-        </p:spPr>
-        <p:txBody>
-          <a:bodyPr wrap="square" anchor="t" lIns="0" rIns="0" tIns="0" bIns="0">
+            <a:off x="1508760" y="3749039"/>
+            <a:ext cx="3840480" cy="868680"/>
+          </a:xfrm>
+          <a:prstGeom prst="rect">
+            <a:avLst/>
+          </a:prstGeom>
+          <a:noFill/>
+        </p:spPr>
+        <p:txBody>
+          <a:bodyPr wrap="square" anchor="ctr" lIns="0" rIns="0" tIns="0" bIns="0">
             <a:spAutoFit/>
           </a:bodyPr>
           <a:lstStyle/>
           <a:p>
             <a:pPr algn="l"/>
             <a:r>
+              <a:rPr sz="1450" b="0" i="0">
+                <a:solidFill>
+                  <a:srgbClr val="1D2433"/>
+                </a:solidFill>
+                <a:latin typeface="Calibri"/>
+              </a:rPr>
+              <a:t>The Moon's own shadow</a:t>
+            </a:r>
+          </a:p>
+        </p:txBody>
+      </p:sp>
+      <p:sp>
+        <p:nvSpPr>
+          <p:cNvPr id="13" name="Rounded Rectangle 12"/>
+          <p:cNvSpPr/>
+          <p:nvPr/>
+        </p:nvSpPr>
+        <p:spPr>
+          <a:xfrm>
+            <a:off x="6172200" y="3749039"/>
+            <a:ext cx="5349240" cy="868680"/>
+          </a:xfrm>
+          <a:prstGeom prst="roundRect">
+            <a:avLst>
+              <a:gd name="adj" fmla="val 12000"/>
+            </a:avLst>
+          </a:prstGeom>
+          <a:solidFill>
+            <a:srgbClr val="EAF1F4"/>
+          </a:solidFill>
+          <a:ln>
+            <a:noFill/>
+          </a:ln>
+          <a:effectLst/>
+        </p:spPr>
+        <p:style>
+          <a:lnRef idx="1">
+            <a:schemeClr val="accent1"/>
+          </a:lnRef>
+          <a:fillRef idx="3">
+            <a:schemeClr val="accent1"/>
+          </a:fillRef>
+          <a:effectRef idx="2">
+            <a:schemeClr val="accent1"/>
+          </a:effectRef>
+          <a:fontRef idx="minor">
+            <a:schemeClr val="lt1"/>
+          </a:fontRef>
+        </p:style>
+        <p:txBody>
+          <a:bodyPr rtlCol="0" anchor="ctr"/>
+          <a:lstStyle/>
+          <a:p>
+            <a:pPr algn="ctr"/>
+          </a:p>
+        </p:txBody>
+      </p:sp>
+      <p:sp>
+        <p:nvSpPr>
+          <p:cNvPr id="14" name="Oval 13"/>
+          <p:cNvSpPr/>
+          <p:nvPr/>
+        </p:nvSpPr>
+        <p:spPr>
+          <a:xfrm>
+            <a:off x="6446520" y="3977639"/>
+            <a:ext cx="411480" cy="411480"/>
+          </a:xfrm>
+          <a:prstGeom prst="ellipse">
+            <a:avLst/>
+          </a:prstGeom>
+          <a:solidFill>
+            <a:srgbClr val="0A9396"/>
+          </a:solidFill>
+          <a:ln>
+            <a:noFill/>
+          </a:ln>
+          <a:effectLst/>
+        </p:spPr>
+        <p:style>
+          <a:lnRef idx="1">
+            <a:schemeClr val="accent1"/>
+          </a:lnRef>
+          <a:fillRef idx="3">
+            <a:schemeClr val="accent1"/>
+          </a:fillRef>
+          <a:effectRef idx="2">
+            <a:schemeClr val="accent1"/>
+          </a:effectRef>
+          <a:fontRef idx="minor">
+            <a:schemeClr val="lt1"/>
+          </a:fontRef>
+        </p:style>
+        <p:txBody>
+          <a:bodyPr rtlCol="0" anchor="ctr"/>
+          <a:lstStyle/>
+          <a:p>
+            <a:pPr algn="ctr"/>
+          </a:p>
+        </p:txBody>
+      </p:sp>
+      <p:sp>
+        <p:nvSpPr>
+          <p:cNvPr id="15" name="TextBox 14"/>
+          <p:cNvSpPr txBox="1"/>
+          <p:nvPr/>
+        </p:nvSpPr>
+        <p:spPr>
+          <a:xfrm>
+            <a:off x="6446520" y="3977639"/>
+            <a:ext cx="411480" cy="411480"/>
+          </a:xfrm>
+          <a:prstGeom prst="rect">
+            <a:avLst/>
+          </a:prstGeom>
+          <a:noFill/>
+        </p:spPr>
+        <p:txBody>
+          <a:bodyPr wrap="square" anchor="ctr" lIns="0" rIns="0" tIns="0" bIns="0">
+            <a:spAutoFit/>
+          </a:bodyPr>
+          <a:lstStyle/>
+          <a:p>
+            <a:pPr algn="ctr"/>
+            <a:r>
               <a:rPr sz="1400" b="1" i="0">
                 <a:solidFill>
+                  <a:srgbClr val="FFFFFF"/>
+                </a:solidFill>
+                <a:latin typeface="Calibri"/>
+              </a:rPr>
+              <a:t>B</a:t>
+            </a:r>
+          </a:p>
+        </p:txBody>
+      </p:sp>
+      <p:sp>
+        <p:nvSpPr>
+          <p:cNvPr id="16" name="TextBox 15"/>
+          <p:cNvSpPr txBox="1"/>
+          <p:nvPr/>
+        </p:nvSpPr>
+        <p:spPr>
+          <a:xfrm>
+            <a:off x="7040880" y="3749039"/>
+            <a:ext cx="3840480" cy="868680"/>
+          </a:xfrm>
+          <a:prstGeom prst="rect">
+            <a:avLst/>
+          </a:prstGeom>
+          <a:noFill/>
+        </p:spPr>
+        <p:txBody>
+          <a:bodyPr wrap="square" anchor="ctr" lIns="0" rIns="0" tIns="0" bIns="0">
+            <a:spAutoFit/>
+          </a:bodyPr>
+          <a:lstStyle/>
+          <a:p>
+            <a:pPr algn="l"/>
+            <a:r>
+              <a:rPr sz="1450" b="0" i="0">
+                <a:solidFill>
+                  <a:srgbClr val="1D2433"/>
+                </a:solidFill>
+                <a:latin typeface="Calibri"/>
+              </a:rPr>
+              <a:t>The Sun's shadow</a:t>
+            </a:r>
+          </a:p>
+        </p:txBody>
+      </p:sp>
+      <p:sp>
+        <p:nvSpPr>
+          <p:cNvPr id="17" name="Rounded Rectangle 16"/>
+          <p:cNvSpPr/>
+          <p:nvPr/>
+        </p:nvSpPr>
+        <p:spPr>
+          <a:xfrm>
+            <a:off x="640080" y="4782312"/>
+            <a:ext cx="5349240" cy="868680"/>
+          </a:xfrm>
+          <a:prstGeom prst="roundRect">
+            <a:avLst>
+              <a:gd name="adj" fmla="val 12000"/>
+            </a:avLst>
+          </a:prstGeom>
+          <a:solidFill>
+            <a:srgbClr val="E9F5F0"/>
+          </a:solidFill>
+          <a:ln w="31750">
+            <a:solidFill>
+              <a:srgbClr val="2A9D8F"/>
+            </a:solidFill>
+          </a:ln>
+          <a:effectLst/>
+        </p:spPr>
+        <p:style>
+          <a:lnRef idx="1">
+            <a:schemeClr val="accent1"/>
+          </a:lnRef>
+          <a:fillRef idx="3">
+            <a:schemeClr val="accent1"/>
+          </a:fillRef>
+          <a:effectRef idx="2">
+            <a:schemeClr val="accent1"/>
+          </a:effectRef>
+          <a:fontRef idx="minor">
+            <a:schemeClr val="lt1"/>
+          </a:fontRef>
+        </p:style>
+        <p:txBody>
+          <a:bodyPr rtlCol="0" anchor="ctr"/>
+          <a:lstStyle/>
+          <a:p>
+            <a:pPr algn="ctr"/>
+          </a:p>
+        </p:txBody>
+      </p:sp>
+      <p:sp>
+        <p:nvSpPr>
+          <p:cNvPr id="18" name="Oval 17"/>
+          <p:cNvSpPr/>
+          <p:nvPr/>
+        </p:nvSpPr>
+        <p:spPr>
+          <a:xfrm>
+            <a:off x="914400" y="5010912"/>
+            <a:ext cx="411480" cy="411480"/>
+          </a:xfrm>
+          <a:prstGeom prst="ellipse">
+            <a:avLst/>
+          </a:prstGeom>
+          <a:solidFill>
+            <a:srgbClr val="2A9D8F"/>
+          </a:solidFill>
+          <a:ln>
+            <a:noFill/>
+          </a:ln>
+          <a:effectLst/>
+        </p:spPr>
+        <p:style>
+          <a:lnRef idx="1">
+            <a:schemeClr val="accent1"/>
+          </a:lnRef>
+          <a:fillRef idx="3">
+            <a:schemeClr val="accent1"/>
+          </a:fillRef>
+          <a:effectRef idx="2">
+            <a:schemeClr val="accent1"/>
+          </a:effectRef>
+          <a:fontRef idx="minor">
+            <a:schemeClr val="lt1"/>
+          </a:fontRef>
+        </p:style>
+        <p:txBody>
+          <a:bodyPr rtlCol="0" anchor="ctr"/>
+          <a:lstStyle/>
+          <a:p>
+            <a:pPr algn="ctr"/>
+          </a:p>
+        </p:txBody>
+      </p:sp>
+      <p:sp>
+        <p:nvSpPr>
+          <p:cNvPr id="19" name="TextBox 18"/>
+          <p:cNvSpPr txBox="1"/>
+          <p:nvPr/>
+        </p:nvSpPr>
+        <p:spPr>
+          <a:xfrm>
+            <a:off x="914400" y="5010912"/>
+            <a:ext cx="411480" cy="411480"/>
+          </a:xfrm>
+          <a:prstGeom prst="rect">
+            <a:avLst/>
+          </a:prstGeom>
+          <a:noFill/>
+        </p:spPr>
+        <p:txBody>
+          <a:bodyPr wrap="square" anchor="ctr" lIns="0" rIns="0" tIns="0" bIns="0">
+            <a:spAutoFit/>
+          </a:bodyPr>
+          <a:lstStyle/>
+          <a:p>
+            <a:pPr algn="ctr"/>
+            <a:r>
+              <a:rPr sz="1400" b="1" i="0">
+                <a:solidFill>
+                  <a:srgbClr val="FFFFFF"/>
+                </a:solidFill>
+                <a:latin typeface="Calibri"/>
+              </a:rPr>
+              <a:t>C</a:t>
+            </a:r>
+          </a:p>
+        </p:txBody>
+      </p:sp>
+      <p:sp>
+        <p:nvSpPr>
+          <p:cNvPr id="20" name="TextBox 19"/>
+          <p:cNvSpPr txBox="1"/>
+          <p:nvPr/>
+        </p:nvSpPr>
+        <p:spPr>
+          <a:xfrm>
+            <a:off x="1508760" y="4782312"/>
+            <a:ext cx="3840480" cy="868680"/>
+          </a:xfrm>
+          <a:prstGeom prst="rect">
+            <a:avLst/>
+          </a:prstGeom>
+          <a:noFill/>
+        </p:spPr>
+        <p:txBody>
+          <a:bodyPr wrap="square" anchor="ctr" lIns="0" rIns="0" tIns="0" bIns="0">
+            <a:spAutoFit/>
+          </a:bodyPr>
+          <a:lstStyle/>
+          <a:p>
+            <a:pPr algn="l"/>
+            <a:r>
+              <a:rPr sz="1450" b="1" i="0">
+                <a:solidFill>
+                  <a:srgbClr val="1D2433"/>
+                </a:solidFill>
+                <a:latin typeface="Calibri"/>
+              </a:rPr>
+              <a:t>The Earth's shadow</a:t>
+            </a:r>
+          </a:p>
+        </p:txBody>
+      </p:sp>
+      <p:sp>
+        <p:nvSpPr>
+          <p:cNvPr id="21" name="Oval 20"/>
+          <p:cNvSpPr/>
+          <p:nvPr/>
+        </p:nvSpPr>
+        <p:spPr>
+          <a:xfrm>
+            <a:off x="5440680" y="5029200"/>
+            <a:ext cx="365760" cy="365760"/>
+          </a:xfrm>
+          <a:prstGeom prst="ellipse">
+            <a:avLst/>
+          </a:prstGeom>
+          <a:solidFill>
+            <a:srgbClr val="2A9D8F"/>
+          </a:solidFill>
+          <a:ln>
+            <a:noFill/>
+          </a:ln>
+          <a:effectLst/>
+        </p:spPr>
+        <p:style>
+          <a:lnRef idx="1">
+            <a:schemeClr val="accent1"/>
+          </a:lnRef>
+          <a:fillRef idx="3">
+            <a:schemeClr val="accent1"/>
+          </a:fillRef>
+          <a:effectRef idx="2">
+            <a:schemeClr val="accent1"/>
+          </a:effectRef>
+          <a:fontRef idx="minor">
+            <a:schemeClr val="lt1"/>
+          </a:fontRef>
+        </p:style>
+        <p:txBody>
+          <a:bodyPr rtlCol="0" anchor="ctr"/>
+          <a:lstStyle/>
+          <a:p>
+            <a:pPr algn="ctr"/>
+          </a:p>
+        </p:txBody>
+      </p:sp>
+      <p:sp>
+        <p:nvSpPr>
+          <p:cNvPr id="22" name="TextBox 21"/>
+          <p:cNvSpPr txBox="1"/>
+          <p:nvPr/>
+        </p:nvSpPr>
+        <p:spPr>
+          <a:xfrm>
+            <a:off x="5440680" y="4983479"/>
+            <a:ext cx="365760" cy="365760"/>
+          </a:xfrm>
+          <a:prstGeom prst="rect">
+            <a:avLst/>
+          </a:prstGeom>
+          <a:noFill/>
+        </p:spPr>
+        <p:txBody>
+          <a:bodyPr wrap="square" anchor="ctr" lIns="0" rIns="0" tIns="0" bIns="0">
+            <a:spAutoFit/>
+          </a:bodyPr>
+          <a:lstStyle/>
+          <a:p>
+            <a:pPr algn="ctr"/>
+            <a:r>
+              <a:rPr sz="1600" b="1" i="0">
+                <a:solidFill>
+                  <a:srgbClr val="FFFFFF"/>
+                </a:solidFill>
+                <a:latin typeface="Calibri"/>
+              </a:rPr>
+              <a:t>✓</a:t>
+            </a:r>
+          </a:p>
+        </p:txBody>
+      </p:sp>
+      <p:sp>
+        <p:nvSpPr>
+          <p:cNvPr id="23" name="Rounded Rectangle 22"/>
+          <p:cNvSpPr/>
+          <p:nvPr/>
+        </p:nvSpPr>
+        <p:spPr>
+          <a:xfrm>
+            <a:off x="6172200" y="4782312"/>
+            <a:ext cx="5349240" cy="868680"/>
+          </a:xfrm>
+          <a:prstGeom prst="roundRect">
+            <a:avLst>
+              <a:gd name="adj" fmla="val 12000"/>
+            </a:avLst>
+          </a:prstGeom>
+          <a:solidFill>
+            <a:srgbClr val="EAF1F4"/>
+          </a:solidFill>
+          <a:ln>
+            <a:noFill/>
+          </a:ln>
+          <a:effectLst/>
+        </p:spPr>
+        <p:style>
+          <a:lnRef idx="1">
+            <a:schemeClr val="accent1"/>
+          </a:lnRef>
+          <a:fillRef idx="3">
+            <a:schemeClr val="accent1"/>
+          </a:fillRef>
+          <a:effectRef idx="2">
+            <a:schemeClr val="accent1"/>
+          </a:effectRef>
+          <a:fontRef idx="minor">
+            <a:schemeClr val="lt1"/>
+          </a:fontRef>
+        </p:style>
+        <p:txBody>
+          <a:bodyPr rtlCol="0" anchor="ctr"/>
+          <a:lstStyle/>
+          <a:p>
+            <a:pPr algn="ctr"/>
+          </a:p>
+        </p:txBody>
+      </p:sp>
+      <p:sp>
+        <p:nvSpPr>
+          <p:cNvPr id="24" name="Oval 23"/>
+          <p:cNvSpPr/>
+          <p:nvPr/>
+        </p:nvSpPr>
+        <p:spPr>
+          <a:xfrm>
+            <a:off x="6446520" y="5010912"/>
+            <a:ext cx="411480" cy="411480"/>
+          </a:xfrm>
+          <a:prstGeom prst="ellipse">
+            <a:avLst/>
+          </a:prstGeom>
+          <a:solidFill>
+            <a:srgbClr val="0A9396"/>
+          </a:solidFill>
+          <a:ln>
+            <a:noFill/>
+          </a:ln>
+          <a:effectLst/>
+        </p:spPr>
+        <p:style>
+          <a:lnRef idx="1">
+            <a:schemeClr val="accent1"/>
+          </a:lnRef>
+          <a:fillRef idx="3">
+            <a:schemeClr val="accent1"/>
+          </a:fillRef>
+          <a:effectRef idx="2">
+            <a:schemeClr val="accent1"/>
+          </a:effectRef>
+          <a:fontRef idx="minor">
+            <a:schemeClr val="lt1"/>
+          </a:fontRef>
+        </p:style>
+        <p:txBody>
+          <a:bodyPr rtlCol="0" anchor="ctr"/>
+          <a:lstStyle/>
+          <a:p>
+            <a:pPr algn="ctr"/>
+          </a:p>
+        </p:txBody>
+      </p:sp>
+      <p:sp>
+        <p:nvSpPr>
+          <p:cNvPr id="25" name="TextBox 24"/>
+          <p:cNvSpPr txBox="1"/>
+          <p:nvPr/>
+        </p:nvSpPr>
+        <p:spPr>
+          <a:xfrm>
+            <a:off x="6446520" y="5010912"/>
+            <a:ext cx="411480" cy="411480"/>
+          </a:xfrm>
+          <a:prstGeom prst="rect">
+            <a:avLst/>
+          </a:prstGeom>
+          <a:noFill/>
+        </p:spPr>
+        <p:txBody>
+          <a:bodyPr wrap="square" anchor="ctr" lIns="0" rIns="0" tIns="0" bIns="0">
+            <a:spAutoFit/>
+          </a:bodyPr>
+          <a:lstStyle/>
+          <a:p>
+            <a:pPr algn="ctr"/>
+            <a:r>
+              <a:rPr sz="1400" b="1" i="0">
+                <a:solidFill>
+                  <a:srgbClr val="FFFFFF"/>
+                </a:solidFill>
+                <a:latin typeface="Calibri"/>
+              </a:rPr>
+              <a:t>D</a:t>
+            </a:r>
+          </a:p>
+        </p:txBody>
+      </p:sp>
+      <p:sp>
+        <p:nvSpPr>
+          <p:cNvPr id="26" name="TextBox 25"/>
+          <p:cNvSpPr txBox="1"/>
+          <p:nvPr/>
+        </p:nvSpPr>
+        <p:spPr>
+          <a:xfrm>
+            <a:off x="7040880" y="4782312"/>
+            <a:ext cx="3840480" cy="868680"/>
+          </a:xfrm>
+          <a:prstGeom prst="rect">
+            <a:avLst/>
+          </a:prstGeom>
+          <a:noFill/>
+        </p:spPr>
+        <p:txBody>
+          <a:bodyPr wrap="square" anchor="ctr" lIns="0" rIns="0" tIns="0" bIns="0">
+            <a:spAutoFit/>
+          </a:bodyPr>
+          <a:lstStyle/>
+          <a:p>
+            <a:pPr algn="l"/>
+            <a:r>
+              <a:rPr sz="1450" b="0" i="0">
+                <a:solidFill>
+                  <a:srgbClr val="1D2433"/>
+                </a:solidFill>
+                <a:latin typeface="Calibri"/>
+              </a:rPr>
+              <a:t>A cloud's shadow</a:t>
+            </a:r>
+          </a:p>
+        </p:txBody>
+      </p:sp>
+      <p:sp>
+        <p:nvSpPr>
+          <p:cNvPr id="27" name="Rounded Rectangle 26"/>
+          <p:cNvSpPr/>
+          <p:nvPr/>
+        </p:nvSpPr>
+        <p:spPr>
+          <a:xfrm>
+            <a:off x="640080" y="5779008"/>
+            <a:ext cx="10881360" cy="566928"/>
+          </a:xfrm>
+          <a:prstGeom prst="roundRect">
+            <a:avLst>
+              <a:gd name="adj" fmla="val 10000"/>
+            </a:avLst>
+          </a:prstGeom>
+          <a:solidFill>
+            <a:srgbClr val="EEF2F7"/>
+          </a:solidFill>
+          <a:ln>
+            <a:noFill/>
+          </a:ln>
+          <a:effectLst/>
+        </p:spPr>
+        <p:style>
+          <a:lnRef idx="1">
+            <a:schemeClr val="accent1"/>
+          </a:lnRef>
+          <a:fillRef idx="3">
+            <a:schemeClr val="accent1"/>
+          </a:fillRef>
+          <a:effectRef idx="2">
+            <a:schemeClr val="accent1"/>
+          </a:effectRef>
+          <a:fontRef idx="minor">
+            <a:schemeClr val="lt1"/>
+          </a:fontRef>
+        </p:style>
+        <p:txBody>
+          <a:bodyPr rtlCol="0" anchor="ctr"/>
+          <a:lstStyle/>
+          <a:p>
+            <a:pPr algn="ctr"/>
+          </a:p>
+        </p:txBody>
+      </p:sp>
+      <p:sp>
+        <p:nvSpPr>
+          <p:cNvPr id="28" name="TextBox 27"/>
+          <p:cNvSpPr txBox="1"/>
+          <p:nvPr/>
+        </p:nvSpPr>
+        <p:spPr>
+          <a:xfrm>
+            <a:off x="914400" y="5779008"/>
+            <a:ext cx="10332720" cy="566928"/>
+          </a:xfrm>
+          <a:prstGeom prst="rect">
+            <a:avLst/>
+          </a:prstGeom>
+          <a:noFill/>
+        </p:spPr>
+        <p:txBody>
+          <a:bodyPr wrap="square" anchor="ctr" lIns="0" rIns="0" tIns="0" bIns="0">
+            <a:spAutoFit/>
+          </a:bodyPr>
+          <a:lstStyle/>
+          <a:p>
+            <a:pPr algn="l"/>
+            <a:r>
+              <a:rPr sz="1250" b="1" i="0">
+                <a:solidFill>
                   <a:srgbClr val="2A9D8F"/>
                 </a:solidFill>
                 <a:latin typeface="Arial"/>
               </a:rPr>
-              <a:t>WHY</a:t>
-            </a:r>
-          </a:p>
-        </p:txBody>
-      </p:sp>
-      <p:sp>
-        <p:nvSpPr>
-          <p:cNvPr id="13" name="TextBox 12"/>
-          <p:cNvSpPr txBox="1"/>
-          <p:nvPr/>
-        </p:nvSpPr>
-        <p:spPr>
-          <a:xfrm>
-            <a:off x="1005840" y="4297680"/>
-            <a:ext cx="10149840" cy="1280160"/>
-          </a:xfrm>
-          <a:prstGeom prst="rect">
-            <a:avLst/>
-          </a:prstGeom>
-          <a:noFill/>
-        </p:spPr>
-        <p:txBody>
-          <a:bodyPr wrap="square" anchor="t" lIns="0" rIns="0" tIns="0" bIns="0">
-            <a:spAutoFit/>
-          </a:bodyPr>
-          <a:lstStyle/>
-          <a:p>
-            <a:pPr algn="l">
-              <a:lnSpc>
-                <a:spcPct val="110000"/>
-              </a:lnSpc>
-            </a:pPr>
-            <a:r>
-              <a:rPr sz="1600" b="0" i="0">
+              <a:t>Why  </a:t>
+            </a:r>
+            <a:r>
+              <a:rPr sz="1200" b="0" i="0">
                 <a:solidFill>
                   <a:srgbClr val="1D2433"/>
                 </a:solidFill>
@@ -20731,7 +25207,7 @@
                 </a:solidFill>
                 <a:latin typeface="Calibri"/>
               </a:rPr>
-              <a:t>Q4 — Duration</a:t>
+              <a:t>Q4 - Duration</a:t>
             </a:r>
           </a:p>
         </p:txBody>
@@ -21027,7 +25503,7 @@
         <p:spPr>
           <a:xfrm>
             <a:off x="1508760" y="3749039"/>
-            <a:ext cx="4297680" cy="868680"/>
+            <a:ext cx="3840480" cy="868680"/>
           </a:xfrm>
           <a:prstGeom prst="rect">
             <a:avLst/>
@@ -21187,7 +25663,7 @@
         <p:spPr>
           <a:xfrm>
             <a:off x="7040880" y="3749039"/>
-            <a:ext cx="4297680" cy="868680"/>
+            <a:ext cx="3840480" cy="868680"/>
           </a:xfrm>
           <a:prstGeom prst="rect">
             <a:avLst/>
@@ -21347,7 +25823,7 @@
         <p:spPr>
           <a:xfrm>
             <a:off x="1508760" y="4782312"/>
-            <a:ext cx="4297680" cy="868680"/>
+            <a:ext cx="3840480" cy="868680"/>
           </a:xfrm>
           <a:prstGeom prst="rect">
             <a:avLst/>
@@ -21507,7 +25983,7 @@
         <p:spPr>
           <a:xfrm>
             <a:off x="7040880" y="4782312"/>
-            <a:ext cx="4297680" cy="868680"/>
+            <a:ext cx="3840480" cy="868680"/>
           </a:xfrm>
           <a:prstGeom prst="rect">
             <a:avLst/>
@@ -21574,7 +26050,7 @@
             <a:avLst/>
           </a:prstGeom>
           <a:solidFill>
-            <a:srgbClr val="2A9D8F"/>
+            <a:srgbClr val="0A9396"/>
           </a:solidFill>
           <a:ln>
             <a:noFill/>
@@ -21629,11 +26105,11 @@
             <a:r>
               <a:rPr sz="1300" b="1" i="0">
                 <a:solidFill>
-                  <a:srgbClr val="2A9D8F"/>
+                  <a:srgbClr val="0A9396"/>
                 </a:solidFill>
                 <a:latin typeface="Arial"/>
               </a:rPr>
-              <a:t>ANSWER REVEAL</a:t>
+              <a:t>QUIZ QUESTION</a:t>
             </a:r>
           </a:p>
         </p:txBody>
@@ -21668,7 +26144,7 @@
                 </a:solidFill>
                 <a:latin typeface="Calibri"/>
               </a:rPr>
-              <a:t>Q4 — Answer</a:t>
+              <a:t>Q4 - Duration</a:t>
             </a:r>
           </a:p>
         </p:txBody>
@@ -21757,166 +26233,6 @@
           <a:prstGeom prst="roundRect">
             <a:avLst>
               <a:gd name="adj" fmla="val 4000"/>
-            </a:avLst>
-          </a:prstGeom>
-          <a:solidFill>
-            <a:srgbClr val="E9F5F0"/>
-          </a:solidFill>
-          <a:ln>
-            <a:noFill/>
-          </a:ln>
-          <a:effectLst/>
-        </p:spPr>
-        <p:style>
-          <a:lnRef idx="1">
-            <a:schemeClr val="accent1"/>
-          </a:lnRef>
-          <a:fillRef idx="3">
-            <a:schemeClr val="accent1"/>
-          </a:fillRef>
-          <a:effectRef idx="2">
-            <a:schemeClr val="accent1"/>
-          </a:effectRef>
-          <a:fontRef idx="minor">
-            <a:schemeClr val="lt1"/>
-          </a:fontRef>
-        </p:style>
-        <p:txBody>
-          <a:bodyPr rtlCol="0" anchor="ctr"/>
-          <a:lstStyle/>
-          <a:p>
-            <a:pPr algn="ctr"/>
-          </a:p>
-        </p:txBody>
-      </p:sp>
-      <p:sp>
-        <p:nvSpPr>
-          <p:cNvPr id="8" name="Oval 7"/>
-          <p:cNvSpPr/>
-          <p:nvPr/>
-        </p:nvSpPr>
-        <p:spPr>
-          <a:xfrm>
-            <a:off x="1005840" y="2240280"/>
-            <a:ext cx="731520" cy="731520"/>
-          </a:xfrm>
-          <a:prstGeom prst="ellipse">
-            <a:avLst/>
-          </a:prstGeom>
-          <a:solidFill>
-            <a:srgbClr val="2A9D8F"/>
-          </a:solidFill>
-          <a:ln>
-            <a:noFill/>
-          </a:ln>
-          <a:effectLst/>
-        </p:spPr>
-        <p:style>
-          <a:lnRef idx="1">
-            <a:schemeClr val="accent1"/>
-          </a:lnRef>
-          <a:fillRef idx="3">
-            <a:schemeClr val="accent1"/>
-          </a:fillRef>
-          <a:effectRef idx="2">
-            <a:schemeClr val="accent1"/>
-          </a:effectRef>
-          <a:fontRef idx="minor">
-            <a:schemeClr val="lt1"/>
-          </a:fontRef>
-        </p:style>
-        <p:txBody>
-          <a:bodyPr rtlCol="0" anchor="ctr"/>
-          <a:lstStyle/>
-          <a:p>
-            <a:pPr algn="ctr"/>
-          </a:p>
-        </p:txBody>
-      </p:sp>
-      <p:sp>
-        <p:nvSpPr>
-          <p:cNvPr id="9" name="TextBox 8"/>
-          <p:cNvSpPr txBox="1"/>
-          <p:nvPr/>
-        </p:nvSpPr>
-        <p:spPr>
-          <a:xfrm>
-            <a:off x="1005840" y="2240280"/>
-            <a:ext cx="731520" cy="731520"/>
-          </a:xfrm>
-          <a:prstGeom prst="rect">
-            <a:avLst/>
-          </a:prstGeom>
-          <a:noFill/>
-        </p:spPr>
-        <p:txBody>
-          <a:bodyPr wrap="square" anchor="ctr" lIns="0" rIns="0" tIns="0" bIns="0">
-            <a:spAutoFit/>
-          </a:bodyPr>
-          <a:lstStyle/>
-          <a:p>
-            <a:pPr algn="ctr"/>
-            <a:r>
-              <a:rPr sz="3000" b="1" i="0">
-                <a:solidFill>
-                  <a:srgbClr val="FFFFFF"/>
-                </a:solidFill>
-                <a:latin typeface="Calibri"/>
-              </a:rPr>
-              <a:t>✓</a:t>
-            </a:r>
-          </a:p>
-        </p:txBody>
-      </p:sp>
-      <p:sp>
-        <p:nvSpPr>
-          <p:cNvPr id="10" name="TextBox 9"/>
-          <p:cNvSpPr txBox="1"/>
-          <p:nvPr/>
-        </p:nvSpPr>
-        <p:spPr>
-          <a:xfrm>
-            <a:off x="1920240" y="1828800"/>
-            <a:ext cx="9326880" cy="1554480"/>
-          </a:xfrm>
-          <a:prstGeom prst="rect">
-            <a:avLst/>
-          </a:prstGeom>
-          <a:noFill/>
-        </p:spPr>
-        <p:txBody>
-          <a:bodyPr wrap="square" anchor="ctr" lIns="0" rIns="0" tIns="0" bIns="0">
-            <a:spAutoFit/>
-          </a:bodyPr>
-          <a:lstStyle/>
-          <a:p>
-            <a:pPr algn="l"/>
-            <a:r>
-              <a:rPr sz="2200" b="1" i="0">
-                <a:solidFill>
-                  <a:srgbClr val="1D2433"/>
-                </a:solidFill>
-                <a:latin typeface="Calibri"/>
-              </a:rPr>
-              <a:t>B. Lasts longer and is seen from more places</a:t>
-            </a:r>
-          </a:p>
-        </p:txBody>
-      </p:sp>
-      <p:sp>
-        <p:nvSpPr>
-          <p:cNvPr id="11" name="Rounded Rectangle 10"/>
-          <p:cNvSpPr/>
-          <p:nvPr/>
-        </p:nvSpPr>
-        <p:spPr>
-          <a:xfrm>
-            <a:off x="640080" y="3657600"/>
-            <a:ext cx="10881360" cy="2011680"/>
-          </a:xfrm>
-          <a:prstGeom prst="roundRect">
-            <a:avLst>
-              <a:gd name="adj" fmla="val 3000"/>
             </a:avLst>
           </a:prstGeom>
           <a:solidFill>
@@ -21957,68 +26273,840 @@
       </p:sp>
       <p:sp>
         <p:nvSpPr>
+          <p:cNvPr id="8" name="TextBox 7"/>
+          <p:cNvSpPr txBox="1"/>
+          <p:nvPr/>
+        </p:nvSpPr>
+        <p:spPr>
+          <a:xfrm>
+            <a:off x="1005840" y="1828800"/>
+            <a:ext cx="10149840" cy="1554480"/>
+          </a:xfrm>
+          <a:prstGeom prst="rect">
+            <a:avLst/>
+          </a:prstGeom>
+          <a:noFill/>
+        </p:spPr>
+        <p:txBody>
+          <a:bodyPr wrap="square" anchor="ctr" lIns="0" rIns="0" tIns="0" bIns="0">
+            <a:spAutoFit/>
+          </a:bodyPr>
+          <a:lstStyle/>
+          <a:p>
+            <a:pPr algn="l"/>
+            <a:r>
+              <a:rPr sz="1900" b="1" i="0">
+                <a:solidFill>
+                  <a:srgbClr val="1D2433"/>
+                </a:solidFill>
+                <a:latin typeface="Calibri"/>
+              </a:rPr>
+              <a:t>Compared with a solar eclipse, a lunar eclipse:</a:t>
+            </a:r>
+          </a:p>
+        </p:txBody>
+      </p:sp>
+      <p:sp>
+        <p:nvSpPr>
+          <p:cNvPr id="9" name="Rounded Rectangle 8"/>
+          <p:cNvSpPr/>
+          <p:nvPr/>
+        </p:nvSpPr>
+        <p:spPr>
+          <a:xfrm>
+            <a:off x="640080" y="3749039"/>
+            <a:ext cx="5349240" cy="868680"/>
+          </a:xfrm>
+          <a:prstGeom prst="roundRect">
+            <a:avLst>
+              <a:gd name="adj" fmla="val 12000"/>
+            </a:avLst>
+          </a:prstGeom>
+          <a:solidFill>
+            <a:srgbClr val="EAF1F4"/>
+          </a:solidFill>
+          <a:ln>
+            <a:noFill/>
+          </a:ln>
+          <a:effectLst/>
+        </p:spPr>
+        <p:style>
+          <a:lnRef idx="1">
+            <a:schemeClr val="accent1"/>
+          </a:lnRef>
+          <a:fillRef idx="3">
+            <a:schemeClr val="accent1"/>
+          </a:fillRef>
+          <a:effectRef idx="2">
+            <a:schemeClr val="accent1"/>
+          </a:effectRef>
+          <a:fontRef idx="minor">
+            <a:schemeClr val="lt1"/>
+          </a:fontRef>
+        </p:style>
+        <p:txBody>
+          <a:bodyPr rtlCol="0" anchor="ctr"/>
+          <a:lstStyle/>
+          <a:p>
+            <a:pPr algn="ctr"/>
+          </a:p>
+        </p:txBody>
+      </p:sp>
+      <p:sp>
+        <p:nvSpPr>
+          <p:cNvPr id="10" name="Oval 9"/>
+          <p:cNvSpPr/>
+          <p:nvPr/>
+        </p:nvSpPr>
+        <p:spPr>
+          <a:xfrm>
+            <a:off x="914400" y="3977639"/>
+            <a:ext cx="411480" cy="411480"/>
+          </a:xfrm>
+          <a:prstGeom prst="ellipse">
+            <a:avLst/>
+          </a:prstGeom>
+          <a:solidFill>
+            <a:srgbClr val="0A9396"/>
+          </a:solidFill>
+          <a:ln>
+            <a:noFill/>
+          </a:ln>
+          <a:effectLst/>
+        </p:spPr>
+        <p:style>
+          <a:lnRef idx="1">
+            <a:schemeClr val="accent1"/>
+          </a:lnRef>
+          <a:fillRef idx="3">
+            <a:schemeClr val="accent1"/>
+          </a:fillRef>
+          <a:effectRef idx="2">
+            <a:schemeClr val="accent1"/>
+          </a:effectRef>
+          <a:fontRef idx="minor">
+            <a:schemeClr val="lt1"/>
+          </a:fontRef>
+        </p:style>
+        <p:txBody>
+          <a:bodyPr rtlCol="0" anchor="ctr"/>
+          <a:lstStyle/>
+          <a:p>
+            <a:pPr algn="ctr"/>
+          </a:p>
+        </p:txBody>
+      </p:sp>
+      <p:sp>
+        <p:nvSpPr>
+          <p:cNvPr id="11" name="TextBox 10"/>
+          <p:cNvSpPr txBox="1"/>
+          <p:nvPr/>
+        </p:nvSpPr>
+        <p:spPr>
+          <a:xfrm>
+            <a:off x="914400" y="3977639"/>
+            <a:ext cx="411480" cy="411480"/>
+          </a:xfrm>
+          <a:prstGeom prst="rect">
+            <a:avLst/>
+          </a:prstGeom>
+          <a:noFill/>
+        </p:spPr>
+        <p:txBody>
+          <a:bodyPr wrap="square" anchor="ctr" lIns="0" rIns="0" tIns="0" bIns="0">
+            <a:spAutoFit/>
+          </a:bodyPr>
+          <a:lstStyle/>
+          <a:p>
+            <a:pPr algn="ctr"/>
+            <a:r>
+              <a:rPr sz="1400" b="1" i="0">
+                <a:solidFill>
+                  <a:srgbClr val="FFFFFF"/>
+                </a:solidFill>
+                <a:latin typeface="Calibri"/>
+              </a:rPr>
+              <a:t>A</a:t>
+            </a:r>
+          </a:p>
+        </p:txBody>
+      </p:sp>
+      <p:sp>
+        <p:nvSpPr>
           <p:cNvPr id="12" name="TextBox 11"/>
           <p:cNvSpPr txBox="1"/>
           <p:nvPr/>
         </p:nvSpPr>
         <p:spPr>
           <a:xfrm>
-            <a:off x="1005840" y="3886200"/>
-            <a:ext cx="4572000" cy="365760"/>
-          </a:xfrm>
-          <a:prstGeom prst="rect">
-            <a:avLst/>
-          </a:prstGeom>
-          <a:noFill/>
-        </p:spPr>
-        <p:txBody>
-          <a:bodyPr wrap="square" anchor="t" lIns="0" rIns="0" tIns="0" bIns="0">
+            <a:off x="1508760" y="3749039"/>
+            <a:ext cx="3840480" cy="868680"/>
+          </a:xfrm>
+          <a:prstGeom prst="rect">
+            <a:avLst/>
+          </a:prstGeom>
+          <a:noFill/>
+        </p:spPr>
+        <p:txBody>
+          <a:bodyPr wrap="square" anchor="ctr" lIns="0" rIns="0" tIns="0" bIns="0">
             <a:spAutoFit/>
           </a:bodyPr>
           <a:lstStyle/>
           <a:p>
             <a:pPr algn="l"/>
             <a:r>
+              <a:rPr sz="1450" b="0" i="0">
+                <a:solidFill>
+                  <a:srgbClr val="1D2433"/>
+                </a:solidFill>
+                <a:latin typeface="Calibri"/>
+              </a:rPr>
+              <a:t>Is much shorter</a:t>
+            </a:r>
+          </a:p>
+        </p:txBody>
+      </p:sp>
+      <p:sp>
+        <p:nvSpPr>
+          <p:cNvPr id="13" name="Rounded Rectangle 12"/>
+          <p:cNvSpPr/>
+          <p:nvPr/>
+        </p:nvSpPr>
+        <p:spPr>
+          <a:xfrm>
+            <a:off x="6172200" y="3749039"/>
+            <a:ext cx="5349240" cy="868680"/>
+          </a:xfrm>
+          <a:prstGeom prst="roundRect">
+            <a:avLst>
+              <a:gd name="adj" fmla="val 12000"/>
+            </a:avLst>
+          </a:prstGeom>
+          <a:solidFill>
+            <a:srgbClr val="E9F5F0"/>
+          </a:solidFill>
+          <a:ln w="31750">
+            <a:solidFill>
+              <a:srgbClr val="2A9D8F"/>
+            </a:solidFill>
+          </a:ln>
+          <a:effectLst/>
+        </p:spPr>
+        <p:style>
+          <a:lnRef idx="1">
+            <a:schemeClr val="accent1"/>
+          </a:lnRef>
+          <a:fillRef idx="3">
+            <a:schemeClr val="accent1"/>
+          </a:fillRef>
+          <a:effectRef idx="2">
+            <a:schemeClr val="accent1"/>
+          </a:effectRef>
+          <a:fontRef idx="minor">
+            <a:schemeClr val="lt1"/>
+          </a:fontRef>
+        </p:style>
+        <p:txBody>
+          <a:bodyPr rtlCol="0" anchor="ctr"/>
+          <a:lstStyle/>
+          <a:p>
+            <a:pPr algn="ctr"/>
+          </a:p>
+        </p:txBody>
+      </p:sp>
+      <p:sp>
+        <p:nvSpPr>
+          <p:cNvPr id="14" name="Oval 13"/>
+          <p:cNvSpPr/>
+          <p:nvPr/>
+        </p:nvSpPr>
+        <p:spPr>
+          <a:xfrm>
+            <a:off x="6446520" y="3977639"/>
+            <a:ext cx="411480" cy="411480"/>
+          </a:xfrm>
+          <a:prstGeom prst="ellipse">
+            <a:avLst/>
+          </a:prstGeom>
+          <a:solidFill>
+            <a:srgbClr val="2A9D8F"/>
+          </a:solidFill>
+          <a:ln>
+            <a:noFill/>
+          </a:ln>
+          <a:effectLst/>
+        </p:spPr>
+        <p:style>
+          <a:lnRef idx="1">
+            <a:schemeClr val="accent1"/>
+          </a:lnRef>
+          <a:fillRef idx="3">
+            <a:schemeClr val="accent1"/>
+          </a:fillRef>
+          <a:effectRef idx="2">
+            <a:schemeClr val="accent1"/>
+          </a:effectRef>
+          <a:fontRef idx="minor">
+            <a:schemeClr val="lt1"/>
+          </a:fontRef>
+        </p:style>
+        <p:txBody>
+          <a:bodyPr rtlCol="0" anchor="ctr"/>
+          <a:lstStyle/>
+          <a:p>
+            <a:pPr algn="ctr"/>
+          </a:p>
+        </p:txBody>
+      </p:sp>
+      <p:sp>
+        <p:nvSpPr>
+          <p:cNvPr id="15" name="TextBox 14"/>
+          <p:cNvSpPr txBox="1"/>
+          <p:nvPr/>
+        </p:nvSpPr>
+        <p:spPr>
+          <a:xfrm>
+            <a:off x="6446520" y="3977639"/>
+            <a:ext cx="411480" cy="411480"/>
+          </a:xfrm>
+          <a:prstGeom prst="rect">
+            <a:avLst/>
+          </a:prstGeom>
+          <a:noFill/>
+        </p:spPr>
+        <p:txBody>
+          <a:bodyPr wrap="square" anchor="ctr" lIns="0" rIns="0" tIns="0" bIns="0">
+            <a:spAutoFit/>
+          </a:bodyPr>
+          <a:lstStyle/>
+          <a:p>
+            <a:pPr algn="ctr"/>
+            <a:r>
               <a:rPr sz="1400" b="1" i="0">
                 <a:solidFill>
+                  <a:srgbClr val="FFFFFF"/>
+                </a:solidFill>
+                <a:latin typeface="Calibri"/>
+              </a:rPr>
+              <a:t>B</a:t>
+            </a:r>
+          </a:p>
+        </p:txBody>
+      </p:sp>
+      <p:sp>
+        <p:nvSpPr>
+          <p:cNvPr id="16" name="TextBox 15"/>
+          <p:cNvSpPr txBox="1"/>
+          <p:nvPr/>
+        </p:nvSpPr>
+        <p:spPr>
+          <a:xfrm>
+            <a:off x="7040880" y="3749039"/>
+            <a:ext cx="3840480" cy="868680"/>
+          </a:xfrm>
+          <a:prstGeom prst="rect">
+            <a:avLst/>
+          </a:prstGeom>
+          <a:noFill/>
+        </p:spPr>
+        <p:txBody>
+          <a:bodyPr wrap="square" anchor="ctr" lIns="0" rIns="0" tIns="0" bIns="0">
+            <a:spAutoFit/>
+          </a:bodyPr>
+          <a:lstStyle/>
+          <a:p>
+            <a:pPr algn="l"/>
+            <a:r>
+              <a:rPr sz="1450" b="1" i="0">
+                <a:solidFill>
+                  <a:srgbClr val="1D2433"/>
+                </a:solidFill>
+                <a:latin typeface="Calibri"/>
+              </a:rPr>
+              <a:t>Lasts longer and is seen from more places</a:t>
+            </a:r>
+          </a:p>
+        </p:txBody>
+      </p:sp>
+      <p:sp>
+        <p:nvSpPr>
+          <p:cNvPr id="17" name="Oval 16"/>
+          <p:cNvSpPr/>
+          <p:nvPr/>
+        </p:nvSpPr>
+        <p:spPr>
+          <a:xfrm>
+            <a:off x="10972800" y="3995927"/>
+            <a:ext cx="365760" cy="365760"/>
+          </a:xfrm>
+          <a:prstGeom prst="ellipse">
+            <a:avLst/>
+          </a:prstGeom>
+          <a:solidFill>
+            <a:srgbClr val="2A9D8F"/>
+          </a:solidFill>
+          <a:ln>
+            <a:noFill/>
+          </a:ln>
+          <a:effectLst/>
+        </p:spPr>
+        <p:style>
+          <a:lnRef idx="1">
+            <a:schemeClr val="accent1"/>
+          </a:lnRef>
+          <a:fillRef idx="3">
+            <a:schemeClr val="accent1"/>
+          </a:fillRef>
+          <a:effectRef idx="2">
+            <a:schemeClr val="accent1"/>
+          </a:effectRef>
+          <a:fontRef idx="minor">
+            <a:schemeClr val="lt1"/>
+          </a:fontRef>
+        </p:style>
+        <p:txBody>
+          <a:bodyPr rtlCol="0" anchor="ctr"/>
+          <a:lstStyle/>
+          <a:p>
+            <a:pPr algn="ctr"/>
+          </a:p>
+        </p:txBody>
+      </p:sp>
+      <p:sp>
+        <p:nvSpPr>
+          <p:cNvPr id="18" name="TextBox 17"/>
+          <p:cNvSpPr txBox="1"/>
+          <p:nvPr/>
+        </p:nvSpPr>
+        <p:spPr>
+          <a:xfrm>
+            <a:off x="10972800" y="3950207"/>
+            <a:ext cx="365760" cy="365760"/>
+          </a:xfrm>
+          <a:prstGeom prst="rect">
+            <a:avLst/>
+          </a:prstGeom>
+          <a:noFill/>
+        </p:spPr>
+        <p:txBody>
+          <a:bodyPr wrap="square" anchor="ctr" lIns="0" rIns="0" tIns="0" bIns="0">
+            <a:spAutoFit/>
+          </a:bodyPr>
+          <a:lstStyle/>
+          <a:p>
+            <a:pPr algn="ctr"/>
+            <a:r>
+              <a:rPr sz="1600" b="1" i="0">
+                <a:solidFill>
+                  <a:srgbClr val="FFFFFF"/>
+                </a:solidFill>
+                <a:latin typeface="Calibri"/>
+              </a:rPr>
+              <a:t>✓</a:t>
+            </a:r>
+          </a:p>
+        </p:txBody>
+      </p:sp>
+      <p:sp>
+        <p:nvSpPr>
+          <p:cNvPr id="19" name="Rounded Rectangle 18"/>
+          <p:cNvSpPr/>
+          <p:nvPr/>
+        </p:nvSpPr>
+        <p:spPr>
+          <a:xfrm>
+            <a:off x="640080" y="4782312"/>
+            <a:ext cx="5349240" cy="868680"/>
+          </a:xfrm>
+          <a:prstGeom prst="roundRect">
+            <a:avLst>
+              <a:gd name="adj" fmla="val 12000"/>
+            </a:avLst>
+          </a:prstGeom>
+          <a:solidFill>
+            <a:srgbClr val="EAF1F4"/>
+          </a:solidFill>
+          <a:ln>
+            <a:noFill/>
+          </a:ln>
+          <a:effectLst/>
+        </p:spPr>
+        <p:style>
+          <a:lnRef idx="1">
+            <a:schemeClr val="accent1"/>
+          </a:lnRef>
+          <a:fillRef idx="3">
+            <a:schemeClr val="accent1"/>
+          </a:fillRef>
+          <a:effectRef idx="2">
+            <a:schemeClr val="accent1"/>
+          </a:effectRef>
+          <a:fontRef idx="minor">
+            <a:schemeClr val="lt1"/>
+          </a:fontRef>
+        </p:style>
+        <p:txBody>
+          <a:bodyPr rtlCol="0" anchor="ctr"/>
+          <a:lstStyle/>
+          <a:p>
+            <a:pPr algn="ctr"/>
+          </a:p>
+        </p:txBody>
+      </p:sp>
+      <p:sp>
+        <p:nvSpPr>
+          <p:cNvPr id="20" name="Oval 19"/>
+          <p:cNvSpPr/>
+          <p:nvPr/>
+        </p:nvSpPr>
+        <p:spPr>
+          <a:xfrm>
+            <a:off x="914400" y="5010912"/>
+            <a:ext cx="411480" cy="411480"/>
+          </a:xfrm>
+          <a:prstGeom prst="ellipse">
+            <a:avLst/>
+          </a:prstGeom>
+          <a:solidFill>
+            <a:srgbClr val="0A9396"/>
+          </a:solidFill>
+          <a:ln>
+            <a:noFill/>
+          </a:ln>
+          <a:effectLst/>
+        </p:spPr>
+        <p:style>
+          <a:lnRef idx="1">
+            <a:schemeClr val="accent1"/>
+          </a:lnRef>
+          <a:fillRef idx="3">
+            <a:schemeClr val="accent1"/>
+          </a:fillRef>
+          <a:effectRef idx="2">
+            <a:schemeClr val="accent1"/>
+          </a:effectRef>
+          <a:fontRef idx="minor">
+            <a:schemeClr val="lt1"/>
+          </a:fontRef>
+        </p:style>
+        <p:txBody>
+          <a:bodyPr rtlCol="0" anchor="ctr"/>
+          <a:lstStyle/>
+          <a:p>
+            <a:pPr algn="ctr"/>
+          </a:p>
+        </p:txBody>
+      </p:sp>
+      <p:sp>
+        <p:nvSpPr>
+          <p:cNvPr id="21" name="TextBox 20"/>
+          <p:cNvSpPr txBox="1"/>
+          <p:nvPr/>
+        </p:nvSpPr>
+        <p:spPr>
+          <a:xfrm>
+            <a:off x="914400" y="5010912"/>
+            <a:ext cx="411480" cy="411480"/>
+          </a:xfrm>
+          <a:prstGeom prst="rect">
+            <a:avLst/>
+          </a:prstGeom>
+          <a:noFill/>
+        </p:spPr>
+        <p:txBody>
+          <a:bodyPr wrap="square" anchor="ctr" lIns="0" rIns="0" tIns="0" bIns="0">
+            <a:spAutoFit/>
+          </a:bodyPr>
+          <a:lstStyle/>
+          <a:p>
+            <a:pPr algn="ctr"/>
+            <a:r>
+              <a:rPr sz="1400" b="1" i="0">
+                <a:solidFill>
+                  <a:srgbClr val="FFFFFF"/>
+                </a:solidFill>
+                <a:latin typeface="Calibri"/>
+              </a:rPr>
+              <a:t>C</a:t>
+            </a:r>
+          </a:p>
+        </p:txBody>
+      </p:sp>
+      <p:sp>
+        <p:nvSpPr>
+          <p:cNvPr id="22" name="TextBox 21"/>
+          <p:cNvSpPr txBox="1"/>
+          <p:nvPr/>
+        </p:nvSpPr>
+        <p:spPr>
+          <a:xfrm>
+            <a:off x="1508760" y="4782312"/>
+            <a:ext cx="3840480" cy="868680"/>
+          </a:xfrm>
+          <a:prstGeom prst="rect">
+            <a:avLst/>
+          </a:prstGeom>
+          <a:noFill/>
+        </p:spPr>
+        <p:txBody>
+          <a:bodyPr wrap="square" anchor="ctr" lIns="0" rIns="0" tIns="0" bIns="0">
+            <a:spAutoFit/>
+          </a:bodyPr>
+          <a:lstStyle/>
+          <a:p>
+            <a:pPr algn="l"/>
+            <a:r>
+              <a:rPr sz="1450" b="0" i="0">
+                <a:solidFill>
+                  <a:srgbClr val="1D2433"/>
+                </a:solidFill>
+                <a:latin typeface="Calibri"/>
+              </a:rPr>
+              <a:t>Cannot be seen</a:t>
+            </a:r>
+          </a:p>
+        </p:txBody>
+      </p:sp>
+      <p:sp>
+        <p:nvSpPr>
+          <p:cNvPr id="23" name="Rounded Rectangle 22"/>
+          <p:cNvSpPr/>
+          <p:nvPr/>
+        </p:nvSpPr>
+        <p:spPr>
+          <a:xfrm>
+            <a:off x="6172200" y="4782312"/>
+            <a:ext cx="5349240" cy="868680"/>
+          </a:xfrm>
+          <a:prstGeom prst="roundRect">
+            <a:avLst>
+              <a:gd name="adj" fmla="val 12000"/>
+            </a:avLst>
+          </a:prstGeom>
+          <a:solidFill>
+            <a:srgbClr val="EAF1F4"/>
+          </a:solidFill>
+          <a:ln>
+            <a:noFill/>
+          </a:ln>
+          <a:effectLst/>
+        </p:spPr>
+        <p:style>
+          <a:lnRef idx="1">
+            <a:schemeClr val="accent1"/>
+          </a:lnRef>
+          <a:fillRef idx="3">
+            <a:schemeClr val="accent1"/>
+          </a:fillRef>
+          <a:effectRef idx="2">
+            <a:schemeClr val="accent1"/>
+          </a:effectRef>
+          <a:fontRef idx="minor">
+            <a:schemeClr val="lt1"/>
+          </a:fontRef>
+        </p:style>
+        <p:txBody>
+          <a:bodyPr rtlCol="0" anchor="ctr"/>
+          <a:lstStyle/>
+          <a:p>
+            <a:pPr algn="ctr"/>
+          </a:p>
+        </p:txBody>
+      </p:sp>
+      <p:sp>
+        <p:nvSpPr>
+          <p:cNvPr id="24" name="Oval 23"/>
+          <p:cNvSpPr/>
+          <p:nvPr/>
+        </p:nvSpPr>
+        <p:spPr>
+          <a:xfrm>
+            <a:off x="6446520" y="5010912"/>
+            <a:ext cx="411480" cy="411480"/>
+          </a:xfrm>
+          <a:prstGeom prst="ellipse">
+            <a:avLst/>
+          </a:prstGeom>
+          <a:solidFill>
+            <a:srgbClr val="0A9396"/>
+          </a:solidFill>
+          <a:ln>
+            <a:noFill/>
+          </a:ln>
+          <a:effectLst/>
+        </p:spPr>
+        <p:style>
+          <a:lnRef idx="1">
+            <a:schemeClr val="accent1"/>
+          </a:lnRef>
+          <a:fillRef idx="3">
+            <a:schemeClr val="accent1"/>
+          </a:fillRef>
+          <a:effectRef idx="2">
+            <a:schemeClr val="accent1"/>
+          </a:effectRef>
+          <a:fontRef idx="minor">
+            <a:schemeClr val="lt1"/>
+          </a:fontRef>
+        </p:style>
+        <p:txBody>
+          <a:bodyPr rtlCol="0" anchor="ctr"/>
+          <a:lstStyle/>
+          <a:p>
+            <a:pPr algn="ctr"/>
+          </a:p>
+        </p:txBody>
+      </p:sp>
+      <p:sp>
+        <p:nvSpPr>
+          <p:cNvPr id="25" name="TextBox 24"/>
+          <p:cNvSpPr txBox="1"/>
+          <p:nvPr/>
+        </p:nvSpPr>
+        <p:spPr>
+          <a:xfrm>
+            <a:off x="6446520" y="5010912"/>
+            <a:ext cx="411480" cy="411480"/>
+          </a:xfrm>
+          <a:prstGeom prst="rect">
+            <a:avLst/>
+          </a:prstGeom>
+          <a:noFill/>
+        </p:spPr>
+        <p:txBody>
+          <a:bodyPr wrap="square" anchor="ctr" lIns="0" rIns="0" tIns="0" bIns="0">
+            <a:spAutoFit/>
+          </a:bodyPr>
+          <a:lstStyle/>
+          <a:p>
+            <a:pPr algn="ctr"/>
+            <a:r>
+              <a:rPr sz="1400" b="1" i="0">
+                <a:solidFill>
+                  <a:srgbClr val="FFFFFF"/>
+                </a:solidFill>
+                <a:latin typeface="Calibri"/>
+              </a:rPr>
+              <a:t>D</a:t>
+            </a:r>
+          </a:p>
+        </p:txBody>
+      </p:sp>
+      <p:sp>
+        <p:nvSpPr>
+          <p:cNvPr id="26" name="TextBox 25"/>
+          <p:cNvSpPr txBox="1"/>
+          <p:nvPr/>
+        </p:nvSpPr>
+        <p:spPr>
+          <a:xfrm>
+            <a:off x="7040880" y="4782312"/>
+            <a:ext cx="3840480" cy="868680"/>
+          </a:xfrm>
+          <a:prstGeom prst="rect">
+            <a:avLst/>
+          </a:prstGeom>
+          <a:noFill/>
+        </p:spPr>
+        <p:txBody>
+          <a:bodyPr wrap="square" anchor="ctr" lIns="0" rIns="0" tIns="0" bIns="0">
+            <a:spAutoFit/>
+          </a:bodyPr>
+          <a:lstStyle/>
+          <a:p>
+            <a:pPr algn="l"/>
+            <a:r>
+              <a:rPr sz="1450" b="0" i="0">
+                <a:solidFill>
+                  <a:srgbClr val="1D2433"/>
+                </a:solidFill>
+                <a:latin typeface="Calibri"/>
+              </a:rPr>
+              <a:t>Happens at new moon</a:t>
+            </a:r>
+          </a:p>
+        </p:txBody>
+      </p:sp>
+      <p:sp>
+        <p:nvSpPr>
+          <p:cNvPr id="27" name="Rounded Rectangle 26"/>
+          <p:cNvSpPr/>
+          <p:nvPr/>
+        </p:nvSpPr>
+        <p:spPr>
+          <a:xfrm>
+            <a:off x="640080" y="5779008"/>
+            <a:ext cx="10881360" cy="566928"/>
+          </a:xfrm>
+          <a:prstGeom prst="roundRect">
+            <a:avLst>
+              <a:gd name="adj" fmla="val 10000"/>
+            </a:avLst>
+          </a:prstGeom>
+          <a:solidFill>
+            <a:srgbClr val="EEF2F7"/>
+          </a:solidFill>
+          <a:ln>
+            <a:noFill/>
+          </a:ln>
+          <a:effectLst/>
+        </p:spPr>
+        <p:style>
+          <a:lnRef idx="1">
+            <a:schemeClr val="accent1"/>
+          </a:lnRef>
+          <a:fillRef idx="3">
+            <a:schemeClr val="accent1"/>
+          </a:fillRef>
+          <a:effectRef idx="2">
+            <a:schemeClr val="accent1"/>
+          </a:effectRef>
+          <a:fontRef idx="minor">
+            <a:schemeClr val="lt1"/>
+          </a:fontRef>
+        </p:style>
+        <p:txBody>
+          <a:bodyPr rtlCol="0" anchor="ctr"/>
+          <a:lstStyle/>
+          <a:p>
+            <a:pPr algn="ctr"/>
+          </a:p>
+        </p:txBody>
+      </p:sp>
+      <p:sp>
+        <p:nvSpPr>
+          <p:cNvPr id="28" name="TextBox 27"/>
+          <p:cNvSpPr txBox="1"/>
+          <p:nvPr/>
+        </p:nvSpPr>
+        <p:spPr>
+          <a:xfrm>
+            <a:off x="914400" y="5779008"/>
+            <a:ext cx="10332720" cy="566928"/>
+          </a:xfrm>
+          <a:prstGeom prst="rect">
+            <a:avLst/>
+          </a:prstGeom>
+          <a:noFill/>
+        </p:spPr>
+        <p:txBody>
+          <a:bodyPr wrap="square" anchor="ctr" lIns="0" rIns="0" tIns="0" bIns="0">
+            <a:spAutoFit/>
+          </a:bodyPr>
+          <a:lstStyle/>
+          <a:p>
+            <a:pPr algn="l"/>
+            <a:r>
+              <a:rPr sz="1250" b="1" i="0">
+                <a:solidFill>
                   <a:srgbClr val="2A9D8F"/>
                 </a:solidFill>
                 <a:latin typeface="Arial"/>
               </a:rPr>
-              <a:t>WHY</a:t>
-            </a:r>
-          </a:p>
-        </p:txBody>
-      </p:sp>
-      <p:sp>
-        <p:nvSpPr>
-          <p:cNvPr id="13" name="TextBox 12"/>
-          <p:cNvSpPr txBox="1"/>
-          <p:nvPr/>
-        </p:nvSpPr>
-        <p:spPr>
-          <a:xfrm>
-            <a:off x="1005840" y="4297680"/>
-            <a:ext cx="10149840" cy="1280160"/>
-          </a:xfrm>
-          <a:prstGeom prst="rect">
-            <a:avLst/>
-          </a:prstGeom>
-          <a:noFill/>
-        </p:spPr>
-        <p:txBody>
-          <a:bodyPr wrap="square" anchor="t" lIns="0" rIns="0" tIns="0" bIns="0">
-            <a:spAutoFit/>
-          </a:bodyPr>
-          <a:lstStyle/>
-          <a:p>
-            <a:pPr algn="l">
-              <a:lnSpc>
-                <a:spcPct val="110000"/>
-              </a:lnSpc>
-            </a:pPr>
-            <a:r>
-              <a:rPr sz="1600" b="0" i="0">
+              <a:t>Why  </a:t>
+            </a:r>
+            <a:r>
+              <a:rPr sz="1200" b="0" i="0">
                 <a:solidFill>
                   <a:srgbClr val="1D2433"/>
                 </a:solidFill>
@@ -23552,9 +28640,33 @@
           </a:p>
         </p:txBody>
       </p:sp>
-      <p:sp>
-        <p:nvSpPr>
-          <p:cNvPr id="9" name="TextBox 8"/>
+      <p:pic>
+        <p:nvPicPr>
+          <p:cNvPr id="9" name="Picture 8" descr="icon_star.png"/>
+          <p:cNvPicPr>
+            <a:picLocks noChangeAspect="1"/>
+          </p:cNvPicPr>
+          <p:nvPr/>
+        </p:nvPicPr>
+        <p:blipFill>
+          <a:blip r:embed="rId2"/>
+          <a:stretch>
+            <a:fillRect/>
+          </a:stretch>
+        </p:blipFill>
+        <p:spPr>
+          <a:xfrm>
+            <a:off x="1051560" y="2304288"/>
+            <a:ext cx="320040" cy="320040"/>
+          </a:xfrm>
+          <a:prstGeom prst="rect">
+            <a:avLst/>
+          </a:prstGeom>
+        </p:spPr>
+      </p:pic>
+      <p:sp>
+        <p:nvSpPr>
+          <p:cNvPr id="10" name="TextBox 9"/>
           <p:cNvSpPr txBox="1"/>
           <p:nvPr/>
         </p:nvSpPr>
@@ -23589,7 +28701,7 @@
       </p:sp>
       <p:sp>
         <p:nvSpPr>
-          <p:cNvPr id="10" name="TextBox 9"/>
+          <p:cNvPr id="11" name="TextBox 10"/>
           <p:cNvSpPr txBox="1"/>
           <p:nvPr/>
         </p:nvSpPr>
@@ -23624,7 +28736,7 @@
       </p:sp>
       <p:sp>
         <p:nvSpPr>
-          <p:cNvPr id="11" name="Rounded Rectangle 10"/>
+          <p:cNvPr id="12" name="Rounded Rectangle 11"/>
           <p:cNvSpPr/>
           <p:nvPr/>
         </p:nvSpPr>
@@ -23676,7 +28788,7 @@
       </p:sp>
       <p:sp>
         <p:nvSpPr>
-          <p:cNvPr id="12" name="Rounded Rectangle 11"/>
+          <p:cNvPr id="13" name="Rounded Rectangle 12"/>
           <p:cNvSpPr/>
           <p:nvPr/>
         </p:nvSpPr>
@@ -23720,9 +28832,33 @@
           </a:p>
         </p:txBody>
       </p:sp>
-      <p:sp>
-        <p:nvSpPr>
-          <p:cNvPr id="13" name="TextBox 12"/>
+      <p:pic>
+        <p:nvPicPr>
+          <p:cNvPr id="14" name="Picture 13" descr="icon_camera.png"/>
+          <p:cNvPicPr>
+            <a:picLocks noChangeAspect="1"/>
+          </p:cNvPicPr>
+          <p:nvPr/>
+        </p:nvPicPr>
+        <p:blipFill>
+          <a:blip r:embed="rId3"/>
+          <a:stretch>
+            <a:fillRect/>
+          </a:stretch>
+        </p:blipFill>
+        <p:spPr>
+          <a:xfrm>
+            <a:off x="6629400" y="2304288"/>
+            <a:ext cx="320040" cy="320040"/>
+          </a:xfrm>
+          <a:prstGeom prst="rect">
+            <a:avLst/>
+          </a:prstGeom>
+        </p:spPr>
+      </p:pic>
+      <p:sp>
+        <p:nvSpPr>
+          <p:cNvPr id="15" name="TextBox 14"/>
           <p:cNvSpPr txBox="1"/>
           <p:nvPr/>
         </p:nvSpPr>
@@ -23757,7 +28893,7 @@
       </p:sp>
       <p:sp>
         <p:nvSpPr>
-          <p:cNvPr id="14" name="TextBox 13"/>
+          <p:cNvPr id="16" name="TextBox 15"/>
           <p:cNvSpPr txBox="1"/>
           <p:nvPr/>
         </p:nvSpPr>
@@ -23792,7 +28928,7 @@
       </p:sp>
       <p:sp>
         <p:nvSpPr>
-          <p:cNvPr id="15" name="Rounded Rectangle 14"/>
+          <p:cNvPr id="17" name="Rounded Rectangle 16"/>
           <p:cNvSpPr/>
           <p:nvPr/>
         </p:nvSpPr>
@@ -23844,7 +28980,7 @@
       </p:sp>
       <p:sp>
         <p:nvSpPr>
-          <p:cNvPr id="16" name="Rounded Rectangle 15"/>
+          <p:cNvPr id="18" name="Rounded Rectangle 17"/>
           <p:cNvSpPr/>
           <p:nvPr/>
         </p:nvSpPr>
@@ -23888,9 +29024,33 @@
           </a:p>
         </p:txBody>
       </p:sp>
-      <p:sp>
-        <p:nvSpPr>
-          <p:cNvPr id="17" name="TextBox 16"/>
+      <p:pic>
+        <p:nvPicPr>
+          <p:cNvPr id="19" name="Picture 18" descr="icon_camera.png"/>
+          <p:cNvPicPr>
+            <a:picLocks noChangeAspect="1"/>
+          </p:cNvPicPr>
+          <p:nvPr/>
+        </p:nvPicPr>
+        <p:blipFill>
+          <a:blip r:embed="rId3"/>
+          <a:stretch>
+            <a:fillRect/>
+          </a:stretch>
+        </p:blipFill>
+        <p:spPr>
+          <a:xfrm>
+            <a:off x="1051560" y="4133087"/>
+            <a:ext cx="320040" cy="320040"/>
+          </a:xfrm>
+          <a:prstGeom prst="rect">
+            <a:avLst/>
+          </a:prstGeom>
+        </p:spPr>
+      </p:pic>
+      <p:sp>
+        <p:nvSpPr>
+          <p:cNvPr id="20" name="TextBox 19"/>
           <p:cNvSpPr txBox="1"/>
           <p:nvPr/>
         </p:nvSpPr>
@@ -23925,7 +29085,7 @@
       </p:sp>
       <p:sp>
         <p:nvSpPr>
-          <p:cNvPr id="18" name="TextBox 17"/>
+          <p:cNvPr id="21" name="TextBox 20"/>
           <p:cNvSpPr txBox="1"/>
           <p:nvPr/>
         </p:nvSpPr>
@@ -23960,7 +29120,7 @@
       </p:sp>
       <p:sp>
         <p:nvSpPr>
-          <p:cNvPr id="19" name="Rounded Rectangle 18"/>
+          <p:cNvPr id="22" name="Rounded Rectangle 21"/>
           <p:cNvSpPr/>
           <p:nvPr/>
         </p:nvSpPr>
@@ -24012,7 +29172,7 @@
       </p:sp>
       <p:sp>
         <p:nvSpPr>
-          <p:cNvPr id="20" name="Rounded Rectangle 19"/>
+          <p:cNvPr id="23" name="Rounded Rectangle 22"/>
           <p:cNvSpPr/>
           <p:nvPr/>
         </p:nvSpPr>
@@ -24056,9 +29216,33 @@
           </a:p>
         </p:txBody>
       </p:sp>
-      <p:sp>
-        <p:nvSpPr>
-          <p:cNvPr id="21" name="TextBox 20"/>
+      <p:pic>
+        <p:nvPicPr>
+          <p:cNvPr id="24" name="Picture 23" descr="icon_camera.png"/>
+          <p:cNvPicPr>
+            <a:picLocks noChangeAspect="1"/>
+          </p:cNvPicPr>
+          <p:nvPr/>
+        </p:nvPicPr>
+        <p:blipFill>
+          <a:blip r:embed="rId3"/>
+          <a:stretch>
+            <a:fillRect/>
+          </a:stretch>
+        </p:blipFill>
+        <p:spPr>
+          <a:xfrm>
+            <a:off x="6629400" y="4133087"/>
+            <a:ext cx="320040" cy="320040"/>
+          </a:xfrm>
+          <a:prstGeom prst="rect">
+            <a:avLst/>
+          </a:prstGeom>
+        </p:spPr>
+      </p:pic>
+      <p:sp>
+        <p:nvSpPr>
+          <p:cNvPr id="25" name="TextBox 24"/>
           <p:cNvSpPr txBox="1"/>
           <p:nvPr/>
         </p:nvSpPr>
@@ -24093,7 +29277,7 @@
       </p:sp>
       <p:sp>
         <p:nvSpPr>
-          <p:cNvPr id="22" name="TextBox 21"/>
+          <p:cNvPr id="26" name="TextBox 25"/>
           <p:cNvSpPr txBox="1"/>
           <p:nvPr/>
         </p:nvSpPr>
